--- a/software testing/notes/Week7 SystemTesting (1).pptx
+++ b/software testing/notes/Week7 SystemTesting (1).pptx
@@ -1,29 +1,29 @@
 
 <file path=ppt/presentation.xml><?xml version="1.0" encoding="utf-8"?>
-<p:presentation xmlns:a="http://schemas.openxmlformats.org/drawingml/2006/main" xmlns:r="http://schemas.openxmlformats.org/officeDocument/2006/relationships" xmlns:p="http://schemas.openxmlformats.org/presentationml/2006/main" strictFirstAndLastChars="0" saveSubsetFonts="1" autoCompressPictures="0">
+<p:presentation xmlns:a="http://schemas.openxmlformats.org/drawingml/2006/main" xmlns:r="http://schemas.openxmlformats.org/officeDocument/2006/relationships" xmlns:p="http://schemas.openxmlformats.org/presentationml/2006/main" strictFirstAndLastChars="0" autoCompressPictures="0">
   <p:sldMasterIdLst>
-    <p:sldMasterId id="2147483659" r:id="rId1"/>
+    <p:sldMasterId id="2147483648" r:id="rId1"/>
   </p:sldMasterIdLst>
   <p:notesMasterIdLst>
-    <p:notesMasterId r:id="rId18"/>
+    <p:notesMasterId r:id="rId4"/>
   </p:notesMasterIdLst>
   <p:sldIdLst>
-    <p:sldId id="256" r:id="rId2"/>
-    <p:sldId id="259" r:id="rId3"/>
-    <p:sldId id="257" r:id="rId4"/>
-    <p:sldId id="258" r:id="rId5"/>
-    <p:sldId id="260" r:id="rId6"/>
-    <p:sldId id="261" r:id="rId7"/>
-    <p:sldId id="262" r:id="rId8"/>
-    <p:sldId id="263" r:id="rId9"/>
-    <p:sldId id="264" r:id="rId10"/>
-    <p:sldId id="265" r:id="rId11"/>
-    <p:sldId id="266" r:id="rId12"/>
-    <p:sldId id="267" r:id="rId13"/>
-    <p:sldId id="268" r:id="rId14"/>
-    <p:sldId id="269" r:id="rId15"/>
-    <p:sldId id="270" r:id="rId16"/>
-    <p:sldId id="271" r:id="rId17"/>
+    <p:sldId id="256" r:id="rId3"/>
+    <p:sldId id="259" r:id="rId5"/>
+    <p:sldId id="257" r:id="rId6"/>
+    <p:sldId id="258" r:id="rId7"/>
+    <p:sldId id="260" r:id="rId8"/>
+    <p:sldId id="261" r:id="rId9"/>
+    <p:sldId id="262" r:id="rId10"/>
+    <p:sldId id="263" r:id="rId11"/>
+    <p:sldId id="264" r:id="rId12"/>
+    <p:sldId id="265" r:id="rId13"/>
+    <p:sldId id="266" r:id="rId14"/>
+    <p:sldId id="267" r:id="rId15"/>
+    <p:sldId id="268" r:id="rId16"/>
+    <p:sldId id="269" r:id="rId17"/>
+    <p:sldId id="270" r:id="rId18"/>
+    <p:sldId id="271" r:id="rId19"/>
   </p:sldIdLst>
   <p:sldSz cx="9144000" cy="6858000" type="screen4x3"/>
   <p:notesSz cx="6858000" cy="9144000"/>
@@ -52,15 +52,15 @@
       <a:buClr>
         <a:srgbClr val="000000"/>
       </a:buClr>
-      <a:buFont typeface="Arial"/>
+      <a:buFont typeface="Arial" panose="020B0604020202020204"/>
       <a:defRPr sz="1400" b="0" i="0" u="none" strike="noStrike" cap="none">
         <a:solidFill>
           <a:srgbClr val="000000"/>
         </a:solidFill>
-        <a:latin typeface="Arial"/>
-        <a:ea typeface="Arial"/>
-        <a:cs typeface="Arial"/>
-        <a:sym typeface="Arial"/>
+        <a:latin typeface="Arial" panose="020B0604020202020204"/>
+        <a:ea typeface="Arial" panose="020B0604020202020204"/>
+        <a:cs typeface="Arial" panose="020B0604020202020204"/>
+        <a:sym typeface="Arial" panose="020B0604020202020204"/>
       </a:defRPr>
     </a:lvl1pPr>
     <a:lvl2pPr marR="0" lvl="1" algn="l" rtl="0">
@@ -76,15 +76,15 @@
       <a:buClr>
         <a:srgbClr val="000000"/>
       </a:buClr>
-      <a:buFont typeface="Arial"/>
+      <a:buFont typeface="Arial" panose="020B0604020202020204"/>
       <a:defRPr sz="1400" b="0" i="0" u="none" strike="noStrike" cap="none">
         <a:solidFill>
           <a:srgbClr val="000000"/>
         </a:solidFill>
-        <a:latin typeface="Arial"/>
-        <a:ea typeface="Arial"/>
-        <a:cs typeface="Arial"/>
-        <a:sym typeface="Arial"/>
+        <a:latin typeface="Arial" panose="020B0604020202020204"/>
+        <a:ea typeface="Arial" panose="020B0604020202020204"/>
+        <a:cs typeface="Arial" panose="020B0604020202020204"/>
+        <a:sym typeface="Arial" panose="020B0604020202020204"/>
       </a:defRPr>
     </a:lvl2pPr>
     <a:lvl3pPr marR="0" lvl="2" algn="l" rtl="0">
@@ -100,15 +100,15 @@
       <a:buClr>
         <a:srgbClr val="000000"/>
       </a:buClr>
-      <a:buFont typeface="Arial"/>
+      <a:buFont typeface="Arial" panose="020B0604020202020204"/>
       <a:defRPr sz="1400" b="0" i="0" u="none" strike="noStrike" cap="none">
         <a:solidFill>
           <a:srgbClr val="000000"/>
         </a:solidFill>
-        <a:latin typeface="Arial"/>
-        <a:ea typeface="Arial"/>
-        <a:cs typeface="Arial"/>
-        <a:sym typeface="Arial"/>
+        <a:latin typeface="Arial" panose="020B0604020202020204"/>
+        <a:ea typeface="Arial" panose="020B0604020202020204"/>
+        <a:cs typeface="Arial" panose="020B0604020202020204"/>
+        <a:sym typeface="Arial" panose="020B0604020202020204"/>
       </a:defRPr>
     </a:lvl3pPr>
     <a:lvl4pPr marR="0" lvl="3" algn="l" rtl="0">
@@ -124,15 +124,15 @@
       <a:buClr>
         <a:srgbClr val="000000"/>
       </a:buClr>
-      <a:buFont typeface="Arial"/>
+      <a:buFont typeface="Arial" panose="020B0604020202020204"/>
       <a:defRPr sz="1400" b="0" i="0" u="none" strike="noStrike" cap="none">
         <a:solidFill>
           <a:srgbClr val="000000"/>
         </a:solidFill>
-        <a:latin typeface="Arial"/>
-        <a:ea typeface="Arial"/>
-        <a:cs typeface="Arial"/>
-        <a:sym typeface="Arial"/>
+        <a:latin typeface="Arial" panose="020B0604020202020204"/>
+        <a:ea typeface="Arial" panose="020B0604020202020204"/>
+        <a:cs typeface="Arial" panose="020B0604020202020204"/>
+        <a:sym typeface="Arial" panose="020B0604020202020204"/>
       </a:defRPr>
     </a:lvl4pPr>
     <a:lvl5pPr marR="0" lvl="4" algn="l" rtl="0">
@@ -148,15 +148,15 @@
       <a:buClr>
         <a:srgbClr val="000000"/>
       </a:buClr>
-      <a:buFont typeface="Arial"/>
+      <a:buFont typeface="Arial" panose="020B0604020202020204"/>
       <a:defRPr sz="1400" b="0" i="0" u="none" strike="noStrike" cap="none">
         <a:solidFill>
           <a:srgbClr val="000000"/>
         </a:solidFill>
-        <a:latin typeface="Arial"/>
-        <a:ea typeface="Arial"/>
-        <a:cs typeface="Arial"/>
-        <a:sym typeface="Arial"/>
+        <a:latin typeface="Arial" panose="020B0604020202020204"/>
+        <a:ea typeface="Arial" panose="020B0604020202020204"/>
+        <a:cs typeface="Arial" panose="020B0604020202020204"/>
+        <a:sym typeface="Arial" panose="020B0604020202020204"/>
       </a:defRPr>
     </a:lvl5pPr>
     <a:lvl6pPr marR="0" lvl="5" algn="l" rtl="0">
@@ -172,15 +172,15 @@
       <a:buClr>
         <a:srgbClr val="000000"/>
       </a:buClr>
-      <a:buFont typeface="Arial"/>
+      <a:buFont typeface="Arial" panose="020B0604020202020204"/>
       <a:defRPr sz="1400" b="0" i="0" u="none" strike="noStrike" cap="none">
         <a:solidFill>
           <a:srgbClr val="000000"/>
         </a:solidFill>
-        <a:latin typeface="Arial"/>
-        <a:ea typeface="Arial"/>
-        <a:cs typeface="Arial"/>
-        <a:sym typeface="Arial"/>
+        <a:latin typeface="Arial" panose="020B0604020202020204"/>
+        <a:ea typeface="Arial" panose="020B0604020202020204"/>
+        <a:cs typeface="Arial" panose="020B0604020202020204"/>
+        <a:sym typeface="Arial" panose="020B0604020202020204"/>
       </a:defRPr>
     </a:lvl6pPr>
     <a:lvl7pPr marR="0" lvl="6" algn="l" rtl="0">
@@ -196,15 +196,15 @@
       <a:buClr>
         <a:srgbClr val="000000"/>
       </a:buClr>
-      <a:buFont typeface="Arial"/>
+      <a:buFont typeface="Arial" panose="020B0604020202020204"/>
       <a:defRPr sz="1400" b="0" i="0" u="none" strike="noStrike" cap="none">
         <a:solidFill>
           <a:srgbClr val="000000"/>
         </a:solidFill>
-        <a:latin typeface="Arial"/>
-        <a:ea typeface="Arial"/>
-        <a:cs typeface="Arial"/>
-        <a:sym typeface="Arial"/>
+        <a:latin typeface="Arial" panose="020B0604020202020204"/>
+        <a:ea typeface="Arial" panose="020B0604020202020204"/>
+        <a:cs typeface="Arial" panose="020B0604020202020204"/>
+        <a:sym typeface="Arial" panose="020B0604020202020204"/>
       </a:defRPr>
     </a:lvl7pPr>
     <a:lvl8pPr marR="0" lvl="7" algn="l" rtl="0">
@@ -220,15 +220,15 @@
       <a:buClr>
         <a:srgbClr val="000000"/>
       </a:buClr>
-      <a:buFont typeface="Arial"/>
+      <a:buFont typeface="Arial" panose="020B0604020202020204"/>
       <a:defRPr sz="1400" b="0" i="0" u="none" strike="noStrike" cap="none">
         <a:solidFill>
           <a:srgbClr val="000000"/>
         </a:solidFill>
-        <a:latin typeface="Arial"/>
-        <a:ea typeface="Arial"/>
-        <a:cs typeface="Arial"/>
-        <a:sym typeface="Arial"/>
+        <a:latin typeface="Arial" panose="020B0604020202020204"/>
+        <a:ea typeface="Arial" panose="020B0604020202020204"/>
+        <a:cs typeface="Arial" panose="020B0604020202020204"/>
+        <a:sym typeface="Arial" panose="020B0604020202020204"/>
       </a:defRPr>
     </a:lvl8pPr>
     <a:lvl9pPr marR="0" lvl="8" algn="l" rtl="0">
@@ -244,27 +244,27 @@
       <a:buClr>
         <a:srgbClr val="000000"/>
       </a:buClr>
-      <a:buFont typeface="Arial"/>
+      <a:buFont typeface="Arial" panose="020B0604020202020204"/>
       <a:defRPr sz="1400" b="0" i="0" u="none" strike="noStrike" cap="none">
         <a:solidFill>
           <a:srgbClr val="000000"/>
         </a:solidFill>
-        <a:latin typeface="Arial"/>
-        <a:ea typeface="Arial"/>
-        <a:cs typeface="Arial"/>
-        <a:sym typeface="Arial"/>
+        <a:latin typeface="Arial" panose="020B0604020202020204"/>
+        <a:ea typeface="Arial" panose="020B0604020202020204"/>
+        <a:cs typeface="Arial" panose="020B0604020202020204"/>
+        <a:sym typeface="Arial" panose="020B0604020202020204"/>
       </a:defRPr>
     </a:lvl9pPr>
   </p:defaultTextStyle>
   <p:extLst>
     <p:ext uri="{EFAFB233-063F-42B5-8137-9DF3F51BA10A}">
       <p15:sldGuideLst xmlns:p15="http://schemas.microsoft.com/office/powerpoint/2012/main">
-        <p15:guide id="1" orient="horz" pos="2160">
+        <p15:guide id="1" orient="horz" pos="2160" userDrawn="1">
           <p15:clr>
             <a:srgbClr val="A4A3A4"/>
           </p15:clr>
         </p15:guide>
-        <p15:guide id="2" pos="2880">
+        <p15:guide id="2" pos="2880" userDrawn="1">
           <p15:clr>
             <a:srgbClr val="A4A3A4"/>
           </p15:clr>
@@ -393,16 +393,16 @@
                 <a:srgbClr val="000000"/>
               </a:buClr>
               <a:buSzPts val="1100"/>
-              <a:buFont typeface="Arial"/>
+              <a:buFont typeface="Arial" panose="020B0604020202020204"/>
               <a:buChar char="●"/>
               <a:defRPr sz="1100" b="0" i="0" u="none" strike="noStrike" cap="none">
                 <a:solidFill>
                   <a:srgbClr val="000000"/>
                 </a:solidFill>
-                <a:latin typeface="Arial"/>
-                <a:ea typeface="Arial"/>
-                <a:cs typeface="Arial"/>
-                <a:sym typeface="Arial"/>
+                <a:latin typeface="Arial" panose="020B0604020202020204"/>
+                <a:ea typeface="Arial" panose="020B0604020202020204"/>
+                <a:cs typeface="Arial" panose="020B0604020202020204"/>
+                <a:sym typeface="Arial" panose="020B0604020202020204"/>
               </a:defRPr>
             </a:lvl1pPr>
             <a:lvl2pPr marL="914400" marR="0" lvl="1" indent="-298450" algn="l" rtl="0">
@@ -419,16 +419,16 @@
                 <a:srgbClr val="000000"/>
               </a:buClr>
               <a:buSzPts val="1100"/>
-              <a:buFont typeface="Arial"/>
+              <a:buFont typeface="Arial" panose="020B0604020202020204"/>
               <a:buChar char="○"/>
               <a:defRPr sz="1100" b="0" i="0" u="none" strike="noStrike" cap="none">
                 <a:solidFill>
                   <a:srgbClr val="000000"/>
                 </a:solidFill>
-                <a:latin typeface="Arial"/>
-                <a:ea typeface="Arial"/>
-                <a:cs typeface="Arial"/>
-                <a:sym typeface="Arial"/>
+                <a:latin typeface="Arial" panose="020B0604020202020204"/>
+                <a:ea typeface="Arial" panose="020B0604020202020204"/>
+                <a:cs typeface="Arial" panose="020B0604020202020204"/>
+                <a:sym typeface="Arial" panose="020B0604020202020204"/>
               </a:defRPr>
             </a:lvl2pPr>
             <a:lvl3pPr marL="1371600" marR="0" lvl="2" indent="-298450" algn="l" rtl="0">
@@ -445,16 +445,16 @@
                 <a:srgbClr val="000000"/>
               </a:buClr>
               <a:buSzPts val="1100"/>
-              <a:buFont typeface="Arial"/>
+              <a:buFont typeface="Arial" panose="020B0604020202020204"/>
               <a:buChar char="■"/>
               <a:defRPr sz="1100" b="0" i="0" u="none" strike="noStrike" cap="none">
                 <a:solidFill>
                   <a:srgbClr val="000000"/>
                 </a:solidFill>
-                <a:latin typeface="Arial"/>
-                <a:ea typeface="Arial"/>
-                <a:cs typeface="Arial"/>
-                <a:sym typeface="Arial"/>
+                <a:latin typeface="Arial" panose="020B0604020202020204"/>
+                <a:ea typeface="Arial" panose="020B0604020202020204"/>
+                <a:cs typeface="Arial" panose="020B0604020202020204"/>
+                <a:sym typeface="Arial" panose="020B0604020202020204"/>
               </a:defRPr>
             </a:lvl3pPr>
             <a:lvl4pPr marL="1828800" marR="0" lvl="3" indent="-298450" algn="l" rtl="0">
@@ -471,16 +471,16 @@
                 <a:srgbClr val="000000"/>
               </a:buClr>
               <a:buSzPts val="1100"/>
-              <a:buFont typeface="Arial"/>
+              <a:buFont typeface="Arial" panose="020B0604020202020204"/>
               <a:buChar char="●"/>
               <a:defRPr sz="1100" b="0" i="0" u="none" strike="noStrike" cap="none">
                 <a:solidFill>
                   <a:srgbClr val="000000"/>
                 </a:solidFill>
-                <a:latin typeface="Arial"/>
-                <a:ea typeface="Arial"/>
-                <a:cs typeface="Arial"/>
-                <a:sym typeface="Arial"/>
+                <a:latin typeface="Arial" panose="020B0604020202020204"/>
+                <a:ea typeface="Arial" panose="020B0604020202020204"/>
+                <a:cs typeface="Arial" panose="020B0604020202020204"/>
+                <a:sym typeface="Arial" panose="020B0604020202020204"/>
               </a:defRPr>
             </a:lvl4pPr>
             <a:lvl5pPr marL="2286000" marR="0" lvl="4" indent="-298450" algn="l" rtl="0">
@@ -497,16 +497,16 @@
                 <a:srgbClr val="000000"/>
               </a:buClr>
               <a:buSzPts val="1100"/>
-              <a:buFont typeface="Arial"/>
+              <a:buFont typeface="Arial" panose="020B0604020202020204"/>
               <a:buChar char="○"/>
               <a:defRPr sz="1100" b="0" i="0" u="none" strike="noStrike" cap="none">
                 <a:solidFill>
                   <a:srgbClr val="000000"/>
                 </a:solidFill>
-                <a:latin typeface="Arial"/>
-                <a:ea typeface="Arial"/>
-                <a:cs typeface="Arial"/>
-                <a:sym typeface="Arial"/>
+                <a:latin typeface="Arial" panose="020B0604020202020204"/>
+                <a:ea typeface="Arial" panose="020B0604020202020204"/>
+                <a:cs typeface="Arial" panose="020B0604020202020204"/>
+                <a:sym typeface="Arial" panose="020B0604020202020204"/>
               </a:defRPr>
             </a:lvl5pPr>
             <a:lvl6pPr marL="2743200" marR="0" lvl="5" indent="-298450" algn="l" rtl="0">
@@ -523,16 +523,16 @@
                 <a:srgbClr val="000000"/>
               </a:buClr>
               <a:buSzPts val="1100"/>
-              <a:buFont typeface="Arial"/>
+              <a:buFont typeface="Arial" panose="020B0604020202020204"/>
               <a:buChar char="■"/>
               <a:defRPr sz="1100" b="0" i="0" u="none" strike="noStrike" cap="none">
                 <a:solidFill>
                   <a:srgbClr val="000000"/>
                 </a:solidFill>
-                <a:latin typeface="Arial"/>
-                <a:ea typeface="Arial"/>
-                <a:cs typeface="Arial"/>
-                <a:sym typeface="Arial"/>
+                <a:latin typeface="Arial" panose="020B0604020202020204"/>
+                <a:ea typeface="Arial" panose="020B0604020202020204"/>
+                <a:cs typeface="Arial" panose="020B0604020202020204"/>
+                <a:sym typeface="Arial" panose="020B0604020202020204"/>
               </a:defRPr>
             </a:lvl6pPr>
             <a:lvl7pPr marL="3200400" marR="0" lvl="6" indent="-298450" algn="l" rtl="0">
@@ -549,16 +549,16 @@
                 <a:srgbClr val="000000"/>
               </a:buClr>
               <a:buSzPts val="1100"/>
-              <a:buFont typeface="Arial"/>
+              <a:buFont typeface="Arial" panose="020B0604020202020204"/>
               <a:buChar char="●"/>
               <a:defRPr sz="1100" b="0" i="0" u="none" strike="noStrike" cap="none">
                 <a:solidFill>
                   <a:srgbClr val="000000"/>
                 </a:solidFill>
-                <a:latin typeface="Arial"/>
-                <a:ea typeface="Arial"/>
-                <a:cs typeface="Arial"/>
-                <a:sym typeface="Arial"/>
+                <a:latin typeface="Arial" panose="020B0604020202020204"/>
+                <a:ea typeface="Arial" panose="020B0604020202020204"/>
+                <a:cs typeface="Arial" panose="020B0604020202020204"/>
+                <a:sym typeface="Arial" panose="020B0604020202020204"/>
               </a:defRPr>
             </a:lvl7pPr>
             <a:lvl8pPr marL="3657600" marR="0" lvl="7" indent="-298450" algn="l" rtl="0">
@@ -575,16 +575,16 @@
                 <a:srgbClr val="000000"/>
               </a:buClr>
               <a:buSzPts val="1100"/>
-              <a:buFont typeface="Arial"/>
+              <a:buFont typeface="Arial" panose="020B0604020202020204"/>
               <a:buChar char="○"/>
               <a:defRPr sz="1100" b="0" i="0" u="none" strike="noStrike" cap="none">
                 <a:solidFill>
                   <a:srgbClr val="000000"/>
                 </a:solidFill>
-                <a:latin typeface="Arial"/>
-                <a:ea typeface="Arial"/>
-                <a:cs typeface="Arial"/>
-                <a:sym typeface="Arial"/>
+                <a:latin typeface="Arial" panose="020B0604020202020204"/>
+                <a:ea typeface="Arial" panose="020B0604020202020204"/>
+                <a:cs typeface="Arial" panose="020B0604020202020204"/>
+                <a:sym typeface="Arial" panose="020B0604020202020204"/>
               </a:defRPr>
             </a:lvl8pPr>
             <a:lvl9pPr marL="4114800" marR="0" lvl="8" indent="-298450" algn="l" rtl="0">
@@ -601,30 +601,23 @@
                 <a:srgbClr val="000000"/>
               </a:buClr>
               <a:buSzPts val="1100"/>
-              <a:buFont typeface="Arial"/>
+              <a:buFont typeface="Arial" panose="020B0604020202020204"/>
               <a:buChar char="■"/>
               <a:defRPr sz="1100" b="0" i="0" u="none" strike="noStrike" cap="none">
                 <a:solidFill>
                   <a:srgbClr val="000000"/>
                 </a:solidFill>
-                <a:latin typeface="Arial"/>
-                <a:ea typeface="Arial"/>
-                <a:cs typeface="Arial"/>
-                <a:sym typeface="Arial"/>
+                <a:latin typeface="Arial" panose="020B0604020202020204"/>
+                <a:ea typeface="Arial" panose="020B0604020202020204"/>
+                <a:cs typeface="Arial" panose="020B0604020202020204"/>
+                <a:sym typeface="Arial" panose="020B0604020202020204"/>
               </a:defRPr>
             </a:lvl9pPr>
           </a:lstStyle>
-          <a:p>
-            <a:endParaRPr/>
-          </a:p>
+          <a:p/>
         </p:txBody>
       </p:sp>
     </p:spTree>
-    <p:extLst>
-      <p:ext uri="{BB962C8B-B14F-4D97-AF65-F5344CB8AC3E}">
-        <p14:creationId xmlns:p14="http://schemas.microsoft.com/office/powerpoint/2010/main" val="1702063006"/>
-      </p:ext>
-    </p:extLst>
   </p:cSld>
   <p:clrMap bg1="lt1" tx1="dk1" bg2="dk2" tx2="lt2" accent1="accent1" accent2="accent2" accent3="accent3" accent4="accent4" accent5="accent5" accent6="accent6" hlink="hlink" folHlink="folHlink"/>
   <p:notesStyle>
@@ -652,15 +645,15 @@
       <a:buClr>
         <a:srgbClr val="000000"/>
       </a:buClr>
-      <a:buFont typeface="Arial"/>
+      <a:buFont typeface="Arial" panose="020B0604020202020204"/>
       <a:defRPr sz="1400" b="0" i="0" u="none" strike="noStrike" cap="none">
         <a:solidFill>
           <a:srgbClr val="000000"/>
         </a:solidFill>
-        <a:latin typeface="Arial"/>
-        <a:ea typeface="Arial"/>
-        <a:cs typeface="Arial"/>
-        <a:sym typeface="Arial"/>
+        <a:latin typeface="Arial" panose="020B0604020202020204"/>
+        <a:ea typeface="Arial" panose="020B0604020202020204"/>
+        <a:cs typeface="Arial" panose="020B0604020202020204"/>
+        <a:sym typeface="Arial" panose="020B0604020202020204"/>
       </a:defRPr>
     </a:lvl1pPr>
     <a:lvl2pPr marR="0" lvl="1" algn="l" rtl="0">
@@ -676,15 +669,15 @@
       <a:buClr>
         <a:srgbClr val="000000"/>
       </a:buClr>
-      <a:buFont typeface="Arial"/>
+      <a:buFont typeface="Arial" panose="020B0604020202020204"/>
       <a:defRPr sz="1400" b="0" i="0" u="none" strike="noStrike" cap="none">
         <a:solidFill>
           <a:srgbClr val="000000"/>
         </a:solidFill>
-        <a:latin typeface="Arial"/>
-        <a:ea typeface="Arial"/>
-        <a:cs typeface="Arial"/>
-        <a:sym typeface="Arial"/>
+        <a:latin typeface="Arial" panose="020B0604020202020204"/>
+        <a:ea typeface="Arial" panose="020B0604020202020204"/>
+        <a:cs typeface="Arial" panose="020B0604020202020204"/>
+        <a:sym typeface="Arial" panose="020B0604020202020204"/>
       </a:defRPr>
     </a:lvl2pPr>
     <a:lvl3pPr marR="0" lvl="2" algn="l" rtl="0">
@@ -700,15 +693,15 @@
       <a:buClr>
         <a:srgbClr val="000000"/>
       </a:buClr>
-      <a:buFont typeface="Arial"/>
+      <a:buFont typeface="Arial" panose="020B0604020202020204"/>
       <a:defRPr sz="1400" b="0" i="0" u="none" strike="noStrike" cap="none">
         <a:solidFill>
           <a:srgbClr val="000000"/>
         </a:solidFill>
-        <a:latin typeface="Arial"/>
-        <a:ea typeface="Arial"/>
-        <a:cs typeface="Arial"/>
-        <a:sym typeface="Arial"/>
+        <a:latin typeface="Arial" panose="020B0604020202020204"/>
+        <a:ea typeface="Arial" panose="020B0604020202020204"/>
+        <a:cs typeface="Arial" panose="020B0604020202020204"/>
+        <a:sym typeface="Arial" panose="020B0604020202020204"/>
       </a:defRPr>
     </a:lvl3pPr>
     <a:lvl4pPr marR="0" lvl="3" algn="l" rtl="0">
@@ -724,15 +717,15 @@
       <a:buClr>
         <a:srgbClr val="000000"/>
       </a:buClr>
-      <a:buFont typeface="Arial"/>
+      <a:buFont typeface="Arial" panose="020B0604020202020204"/>
       <a:defRPr sz="1400" b="0" i="0" u="none" strike="noStrike" cap="none">
         <a:solidFill>
           <a:srgbClr val="000000"/>
         </a:solidFill>
-        <a:latin typeface="Arial"/>
-        <a:ea typeface="Arial"/>
-        <a:cs typeface="Arial"/>
-        <a:sym typeface="Arial"/>
+        <a:latin typeface="Arial" panose="020B0604020202020204"/>
+        <a:ea typeface="Arial" panose="020B0604020202020204"/>
+        <a:cs typeface="Arial" panose="020B0604020202020204"/>
+        <a:sym typeface="Arial" panose="020B0604020202020204"/>
       </a:defRPr>
     </a:lvl4pPr>
     <a:lvl5pPr marR="0" lvl="4" algn="l" rtl="0">
@@ -748,15 +741,15 @@
       <a:buClr>
         <a:srgbClr val="000000"/>
       </a:buClr>
-      <a:buFont typeface="Arial"/>
+      <a:buFont typeface="Arial" panose="020B0604020202020204"/>
       <a:defRPr sz="1400" b="0" i="0" u="none" strike="noStrike" cap="none">
         <a:solidFill>
           <a:srgbClr val="000000"/>
         </a:solidFill>
-        <a:latin typeface="Arial"/>
-        <a:ea typeface="Arial"/>
-        <a:cs typeface="Arial"/>
-        <a:sym typeface="Arial"/>
+        <a:latin typeface="Arial" panose="020B0604020202020204"/>
+        <a:ea typeface="Arial" panose="020B0604020202020204"/>
+        <a:cs typeface="Arial" panose="020B0604020202020204"/>
+        <a:sym typeface="Arial" panose="020B0604020202020204"/>
       </a:defRPr>
     </a:lvl5pPr>
     <a:lvl6pPr marR="0" lvl="5" algn="l" rtl="0">
@@ -772,15 +765,15 @@
       <a:buClr>
         <a:srgbClr val="000000"/>
       </a:buClr>
-      <a:buFont typeface="Arial"/>
+      <a:buFont typeface="Arial" panose="020B0604020202020204"/>
       <a:defRPr sz="1400" b="0" i="0" u="none" strike="noStrike" cap="none">
         <a:solidFill>
           <a:srgbClr val="000000"/>
         </a:solidFill>
-        <a:latin typeface="Arial"/>
-        <a:ea typeface="Arial"/>
-        <a:cs typeface="Arial"/>
-        <a:sym typeface="Arial"/>
+        <a:latin typeface="Arial" panose="020B0604020202020204"/>
+        <a:ea typeface="Arial" panose="020B0604020202020204"/>
+        <a:cs typeface="Arial" panose="020B0604020202020204"/>
+        <a:sym typeface="Arial" panose="020B0604020202020204"/>
       </a:defRPr>
     </a:lvl6pPr>
     <a:lvl7pPr marR="0" lvl="6" algn="l" rtl="0">
@@ -796,15 +789,15 @@
       <a:buClr>
         <a:srgbClr val="000000"/>
       </a:buClr>
-      <a:buFont typeface="Arial"/>
+      <a:buFont typeface="Arial" panose="020B0604020202020204"/>
       <a:defRPr sz="1400" b="0" i="0" u="none" strike="noStrike" cap="none">
         <a:solidFill>
           <a:srgbClr val="000000"/>
         </a:solidFill>
-        <a:latin typeface="Arial"/>
-        <a:ea typeface="Arial"/>
-        <a:cs typeface="Arial"/>
-        <a:sym typeface="Arial"/>
+        <a:latin typeface="Arial" panose="020B0604020202020204"/>
+        <a:ea typeface="Arial" panose="020B0604020202020204"/>
+        <a:cs typeface="Arial" panose="020B0604020202020204"/>
+        <a:sym typeface="Arial" panose="020B0604020202020204"/>
       </a:defRPr>
     </a:lvl7pPr>
     <a:lvl8pPr marR="0" lvl="7" algn="l" rtl="0">
@@ -820,15 +813,15 @@
       <a:buClr>
         <a:srgbClr val="000000"/>
       </a:buClr>
-      <a:buFont typeface="Arial"/>
+      <a:buFont typeface="Arial" panose="020B0604020202020204"/>
       <a:defRPr sz="1400" b="0" i="0" u="none" strike="noStrike" cap="none">
         <a:solidFill>
           <a:srgbClr val="000000"/>
         </a:solidFill>
-        <a:latin typeface="Arial"/>
-        <a:ea typeface="Arial"/>
-        <a:cs typeface="Arial"/>
-        <a:sym typeface="Arial"/>
+        <a:latin typeface="Arial" panose="020B0604020202020204"/>
+        <a:ea typeface="Arial" panose="020B0604020202020204"/>
+        <a:cs typeface="Arial" panose="020B0604020202020204"/>
+        <a:sym typeface="Arial" panose="020B0604020202020204"/>
       </a:defRPr>
     </a:lvl8pPr>
     <a:lvl9pPr marR="0" lvl="8" algn="l" rtl="0">
@@ -844,15 +837,15 @@
       <a:buClr>
         <a:srgbClr val="000000"/>
       </a:buClr>
-      <a:buFont typeface="Arial"/>
+      <a:buFont typeface="Arial" panose="020B0604020202020204"/>
       <a:defRPr sz="1400" b="0" i="0" u="none" strike="noStrike" cap="none">
         <a:solidFill>
           <a:srgbClr val="000000"/>
         </a:solidFill>
-        <a:latin typeface="Arial"/>
-        <a:ea typeface="Arial"/>
-        <a:cs typeface="Arial"/>
-        <a:sym typeface="Arial"/>
+        <a:latin typeface="Arial" panose="020B0604020202020204"/>
+        <a:ea typeface="Arial" panose="020B0604020202020204"/>
+        <a:cs typeface="Arial" panose="020B0604020202020204"/>
+        <a:sym typeface="Arial" panose="020B0604020202020204"/>
       </a:defRPr>
     </a:lvl9pPr>
   </p:notesStyle>
@@ -860,7 +853,7 @@
 </file>
 
 <file path=ppt/notesSlides/notesSlide1.xml><?xml version="1.0" encoding="utf-8"?>
-<p:notes xmlns:a="http://schemas.openxmlformats.org/drawingml/2006/main" xmlns:r="http://schemas.openxmlformats.org/officeDocument/2006/relationships" xmlns:p="http://schemas.openxmlformats.org/presentationml/2006/main" showMasterSp="0" showMasterPhAnim="0">
+<p:notes xmlns:a="http://schemas.openxmlformats.org/drawingml/2006/main" xmlns:r="http://schemas.openxmlformats.org/officeDocument/2006/relationships" xmlns:p="http://schemas.openxmlformats.org/presentationml/2006/main" showMasterPhAnim="0" showMasterSp="0">
   <p:cSld>
     <p:spTree>
       <p:nvGrpSpPr>
@@ -918,7 +911,6 @@
               <a:buSzPts val="1100"/>
               <a:buNone/>
             </a:pPr>
-            <a:endParaRPr/>
           </a:p>
         </p:txBody>
       </p:sp>
@@ -974,11 +966,6 @@
         </p:spPr>
       </p:sp>
     </p:spTree>
-    <p:extLst>
-      <p:ext uri="{BB962C8B-B14F-4D97-AF65-F5344CB8AC3E}">
-        <p14:creationId xmlns:p14="http://schemas.microsoft.com/office/powerpoint/2010/main" val="2569928217"/>
-      </p:ext>
-    </p:extLst>
   </p:cSld>
   <p:clrMapOvr>
     <a:masterClrMapping/>
@@ -1035,11 +1022,6 @@
         </p:txBody>
       </p:sp>
     </p:spTree>
-    <p:extLst>
-      <p:ext uri="{BB962C8B-B14F-4D97-AF65-F5344CB8AC3E}">
-        <p14:creationId xmlns:p14="http://schemas.microsoft.com/office/powerpoint/2010/main" val="1201323893"/>
-      </p:ext>
-    </p:extLst>
   </p:cSld>
   <p:clrMapOvr>
     <a:masterClrMapping/>
@@ -1048,7 +1030,7 @@
 </file>
 
 <file path=ppt/notesSlides/notesSlide3.xml><?xml version="1.0" encoding="utf-8"?>
-<p:notes xmlns:a="http://schemas.openxmlformats.org/drawingml/2006/main" xmlns:r="http://schemas.openxmlformats.org/officeDocument/2006/relationships" xmlns:p="http://schemas.openxmlformats.org/presentationml/2006/main" showMasterSp="0" showMasterPhAnim="0">
+<p:notes xmlns:a="http://schemas.openxmlformats.org/drawingml/2006/main" xmlns:r="http://schemas.openxmlformats.org/officeDocument/2006/relationships" xmlns:p="http://schemas.openxmlformats.org/presentationml/2006/main" showMasterPhAnim="0" showMasterSp="0">
   <p:cSld>
     <p:spTree>
       <p:nvGrpSpPr>
@@ -1107,9 +1089,8 @@
                 <a:srgbClr val="000000"/>
               </a:buClr>
               <a:buSzPts val="1100"/>
-              <a:buFont typeface="Arial"/>
-              <a:buNone/>
-              <a:tabLst/>
+              <a:buFont typeface="Arial" panose="020B0604020202020204"/>
+              <a:buNone/>
               <a:defRPr/>
             </a:pPr>
             <a:r>
@@ -1132,6 +1113,7 @@
               <a:rPr lang="en-US" dirty="0" smtClean="0"/>
               <a:t> (how well it performs).</a:t>
             </a:r>
+            <a:endParaRPr lang="en-US" dirty="0" smtClean="0"/>
           </a:p>
           <a:p>
             <a:pPr marL="0" lvl="0" indent="0" algn="l" rtl="0">
@@ -1203,11 +1185,6 @@
         </p:spPr>
       </p:sp>
     </p:spTree>
-    <p:extLst>
-      <p:ext uri="{BB962C8B-B14F-4D97-AF65-F5344CB8AC3E}">
-        <p14:creationId xmlns:p14="http://schemas.microsoft.com/office/powerpoint/2010/main" val="1921041922"/>
-      </p:ext>
-    </p:extLst>
   </p:cSld>
   <p:clrMapOvr>
     <a:masterClrMapping/>
@@ -1268,6 +1245,7 @@
               <a:rPr lang="en-US" dirty="0" smtClean="0"/>
               <a:t>Upgrade/downgrade tests are designed to verify that the system software can be upgraded or downgraded (rollback) in a graceful manner from the previous version to the current version or vice versa. </a:t>
             </a:r>
+            <a:endParaRPr lang="en-US" dirty="0" smtClean="0"/>
           </a:p>
           <a:p>
             <a:endParaRPr lang="en-US" dirty="0" smtClean="0"/>
@@ -1277,6 +1255,7 @@
               <a:rPr lang="en-US" dirty="0" smtClean="0"/>
               <a:t>The LED (light emitting diode) tests are designed to verify that the system LED status indicators function as desired. </a:t>
             </a:r>
+            <a:endParaRPr lang="en-US" dirty="0" smtClean="0"/>
           </a:p>
           <a:p>
             <a:endParaRPr lang="en-US" dirty="0" smtClean="0"/>
@@ -1291,11 +1270,6 @@
         </p:txBody>
       </p:sp>
     </p:spTree>
-    <p:extLst>
-      <p:ext uri="{BB962C8B-B14F-4D97-AF65-F5344CB8AC3E}">
-        <p14:creationId xmlns:p14="http://schemas.microsoft.com/office/powerpoint/2010/main" val="3347483087"/>
-      </p:ext>
-    </p:extLst>
   </p:cSld>
   <p:clrMapOvr>
     <a:masterClrMapping/>
@@ -1359,6 +1333,7 @@
               <a:rPr lang="en-US" dirty="0" smtClean="0"/>
               <a:t>Communication Systems Tests Communication systems tests are designed to verify the implementation of the communication systems as specified in the customer requirements specification.</a:t>
             </a:r>
+            <a:endParaRPr lang="en-US" dirty="0" smtClean="0"/>
           </a:p>
           <a:p>
             <a:pPr marL="158750" indent="0">
@@ -1368,6 +1343,7 @@
               <a:rPr lang="en-US" dirty="0" smtClean="0"/>
               <a:t>Module Tests: Module tests are designed to verify that all the modules function individually as desired within the systems. Mutual interactions among the modules glue these components together into a whole system. The idea here is to ensure that individual modules function correctly within the whole system. One needs to verify that the system, along with the software that controls these modules, operate as specified in the requirement specification. </a:t>
             </a:r>
+            <a:endParaRPr lang="en-US" dirty="0" smtClean="0"/>
           </a:p>
           <a:p>
             <a:pPr marL="158750" indent="0">
@@ -1391,6 +1367,7 @@
               <a:rPr lang="en-US" dirty="0" smtClean="0"/>
               <a:t>Logging and tracing tests are designed to verify the configurations and operations of logging and tracing. This also includes verification of “flight data recorder: non-volatile flash memory” logs when the system crashes. Tests may be designed to calculate the impact on system performance when all the logs are enabled.</a:t>
             </a:r>
+            <a:endParaRPr lang="en-US" dirty="0" smtClean="0"/>
           </a:p>
           <a:p>
             <a:pPr marL="158750" indent="0">
@@ -1422,6 +1399,7 @@
               <a:rPr lang="en-US" dirty="0" smtClean="0"/>
               <a:t> verify the main functions which are to manage, monitor, and upgrade the communication system network elements (NEs). Table 8.1 summarizes the functionalities of an EMS. An EMS communicates with its NEs by using, for example, the Simple Network Management Protocol (SNMP) [2] and a variety of proprietary protocols and mechanisms.</a:t>
             </a:r>
+            <a:endParaRPr lang="en-US" dirty="0" smtClean="0"/>
           </a:p>
           <a:p>
             <a:pPr marL="158750" indent="0">
@@ -1437,6 +1415,7 @@
               <a:rPr lang="en-US" dirty="0" smtClean="0"/>
               <a:t>Management Information Base Test: ?</a:t>
             </a:r>
+            <a:endParaRPr lang="en-US" dirty="0" smtClean="0"/>
           </a:p>
           <a:p>
             <a:pPr marL="158750" indent="0">
@@ -1476,6 +1455,7 @@
               <a:rPr lang="en-US" dirty="0" smtClean="0"/>
               <a:t>. These tests verify different components (objects) such as icons, menu bars, dialogue boxes, scroll bars, list boxes, and radio buttons. Ease of use (usability) of the GUI design and output reports from the viewpoint of actual system users should be checked. Usefulness of the online help, error messages, tutorials, and user manuals are verified. </a:t>
             </a:r>
+            <a:endParaRPr lang="en-US" dirty="0" smtClean="0"/>
           </a:p>
           <a:p>
             <a:pPr marL="158750" indent="0">
@@ -1485,6 +1465,7 @@
               <a:rPr lang="en-US" dirty="0" smtClean="0"/>
               <a:t>The usability characteristics which can be tested include the following: </a:t>
             </a:r>
+            <a:endParaRPr lang="en-US" dirty="0" smtClean="0"/>
           </a:p>
           <a:p>
             <a:pPr marL="158750" indent="0">
@@ -1494,6 +1475,7 @@
               <a:rPr lang="en-US" dirty="0" smtClean="0"/>
               <a:t>• Accessibility: Can users enter, navigate, and exit with relative ease? </a:t>
             </a:r>
+            <a:endParaRPr lang="en-US" dirty="0" smtClean="0"/>
           </a:p>
           <a:p>
             <a:pPr marL="158750" indent="0">
@@ -1535,6 +1517,7 @@
               <a:rPr lang="en-US" dirty="0" smtClean="0"/>
               <a:t> way that is clear? It includes ergonomic factors such as color, shape, sound, and font size. </a:t>
             </a:r>
+            <a:endParaRPr lang="en-US" dirty="0" smtClean="0"/>
           </a:p>
           <a:p>
             <a:pPr marL="158750" indent="0">
@@ -1552,6 +1535,7 @@
               <a:rPr lang="en-US" dirty="0" smtClean="0"/>
               <a:t> amount of effort?</a:t>
             </a:r>
+            <a:endParaRPr lang="en-US" dirty="0" smtClean="0"/>
           </a:p>
           <a:p>
             <a:pPr marL="158750" indent="0">
@@ -1575,6 +1559,7 @@
               <a:rPr lang="en-US" dirty="0" smtClean="0"/>
               <a:t>. </a:t>
             </a:r>
+            <a:endParaRPr lang="en-US" dirty="0" smtClean="0"/>
           </a:p>
           <a:p>
             <a:pPr marL="158750" indent="0">
@@ -1584,6 +1569,7 @@
               <a:rPr lang="en-US" dirty="0" smtClean="0"/>
               <a:t>*Confidentiality is the requirement that data and the processes be protected from unauthorized disclosure. </a:t>
             </a:r>
+            <a:endParaRPr lang="en-US" dirty="0" smtClean="0"/>
           </a:p>
           <a:p>
             <a:pPr marL="158750" indent="0">
@@ -1593,6 +1579,7 @@
               <a:rPr lang="en-US" dirty="0" smtClean="0"/>
               <a:t>*Integrity is the requirement that data and process be protected from unauthorized modification. </a:t>
             </a:r>
+            <a:endParaRPr lang="en-US" dirty="0" smtClean="0"/>
           </a:p>
           <a:p>
             <a:pPr marL="158750" indent="0">
@@ -1602,6 +1589,7 @@
               <a:rPr lang="en-US" dirty="0" smtClean="0"/>
               <a:t>*Availability is the requirement that data and processes be protected from the denial of service to authorized users. </a:t>
             </a:r>
+            <a:endParaRPr lang="en-US" dirty="0" smtClean="0"/>
           </a:p>
           <a:p>
             <a:pPr marL="158750" indent="0">
@@ -1611,6 +1599,7 @@
               <a:rPr lang="en-US" dirty="0" smtClean="0"/>
               <a:t>he objective of security testing is to demonstrate </a:t>
             </a:r>
+            <a:endParaRPr lang="en-US" dirty="0" smtClean="0"/>
           </a:p>
           <a:p>
             <a:pPr marL="158750" indent="0">
@@ -1626,6 +1615,7 @@
               <a:rPr lang="en-US" dirty="0" smtClean="0"/>
               <a:t>Feature Tests: Feature tests are designed to verify any additional functionalities which are defined in the requirement specifications but not covered in the above categories. Examples of those tests are data conversion and cross-functionality tests. Data conversion testing is testing of programs or procedures that are used to convert data from an existing system to a replacement system.</a:t>
             </a:r>
+            <a:endParaRPr lang="en-US" dirty="0" smtClean="0"/>
           </a:p>
           <a:p>
             <a:pPr marL="158750" indent="0">
@@ -1648,11 +1638,6 @@
         </p:txBody>
       </p:sp>
     </p:spTree>
-    <p:extLst>
-      <p:ext uri="{BB962C8B-B14F-4D97-AF65-F5344CB8AC3E}">
-        <p14:creationId xmlns:p14="http://schemas.microsoft.com/office/powerpoint/2010/main" val="3453125847"/>
-      </p:ext>
-    </p:extLst>
   </p:cSld>
   <p:clrMapOvr>
     <a:masterClrMapping/>
@@ -1713,12 +1698,14 @@
               <a:rPr lang="en-US" dirty="0" smtClean="0"/>
               <a:t>Boundary Value: Boundary value tests are designed to cover boundary conditions, special values, and system defaults. The tests include providing invalid input data to the system and observing how the system reacts to the invalid input. The system should respond with an error message or initiate an error processing routine. It should be verified that the system handles boundary values (below or above the valid values) for a subset of configurable attributes.</a:t>
             </a:r>
+            <a:endParaRPr lang="en-US" dirty="0" smtClean="0"/>
           </a:p>
           <a:p>
             <a:r>
               <a:rPr lang="en-US" dirty="0" smtClean="0"/>
               <a:t>Power Cycling Tests: Power cycling tests are executed to ensure that, when there is a power glitch in a deployment environment, the system can recover from the glitch to be back in normal operation after power is restored. As an example, verify that the boot test is successful every time it is executed during power cycling.</a:t>
             </a:r>
+            <a:endParaRPr lang="en-US" dirty="0" smtClean="0"/>
           </a:p>
           <a:p>
             <a:r>
@@ -1741,12 +1728,14 @@
               <a:rPr lang="en-US" dirty="0" smtClean="0"/>
               <a:t> and removal of modules, incurred during both idle and heavy load operations, are gracefully handled and recovered.</a:t>
             </a:r>
+            <a:endParaRPr lang="en-US" dirty="0" smtClean="0"/>
           </a:p>
           <a:p>
             <a:r>
               <a:rPr lang="en-US" dirty="0" smtClean="0"/>
               <a:t>High-Availability Tests: High-availability tests are designed to verify the redundancy of individual modules, including the software that controls these modules. The goal is to verify that the system gracefully and quickly recovers from hardware and software failures without adversely impacting the operation of the system.</a:t>
             </a:r>
+            <a:endParaRPr lang="en-US" dirty="0" smtClean="0"/>
           </a:p>
           <a:p>
             <a:r>
@@ -1758,11 +1747,6 @@
         </p:txBody>
       </p:sp>
     </p:spTree>
-    <p:extLst>
-      <p:ext uri="{BB962C8B-B14F-4D97-AF65-F5344CB8AC3E}">
-        <p14:creationId xmlns:p14="http://schemas.microsoft.com/office/powerpoint/2010/main" val="2891456127"/>
-      </p:ext>
-    </p:extLst>
   </p:cSld>
   <p:clrMapOvr>
     <a:masterClrMapping/>
@@ -1823,6 +1807,7 @@
               <a:rPr lang="en-US" dirty="0" smtClean="0"/>
               <a:t>There are three major causes of these limitations:</a:t>
             </a:r>
+            <a:endParaRPr lang="en-US" dirty="0" smtClean="0"/>
           </a:p>
           <a:p>
             <a:pPr lvl="0"/>
@@ -1834,6 +1819,7 @@
               <a:rPr lang="en-US" dirty="0" smtClean="0"/>
               <a:t>. Data storage limitations—limits on counter field size and allocated buffer space</a:t>
             </a:r>
+            <a:endParaRPr lang="en-US" dirty="0" smtClean="0"/>
           </a:p>
           <a:p>
             <a:pPr lvl="0"/>
@@ -1841,6 +1827,7 @@
               <a:rPr lang="en-US" dirty="0" smtClean="0"/>
               <a:t>ii. Network bandwidth limitations—Ethernet speed 10Mbps and T1 card line rate 1.544Mbps</a:t>
             </a:r>
+            <a:endParaRPr lang="en-US" dirty="0" smtClean="0"/>
           </a:p>
           <a:p>
             <a:pPr lvl="0"/>
@@ -1853,11 +1840,6 @@
         </p:txBody>
       </p:sp>
     </p:spTree>
-    <p:extLst>
-      <p:ext uri="{BB962C8B-B14F-4D97-AF65-F5344CB8AC3E}">
-        <p14:creationId xmlns:p14="http://schemas.microsoft.com/office/powerpoint/2010/main" val="2314538131"/>
-      </p:ext>
-    </p:extLst>
   </p:cSld>
   <p:clrMapOvr>
     <a:masterClrMapping/>
@@ -1918,11 +1900,6 @@
         </p:txBody>
       </p:sp>
     </p:spTree>
-    <p:extLst>
-      <p:ext uri="{BB962C8B-B14F-4D97-AF65-F5344CB8AC3E}">
-        <p14:creationId xmlns:p14="http://schemas.microsoft.com/office/powerpoint/2010/main" val="1557025905"/>
-      </p:ext>
-    </p:extLst>
   </p:cSld>
   <p:clrMapOvr>
     <a:masterClrMapping/>
@@ -1931,7 +1908,7 @@
 </file>
 
 <file path=ppt/slideLayouts/slideLayout1.xml><?xml version="1.0" encoding="utf-8"?>
-<p:sldLayout xmlns:a="http://schemas.openxmlformats.org/drawingml/2006/main" xmlns:r="http://schemas.openxmlformats.org/officeDocument/2006/relationships" xmlns:p="http://schemas.openxmlformats.org/presentationml/2006/main" matchingName="Title Slide" type="title">
+<p:sldLayout xmlns:a="http://schemas.openxmlformats.org/drawingml/2006/main" xmlns:r="http://schemas.openxmlformats.org/officeDocument/2006/relationships" xmlns:p="http://schemas.openxmlformats.org/presentationml/2006/main" type="title" matchingName="Title Slide">
   <p:cSld name="TITLE">
     <p:spTree>
       <p:nvGrpSpPr>
@@ -2105,9 +2082,7 @@
               <a:defRPr/>
             </a:lvl9pPr>
           </a:lstStyle>
-          <a:p>
-            <a:endParaRPr/>
-          </a:p>
+          <a:p/>
         </p:txBody>
       </p:sp>
       <p:sp>
@@ -2328,9 +2303,7 @@
               </a:defRPr>
             </a:lvl9pPr>
           </a:lstStyle>
-          <a:p>
-            <a:endParaRPr/>
-          </a:p>
+          <a:p/>
         </p:txBody>
       </p:sp>
       <p:sp>
@@ -2488,9 +2461,7 @@
               <a:defRPr/>
             </a:lvl9pPr>
           </a:lstStyle>
-          <a:p>
-            <a:endParaRPr/>
-          </a:p>
+          <a:p/>
         </p:txBody>
       </p:sp>
       <p:sp>
@@ -2648,9 +2619,7 @@
               <a:defRPr/>
             </a:lvl9pPr>
           </a:lstStyle>
-          <a:p>
-            <a:endParaRPr/>
-          </a:p>
+          <a:p/>
         </p:txBody>
       </p:sp>
       <p:sp>
@@ -2695,16 +2664,16 @@
                 <a:srgbClr val="000000"/>
               </a:buClr>
               <a:buSzPts val="1200"/>
-              <a:buFont typeface="Arial"/>
+              <a:buFont typeface="Arial" panose="020B0604020202020204"/>
               <a:buNone/>
               <a:defRPr sz="1200" b="0" i="0" u="none" strike="noStrike" cap="none">
                 <a:solidFill>
                   <a:srgbClr val="888888"/>
                 </a:solidFill>
-                <a:latin typeface="Calibri"/>
-                <a:ea typeface="Calibri"/>
-                <a:cs typeface="Calibri"/>
-                <a:sym typeface="Calibri"/>
+                <a:latin typeface="Calibri" panose="020F0502020204030204"/>
+                <a:ea typeface="Calibri" panose="020F0502020204030204"/>
+                <a:cs typeface="Calibri" panose="020F0502020204030204"/>
+                <a:sym typeface="Calibri" panose="020F0502020204030204"/>
               </a:defRPr>
             </a:lvl1pPr>
             <a:lvl2pPr marL="0" marR="0" lvl="1" indent="0" algn="r">
@@ -2721,16 +2690,16 @@
                 <a:srgbClr val="000000"/>
               </a:buClr>
               <a:buSzPts val="1200"/>
-              <a:buFont typeface="Arial"/>
+              <a:buFont typeface="Arial" panose="020B0604020202020204"/>
               <a:buNone/>
               <a:defRPr sz="1200" b="0" i="0" u="none" strike="noStrike" cap="none">
                 <a:solidFill>
                   <a:srgbClr val="888888"/>
                 </a:solidFill>
-                <a:latin typeface="Calibri"/>
-                <a:ea typeface="Calibri"/>
-                <a:cs typeface="Calibri"/>
-                <a:sym typeface="Calibri"/>
+                <a:latin typeface="Calibri" panose="020F0502020204030204"/>
+                <a:ea typeface="Calibri" panose="020F0502020204030204"/>
+                <a:cs typeface="Calibri" panose="020F0502020204030204"/>
+                <a:sym typeface="Calibri" panose="020F0502020204030204"/>
               </a:defRPr>
             </a:lvl2pPr>
             <a:lvl3pPr marL="0" marR="0" lvl="2" indent="0" algn="r">
@@ -2747,16 +2716,16 @@
                 <a:srgbClr val="000000"/>
               </a:buClr>
               <a:buSzPts val="1200"/>
-              <a:buFont typeface="Arial"/>
+              <a:buFont typeface="Arial" panose="020B0604020202020204"/>
               <a:buNone/>
               <a:defRPr sz="1200" b="0" i="0" u="none" strike="noStrike" cap="none">
                 <a:solidFill>
                   <a:srgbClr val="888888"/>
                 </a:solidFill>
-                <a:latin typeface="Calibri"/>
-                <a:ea typeface="Calibri"/>
-                <a:cs typeface="Calibri"/>
-                <a:sym typeface="Calibri"/>
+                <a:latin typeface="Calibri" panose="020F0502020204030204"/>
+                <a:ea typeface="Calibri" panose="020F0502020204030204"/>
+                <a:cs typeface="Calibri" panose="020F0502020204030204"/>
+                <a:sym typeface="Calibri" panose="020F0502020204030204"/>
               </a:defRPr>
             </a:lvl3pPr>
             <a:lvl4pPr marL="0" marR="0" lvl="3" indent="0" algn="r">
@@ -2773,16 +2742,16 @@
                 <a:srgbClr val="000000"/>
               </a:buClr>
               <a:buSzPts val="1200"/>
-              <a:buFont typeface="Arial"/>
+              <a:buFont typeface="Arial" panose="020B0604020202020204"/>
               <a:buNone/>
               <a:defRPr sz="1200" b="0" i="0" u="none" strike="noStrike" cap="none">
                 <a:solidFill>
                   <a:srgbClr val="888888"/>
                 </a:solidFill>
-                <a:latin typeface="Calibri"/>
-                <a:ea typeface="Calibri"/>
-                <a:cs typeface="Calibri"/>
-                <a:sym typeface="Calibri"/>
+                <a:latin typeface="Calibri" panose="020F0502020204030204"/>
+                <a:ea typeface="Calibri" panose="020F0502020204030204"/>
+                <a:cs typeface="Calibri" panose="020F0502020204030204"/>
+                <a:sym typeface="Calibri" panose="020F0502020204030204"/>
               </a:defRPr>
             </a:lvl4pPr>
             <a:lvl5pPr marL="0" marR="0" lvl="4" indent="0" algn="r">
@@ -2799,16 +2768,16 @@
                 <a:srgbClr val="000000"/>
               </a:buClr>
               <a:buSzPts val="1200"/>
-              <a:buFont typeface="Arial"/>
+              <a:buFont typeface="Arial" panose="020B0604020202020204"/>
               <a:buNone/>
               <a:defRPr sz="1200" b="0" i="0" u="none" strike="noStrike" cap="none">
                 <a:solidFill>
                   <a:srgbClr val="888888"/>
                 </a:solidFill>
-                <a:latin typeface="Calibri"/>
-                <a:ea typeface="Calibri"/>
-                <a:cs typeface="Calibri"/>
-                <a:sym typeface="Calibri"/>
+                <a:latin typeface="Calibri" panose="020F0502020204030204"/>
+                <a:ea typeface="Calibri" panose="020F0502020204030204"/>
+                <a:cs typeface="Calibri" panose="020F0502020204030204"/>
+                <a:sym typeface="Calibri" panose="020F0502020204030204"/>
               </a:defRPr>
             </a:lvl5pPr>
             <a:lvl6pPr marL="0" marR="0" lvl="5" indent="0" algn="r">
@@ -2825,16 +2794,16 @@
                 <a:srgbClr val="000000"/>
               </a:buClr>
               <a:buSzPts val="1200"/>
-              <a:buFont typeface="Arial"/>
+              <a:buFont typeface="Arial" panose="020B0604020202020204"/>
               <a:buNone/>
               <a:defRPr sz="1200" b="0" i="0" u="none" strike="noStrike" cap="none">
                 <a:solidFill>
                   <a:srgbClr val="888888"/>
                 </a:solidFill>
-                <a:latin typeface="Calibri"/>
-                <a:ea typeface="Calibri"/>
-                <a:cs typeface="Calibri"/>
-                <a:sym typeface="Calibri"/>
+                <a:latin typeface="Calibri" panose="020F0502020204030204"/>
+                <a:ea typeface="Calibri" panose="020F0502020204030204"/>
+                <a:cs typeface="Calibri" panose="020F0502020204030204"/>
+                <a:sym typeface="Calibri" panose="020F0502020204030204"/>
               </a:defRPr>
             </a:lvl6pPr>
             <a:lvl7pPr marL="0" marR="0" lvl="6" indent="0" algn="r">
@@ -2851,16 +2820,16 @@
                 <a:srgbClr val="000000"/>
               </a:buClr>
               <a:buSzPts val="1200"/>
-              <a:buFont typeface="Arial"/>
+              <a:buFont typeface="Arial" panose="020B0604020202020204"/>
               <a:buNone/>
               <a:defRPr sz="1200" b="0" i="0" u="none" strike="noStrike" cap="none">
                 <a:solidFill>
                   <a:srgbClr val="888888"/>
                 </a:solidFill>
-                <a:latin typeface="Calibri"/>
-                <a:ea typeface="Calibri"/>
-                <a:cs typeface="Calibri"/>
-                <a:sym typeface="Calibri"/>
+                <a:latin typeface="Calibri" panose="020F0502020204030204"/>
+                <a:ea typeface="Calibri" panose="020F0502020204030204"/>
+                <a:cs typeface="Calibri" panose="020F0502020204030204"/>
+                <a:sym typeface="Calibri" panose="020F0502020204030204"/>
               </a:defRPr>
             </a:lvl7pPr>
             <a:lvl8pPr marL="0" marR="0" lvl="7" indent="0" algn="r">
@@ -2877,16 +2846,16 @@
                 <a:srgbClr val="000000"/>
               </a:buClr>
               <a:buSzPts val="1200"/>
-              <a:buFont typeface="Arial"/>
+              <a:buFont typeface="Arial" panose="020B0604020202020204"/>
               <a:buNone/>
               <a:defRPr sz="1200" b="0" i="0" u="none" strike="noStrike" cap="none">
                 <a:solidFill>
                   <a:srgbClr val="888888"/>
                 </a:solidFill>
-                <a:latin typeface="Calibri"/>
-                <a:ea typeface="Calibri"/>
-                <a:cs typeface="Calibri"/>
-                <a:sym typeface="Calibri"/>
+                <a:latin typeface="Calibri" panose="020F0502020204030204"/>
+                <a:ea typeface="Calibri" panose="020F0502020204030204"/>
+                <a:cs typeface="Calibri" panose="020F0502020204030204"/>
+                <a:sym typeface="Calibri" panose="020F0502020204030204"/>
               </a:defRPr>
             </a:lvl8pPr>
             <a:lvl9pPr marL="0" marR="0" lvl="8" indent="0" algn="r">
@@ -2903,16 +2872,16 @@
                 <a:srgbClr val="000000"/>
               </a:buClr>
               <a:buSzPts val="1200"/>
-              <a:buFont typeface="Arial"/>
+              <a:buFont typeface="Arial" panose="020B0604020202020204"/>
               <a:buNone/>
               <a:defRPr sz="1200" b="0" i="0" u="none" strike="noStrike" cap="none">
                 <a:solidFill>
                   <a:srgbClr val="888888"/>
                 </a:solidFill>
-                <a:latin typeface="Calibri"/>
-                <a:ea typeface="Calibri"/>
-                <a:cs typeface="Calibri"/>
-                <a:sym typeface="Calibri"/>
+                <a:latin typeface="Calibri" panose="020F0502020204030204"/>
+                <a:ea typeface="Calibri" panose="020F0502020204030204"/>
+                <a:cs typeface="Calibri" panose="020F0502020204030204"/>
+                <a:sym typeface="Calibri" panose="020F0502020204030204"/>
               </a:defRPr>
             </a:lvl9pPr>
           </a:lstStyle>
@@ -2928,9 +2897,8 @@
             </a:pPr>
             <a:fld id="{00000000-1234-1234-1234-123412341234}" type="slidenum">
               <a:rPr lang="en-US"/>
-              <a:t>‹#›</a:t>
             </a:fld>
-            <a:endParaRPr/>
+            <a:endParaRPr lang="en-US"/>
           </a:p>
         </p:txBody>
       </p:sp>
@@ -2943,7 +2911,7 @@
 </file>
 
 <file path=ppt/slideLayouts/slideLayout10.xml><?xml version="1.0" encoding="utf-8"?>
-<p:sldLayout xmlns:a="http://schemas.openxmlformats.org/drawingml/2006/main" xmlns:r="http://schemas.openxmlformats.org/officeDocument/2006/relationships" xmlns:p="http://schemas.openxmlformats.org/presentationml/2006/main" matchingName="Vertical Title and Text" type="vertTitleAndTx">
+<p:sldLayout xmlns:a="http://schemas.openxmlformats.org/drawingml/2006/main" xmlns:r="http://schemas.openxmlformats.org/officeDocument/2006/relationships" xmlns:p="http://schemas.openxmlformats.org/presentationml/2006/main" type="vertTitleAndTx" matchingName="Vertical Title and Text">
   <p:cSld name="VERTICAL_TITLE_AND_VERTICAL_TEXT">
     <p:spTree>
       <p:nvGrpSpPr>
@@ -3117,9 +3085,7 @@
               <a:defRPr/>
             </a:lvl9pPr>
           </a:lstStyle>
-          <a:p>
-            <a:endParaRPr/>
-          </a:p>
+          <a:p/>
         </p:txBody>
       </p:sp>
       <p:sp>
@@ -3304,9 +3270,7 @@
               <a:defRPr/>
             </a:lvl9pPr>
           </a:lstStyle>
-          <a:p>
-            <a:endParaRPr/>
-          </a:p>
+          <a:p/>
         </p:txBody>
       </p:sp>
       <p:sp>
@@ -3464,9 +3428,7 @@
               <a:defRPr/>
             </a:lvl9pPr>
           </a:lstStyle>
-          <a:p>
-            <a:endParaRPr/>
-          </a:p>
+          <a:p/>
         </p:txBody>
       </p:sp>
       <p:sp>
@@ -3624,9 +3586,7 @@
               <a:defRPr/>
             </a:lvl9pPr>
           </a:lstStyle>
-          <a:p>
-            <a:endParaRPr/>
-          </a:p>
+          <a:p/>
         </p:txBody>
       </p:sp>
       <p:sp>
@@ -3671,16 +3631,16 @@
                 <a:srgbClr val="000000"/>
               </a:buClr>
               <a:buSzPts val="1200"/>
-              <a:buFont typeface="Arial"/>
+              <a:buFont typeface="Arial" panose="020B0604020202020204"/>
               <a:buNone/>
               <a:defRPr sz="1200" b="0" i="0" u="none" strike="noStrike" cap="none">
                 <a:solidFill>
                   <a:srgbClr val="888888"/>
                 </a:solidFill>
-                <a:latin typeface="Calibri"/>
-                <a:ea typeface="Calibri"/>
-                <a:cs typeface="Calibri"/>
-                <a:sym typeface="Calibri"/>
+                <a:latin typeface="Calibri" panose="020F0502020204030204"/>
+                <a:ea typeface="Calibri" panose="020F0502020204030204"/>
+                <a:cs typeface="Calibri" panose="020F0502020204030204"/>
+                <a:sym typeface="Calibri" panose="020F0502020204030204"/>
               </a:defRPr>
             </a:lvl1pPr>
             <a:lvl2pPr marL="0" marR="0" lvl="1" indent="0" algn="r">
@@ -3697,16 +3657,16 @@
                 <a:srgbClr val="000000"/>
               </a:buClr>
               <a:buSzPts val="1200"/>
-              <a:buFont typeface="Arial"/>
+              <a:buFont typeface="Arial" panose="020B0604020202020204"/>
               <a:buNone/>
               <a:defRPr sz="1200" b="0" i="0" u="none" strike="noStrike" cap="none">
                 <a:solidFill>
                   <a:srgbClr val="888888"/>
                 </a:solidFill>
-                <a:latin typeface="Calibri"/>
-                <a:ea typeface="Calibri"/>
-                <a:cs typeface="Calibri"/>
-                <a:sym typeface="Calibri"/>
+                <a:latin typeface="Calibri" panose="020F0502020204030204"/>
+                <a:ea typeface="Calibri" panose="020F0502020204030204"/>
+                <a:cs typeface="Calibri" panose="020F0502020204030204"/>
+                <a:sym typeface="Calibri" panose="020F0502020204030204"/>
               </a:defRPr>
             </a:lvl2pPr>
             <a:lvl3pPr marL="0" marR="0" lvl="2" indent="0" algn="r">
@@ -3723,16 +3683,16 @@
                 <a:srgbClr val="000000"/>
               </a:buClr>
               <a:buSzPts val="1200"/>
-              <a:buFont typeface="Arial"/>
+              <a:buFont typeface="Arial" panose="020B0604020202020204"/>
               <a:buNone/>
               <a:defRPr sz="1200" b="0" i="0" u="none" strike="noStrike" cap="none">
                 <a:solidFill>
                   <a:srgbClr val="888888"/>
                 </a:solidFill>
-                <a:latin typeface="Calibri"/>
-                <a:ea typeface="Calibri"/>
-                <a:cs typeface="Calibri"/>
-                <a:sym typeface="Calibri"/>
+                <a:latin typeface="Calibri" panose="020F0502020204030204"/>
+                <a:ea typeface="Calibri" panose="020F0502020204030204"/>
+                <a:cs typeface="Calibri" panose="020F0502020204030204"/>
+                <a:sym typeface="Calibri" panose="020F0502020204030204"/>
               </a:defRPr>
             </a:lvl3pPr>
             <a:lvl4pPr marL="0" marR="0" lvl="3" indent="0" algn="r">
@@ -3749,16 +3709,16 @@
                 <a:srgbClr val="000000"/>
               </a:buClr>
               <a:buSzPts val="1200"/>
-              <a:buFont typeface="Arial"/>
+              <a:buFont typeface="Arial" panose="020B0604020202020204"/>
               <a:buNone/>
               <a:defRPr sz="1200" b="0" i="0" u="none" strike="noStrike" cap="none">
                 <a:solidFill>
                   <a:srgbClr val="888888"/>
                 </a:solidFill>
-                <a:latin typeface="Calibri"/>
-                <a:ea typeface="Calibri"/>
-                <a:cs typeface="Calibri"/>
-                <a:sym typeface="Calibri"/>
+                <a:latin typeface="Calibri" panose="020F0502020204030204"/>
+                <a:ea typeface="Calibri" panose="020F0502020204030204"/>
+                <a:cs typeface="Calibri" panose="020F0502020204030204"/>
+                <a:sym typeface="Calibri" panose="020F0502020204030204"/>
               </a:defRPr>
             </a:lvl4pPr>
             <a:lvl5pPr marL="0" marR="0" lvl="4" indent="0" algn="r">
@@ -3775,16 +3735,16 @@
                 <a:srgbClr val="000000"/>
               </a:buClr>
               <a:buSzPts val="1200"/>
-              <a:buFont typeface="Arial"/>
+              <a:buFont typeface="Arial" panose="020B0604020202020204"/>
               <a:buNone/>
               <a:defRPr sz="1200" b="0" i="0" u="none" strike="noStrike" cap="none">
                 <a:solidFill>
                   <a:srgbClr val="888888"/>
                 </a:solidFill>
-                <a:latin typeface="Calibri"/>
-                <a:ea typeface="Calibri"/>
-                <a:cs typeface="Calibri"/>
-                <a:sym typeface="Calibri"/>
+                <a:latin typeface="Calibri" panose="020F0502020204030204"/>
+                <a:ea typeface="Calibri" panose="020F0502020204030204"/>
+                <a:cs typeface="Calibri" panose="020F0502020204030204"/>
+                <a:sym typeface="Calibri" panose="020F0502020204030204"/>
               </a:defRPr>
             </a:lvl5pPr>
             <a:lvl6pPr marL="0" marR="0" lvl="5" indent="0" algn="r">
@@ -3801,16 +3761,16 @@
                 <a:srgbClr val="000000"/>
               </a:buClr>
               <a:buSzPts val="1200"/>
-              <a:buFont typeface="Arial"/>
+              <a:buFont typeface="Arial" panose="020B0604020202020204"/>
               <a:buNone/>
               <a:defRPr sz="1200" b="0" i="0" u="none" strike="noStrike" cap="none">
                 <a:solidFill>
                   <a:srgbClr val="888888"/>
                 </a:solidFill>
-                <a:latin typeface="Calibri"/>
-                <a:ea typeface="Calibri"/>
-                <a:cs typeface="Calibri"/>
-                <a:sym typeface="Calibri"/>
+                <a:latin typeface="Calibri" panose="020F0502020204030204"/>
+                <a:ea typeface="Calibri" panose="020F0502020204030204"/>
+                <a:cs typeface="Calibri" panose="020F0502020204030204"/>
+                <a:sym typeface="Calibri" panose="020F0502020204030204"/>
               </a:defRPr>
             </a:lvl6pPr>
             <a:lvl7pPr marL="0" marR="0" lvl="6" indent="0" algn="r">
@@ -3827,16 +3787,16 @@
                 <a:srgbClr val="000000"/>
               </a:buClr>
               <a:buSzPts val="1200"/>
-              <a:buFont typeface="Arial"/>
+              <a:buFont typeface="Arial" panose="020B0604020202020204"/>
               <a:buNone/>
               <a:defRPr sz="1200" b="0" i="0" u="none" strike="noStrike" cap="none">
                 <a:solidFill>
                   <a:srgbClr val="888888"/>
                 </a:solidFill>
-                <a:latin typeface="Calibri"/>
-                <a:ea typeface="Calibri"/>
-                <a:cs typeface="Calibri"/>
-                <a:sym typeface="Calibri"/>
+                <a:latin typeface="Calibri" panose="020F0502020204030204"/>
+                <a:ea typeface="Calibri" panose="020F0502020204030204"/>
+                <a:cs typeface="Calibri" panose="020F0502020204030204"/>
+                <a:sym typeface="Calibri" panose="020F0502020204030204"/>
               </a:defRPr>
             </a:lvl7pPr>
             <a:lvl8pPr marL="0" marR="0" lvl="7" indent="0" algn="r">
@@ -3853,16 +3813,16 @@
                 <a:srgbClr val="000000"/>
               </a:buClr>
               <a:buSzPts val="1200"/>
-              <a:buFont typeface="Arial"/>
+              <a:buFont typeface="Arial" panose="020B0604020202020204"/>
               <a:buNone/>
               <a:defRPr sz="1200" b="0" i="0" u="none" strike="noStrike" cap="none">
                 <a:solidFill>
                   <a:srgbClr val="888888"/>
                 </a:solidFill>
-                <a:latin typeface="Calibri"/>
-                <a:ea typeface="Calibri"/>
-                <a:cs typeface="Calibri"/>
-                <a:sym typeface="Calibri"/>
+                <a:latin typeface="Calibri" panose="020F0502020204030204"/>
+                <a:ea typeface="Calibri" panose="020F0502020204030204"/>
+                <a:cs typeface="Calibri" panose="020F0502020204030204"/>
+                <a:sym typeface="Calibri" panose="020F0502020204030204"/>
               </a:defRPr>
             </a:lvl8pPr>
             <a:lvl9pPr marL="0" marR="0" lvl="8" indent="0" algn="r">
@@ -3879,16 +3839,16 @@
                 <a:srgbClr val="000000"/>
               </a:buClr>
               <a:buSzPts val="1200"/>
-              <a:buFont typeface="Arial"/>
+              <a:buFont typeface="Arial" panose="020B0604020202020204"/>
               <a:buNone/>
               <a:defRPr sz="1200" b="0" i="0" u="none" strike="noStrike" cap="none">
                 <a:solidFill>
                   <a:srgbClr val="888888"/>
                 </a:solidFill>
-                <a:latin typeface="Calibri"/>
-                <a:ea typeface="Calibri"/>
-                <a:cs typeface="Calibri"/>
-                <a:sym typeface="Calibri"/>
+                <a:latin typeface="Calibri" panose="020F0502020204030204"/>
+                <a:ea typeface="Calibri" panose="020F0502020204030204"/>
+                <a:cs typeface="Calibri" panose="020F0502020204030204"/>
+                <a:sym typeface="Calibri" panose="020F0502020204030204"/>
               </a:defRPr>
             </a:lvl9pPr>
           </a:lstStyle>
@@ -3904,9 +3864,8 @@
             </a:pPr>
             <a:fld id="{00000000-1234-1234-1234-123412341234}" type="slidenum">
               <a:rPr lang="en-US"/>
-              <a:t>‹#›</a:t>
             </a:fld>
-            <a:endParaRPr/>
+            <a:endParaRPr lang="en-US"/>
           </a:p>
         </p:txBody>
       </p:sp>
@@ -3919,7 +3878,7 @@
 </file>
 
 <file path=ppt/slideLayouts/slideLayout2.xml><?xml version="1.0" encoding="utf-8"?>
-<p:sldLayout xmlns:a="http://schemas.openxmlformats.org/drawingml/2006/main" xmlns:r="http://schemas.openxmlformats.org/officeDocument/2006/relationships" xmlns:p="http://schemas.openxmlformats.org/presentationml/2006/main" matchingName="Title and Content" type="obj">
+<p:sldLayout xmlns:a="http://schemas.openxmlformats.org/drawingml/2006/main" xmlns:r="http://schemas.openxmlformats.org/officeDocument/2006/relationships" xmlns:p="http://schemas.openxmlformats.org/presentationml/2006/main" type="obj" matchingName="Title and Content">
   <p:cSld name="OBJECT">
     <p:spTree>
       <p:nvGrpSpPr>
@@ -4093,9 +4052,7 @@
               <a:defRPr/>
             </a:lvl9pPr>
           </a:lstStyle>
-          <a:p>
-            <a:endParaRPr/>
-          </a:p>
+          <a:p/>
         </p:txBody>
       </p:sp>
       <p:sp>
@@ -4280,9 +4237,7 @@
               <a:defRPr/>
             </a:lvl9pPr>
           </a:lstStyle>
-          <a:p>
-            <a:endParaRPr/>
-          </a:p>
+          <a:p/>
         </p:txBody>
       </p:sp>
       <p:sp>
@@ -4440,9 +4395,7 @@
               <a:defRPr/>
             </a:lvl9pPr>
           </a:lstStyle>
-          <a:p>
-            <a:endParaRPr/>
-          </a:p>
+          <a:p/>
         </p:txBody>
       </p:sp>
       <p:sp>
@@ -4600,9 +4553,7 @@
               <a:defRPr/>
             </a:lvl9pPr>
           </a:lstStyle>
-          <a:p>
-            <a:endParaRPr/>
-          </a:p>
+          <a:p/>
         </p:txBody>
       </p:sp>
       <p:sp>
@@ -4647,16 +4598,16 @@
                 <a:srgbClr val="000000"/>
               </a:buClr>
               <a:buSzPts val="1200"/>
-              <a:buFont typeface="Arial"/>
+              <a:buFont typeface="Arial" panose="020B0604020202020204"/>
               <a:buNone/>
               <a:defRPr sz="1200" b="0" i="0" u="none" strike="noStrike" cap="none">
                 <a:solidFill>
                   <a:srgbClr val="888888"/>
                 </a:solidFill>
-                <a:latin typeface="Calibri"/>
-                <a:ea typeface="Calibri"/>
-                <a:cs typeface="Calibri"/>
-                <a:sym typeface="Calibri"/>
+                <a:latin typeface="Calibri" panose="020F0502020204030204"/>
+                <a:ea typeface="Calibri" panose="020F0502020204030204"/>
+                <a:cs typeface="Calibri" panose="020F0502020204030204"/>
+                <a:sym typeface="Calibri" panose="020F0502020204030204"/>
               </a:defRPr>
             </a:lvl1pPr>
             <a:lvl2pPr marL="0" marR="0" lvl="1" indent="0" algn="r">
@@ -4673,16 +4624,16 @@
                 <a:srgbClr val="000000"/>
               </a:buClr>
               <a:buSzPts val="1200"/>
-              <a:buFont typeface="Arial"/>
+              <a:buFont typeface="Arial" panose="020B0604020202020204"/>
               <a:buNone/>
               <a:defRPr sz="1200" b="0" i="0" u="none" strike="noStrike" cap="none">
                 <a:solidFill>
                   <a:srgbClr val="888888"/>
                 </a:solidFill>
-                <a:latin typeface="Calibri"/>
-                <a:ea typeface="Calibri"/>
-                <a:cs typeface="Calibri"/>
-                <a:sym typeface="Calibri"/>
+                <a:latin typeface="Calibri" panose="020F0502020204030204"/>
+                <a:ea typeface="Calibri" panose="020F0502020204030204"/>
+                <a:cs typeface="Calibri" panose="020F0502020204030204"/>
+                <a:sym typeface="Calibri" panose="020F0502020204030204"/>
               </a:defRPr>
             </a:lvl2pPr>
             <a:lvl3pPr marL="0" marR="0" lvl="2" indent="0" algn="r">
@@ -4699,16 +4650,16 @@
                 <a:srgbClr val="000000"/>
               </a:buClr>
               <a:buSzPts val="1200"/>
-              <a:buFont typeface="Arial"/>
+              <a:buFont typeface="Arial" panose="020B0604020202020204"/>
               <a:buNone/>
               <a:defRPr sz="1200" b="0" i="0" u="none" strike="noStrike" cap="none">
                 <a:solidFill>
                   <a:srgbClr val="888888"/>
                 </a:solidFill>
-                <a:latin typeface="Calibri"/>
-                <a:ea typeface="Calibri"/>
-                <a:cs typeface="Calibri"/>
-                <a:sym typeface="Calibri"/>
+                <a:latin typeface="Calibri" panose="020F0502020204030204"/>
+                <a:ea typeface="Calibri" panose="020F0502020204030204"/>
+                <a:cs typeface="Calibri" panose="020F0502020204030204"/>
+                <a:sym typeface="Calibri" panose="020F0502020204030204"/>
               </a:defRPr>
             </a:lvl3pPr>
             <a:lvl4pPr marL="0" marR="0" lvl="3" indent="0" algn="r">
@@ -4725,16 +4676,16 @@
                 <a:srgbClr val="000000"/>
               </a:buClr>
               <a:buSzPts val="1200"/>
-              <a:buFont typeface="Arial"/>
+              <a:buFont typeface="Arial" panose="020B0604020202020204"/>
               <a:buNone/>
               <a:defRPr sz="1200" b="0" i="0" u="none" strike="noStrike" cap="none">
                 <a:solidFill>
                   <a:srgbClr val="888888"/>
                 </a:solidFill>
-                <a:latin typeface="Calibri"/>
-                <a:ea typeface="Calibri"/>
-                <a:cs typeface="Calibri"/>
-                <a:sym typeface="Calibri"/>
+                <a:latin typeface="Calibri" panose="020F0502020204030204"/>
+                <a:ea typeface="Calibri" panose="020F0502020204030204"/>
+                <a:cs typeface="Calibri" panose="020F0502020204030204"/>
+                <a:sym typeface="Calibri" panose="020F0502020204030204"/>
               </a:defRPr>
             </a:lvl4pPr>
             <a:lvl5pPr marL="0" marR="0" lvl="4" indent="0" algn="r">
@@ -4751,16 +4702,16 @@
                 <a:srgbClr val="000000"/>
               </a:buClr>
               <a:buSzPts val="1200"/>
-              <a:buFont typeface="Arial"/>
+              <a:buFont typeface="Arial" panose="020B0604020202020204"/>
               <a:buNone/>
               <a:defRPr sz="1200" b="0" i="0" u="none" strike="noStrike" cap="none">
                 <a:solidFill>
                   <a:srgbClr val="888888"/>
                 </a:solidFill>
-                <a:latin typeface="Calibri"/>
-                <a:ea typeface="Calibri"/>
-                <a:cs typeface="Calibri"/>
-                <a:sym typeface="Calibri"/>
+                <a:latin typeface="Calibri" panose="020F0502020204030204"/>
+                <a:ea typeface="Calibri" panose="020F0502020204030204"/>
+                <a:cs typeface="Calibri" panose="020F0502020204030204"/>
+                <a:sym typeface="Calibri" panose="020F0502020204030204"/>
               </a:defRPr>
             </a:lvl5pPr>
             <a:lvl6pPr marL="0" marR="0" lvl="5" indent="0" algn="r">
@@ -4777,16 +4728,16 @@
                 <a:srgbClr val="000000"/>
               </a:buClr>
               <a:buSzPts val="1200"/>
-              <a:buFont typeface="Arial"/>
+              <a:buFont typeface="Arial" panose="020B0604020202020204"/>
               <a:buNone/>
               <a:defRPr sz="1200" b="0" i="0" u="none" strike="noStrike" cap="none">
                 <a:solidFill>
                   <a:srgbClr val="888888"/>
                 </a:solidFill>
-                <a:latin typeface="Calibri"/>
-                <a:ea typeface="Calibri"/>
-                <a:cs typeface="Calibri"/>
-                <a:sym typeface="Calibri"/>
+                <a:latin typeface="Calibri" panose="020F0502020204030204"/>
+                <a:ea typeface="Calibri" panose="020F0502020204030204"/>
+                <a:cs typeface="Calibri" panose="020F0502020204030204"/>
+                <a:sym typeface="Calibri" panose="020F0502020204030204"/>
               </a:defRPr>
             </a:lvl6pPr>
             <a:lvl7pPr marL="0" marR="0" lvl="6" indent="0" algn="r">
@@ -4803,16 +4754,16 @@
                 <a:srgbClr val="000000"/>
               </a:buClr>
               <a:buSzPts val="1200"/>
-              <a:buFont typeface="Arial"/>
+              <a:buFont typeface="Arial" panose="020B0604020202020204"/>
               <a:buNone/>
               <a:defRPr sz="1200" b="0" i="0" u="none" strike="noStrike" cap="none">
                 <a:solidFill>
                   <a:srgbClr val="888888"/>
                 </a:solidFill>
-                <a:latin typeface="Calibri"/>
-                <a:ea typeface="Calibri"/>
-                <a:cs typeface="Calibri"/>
-                <a:sym typeface="Calibri"/>
+                <a:latin typeface="Calibri" panose="020F0502020204030204"/>
+                <a:ea typeface="Calibri" panose="020F0502020204030204"/>
+                <a:cs typeface="Calibri" panose="020F0502020204030204"/>
+                <a:sym typeface="Calibri" panose="020F0502020204030204"/>
               </a:defRPr>
             </a:lvl7pPr>
             <a:lvl8pPr marL="0" marR="0" lvl="7" indent="0" algn="r">
@@ -4829,16 +4780,16 @@
                 <a:srgbClr val="000000"/>
               </a:buClr>
               <a:buSzPts val="1200"/>
-              <a:buFont typeface="Arial"/>
+              <a:buFont typeface="Arial" panose="020B0604020202020204"/>
               <a:buNone/>
               <a:defRPr sz="1200" b="0" i="0" u="none" strike="noStrike" cap="none">
                 <a:solidFill>
                   <a:srgbClr val="888888"/>
                 </a:solidFill>
-                <a:latin typeface="Calibri"/>
-                <a:ea typeface="Calibri"/>
-                <a:cs typeface="Calibri"/>
-                <a:sym typeface="Calibri"/>
+                <a:latin typeface="Calibri" panose="020F0502020204030204"/>
+                <a:ea typeface="Calibri" panose="020F0502020204030204"/>
+                <a:cs typeface="Calibri" panose="020F0502020204030204"/>
+                <a:sym typeface="Calibri" panose="020F0502020204030204"/>
               </a:defRPr>
             </a:lvl8pPr>
             <a:lvl9pPr marL="0" marR="0" lvl="8" indent="0" algn="r">
@@ -4855,16 +4806,16 @@
                 <a:srgbClr val="000000"/>
               </a:buClr>
               <a:buSzPts val="1200"/>
-              <a:buFont typeface="Arial"/>
+              <a:buFont typeface="Arial" panose="020B0604020202020204"/>
               <a:buNone/>
               <a:defRPr sz="1200" b="0" i="0" u="none" strike="noStrike" cap="none">
                 <a:solidFill>
                   <a:srgbClr val="888888"/>
                 </a:solidFill>
-                <a:latin typeface="Calibri"/>
-                <a:ea typeface="Calibri"/>
-                <a:cs typeface="Calibri"/>
-                <a:sym typeface="Calibri"/>
+                <a:latin typeface="Calibri" panose="020F0502020204030204"/>
+                <a:ea typeface="Calibri" panose="020F0502020204030204"/>
+                <a:cs typeface="Calibri" panose="020F0502020204030204"/>
+                <a:sym typeface="Calibri" panose="020F0502020204030204"/>
               </a:defRPr>
             </a:lvl9pPr>
           </a:lstStyle>
@@ -4880,9 +4831,8 @@
             </a:pPr>
             <a:fld id="{00000000-1234-1234-1234-123412341234}" type="slidenum">
               <a:rPr lang="en-US"/>
-              <a:t>‹#›</a:t>
             </a:fld>
-            <a:endParaRPr/>
+            <a:endParaRPr lang="en-US"/>
           </a:p>
         </p:txBody>
       </p:sp>
@@ -4895,7 +4845,7 @@
 </file>
 
 <file path=ppt/slideLayouts/slideLayout3.xml><?xml version="1.0" encoding="utf-8"?>
-<p:sldLayout xmlns:a="http://schemas.openxmlformats.org/drawingml/2006/main" xmlns:r="http://schemas.openxmlformats.org/officeDocument/2006/relationships" xmlns:p="http://schemas.openxmlformats.org/presentationml/2006/main" matchingName="Section Header" type="secHead">
+<p:sldLayout xmlns:a="http://schemas.openxmlformats.org/drawingml/2006/main" xmlns:r="http://schemas.openxmlformats.org/officeDocument/2006/relationships" xmlns:p="http://schemas.openxmlformats.org/presentationml/2006/main" type="secHead" matchingName="Section Header">
   <p:cSld name="SECTION_HEADER">
     <p:spTree>
       <p:nvGrpSpPr>
@@ -4953,7 +4903,7 @@
                 <a:schemeClr val="dk1"/>
               </a:buClr>
               <a:buSzPts val="4000"/>
-              <a:buFont typeface="Calibri"/>
+              <a:buFont typeface="Calibri" panose="020F0502020204030204"/>
               <a:buNone/>
               <a:defRPr sz="4000" b="1" cap="none"/>
             </a:lvl1pPr>
@@ -5070,9 +5020,7 @@
               <a:defRPr/>
             </a:lvl9pPr>
           </a:lstStyle>
-          <a:p>
-            <a:endParaRPr/>
-          </a:p>
+          <a:p/>
         </p:txBody>
       </p:sp>
       <p:sp>
@@ -5293,9 +5241,7 @@
               </a:defRPr>
             </a:lvl9pPr>
           </a:lstStyle>
-          <a:p>
-            <a:endParaRPr/>
-          </a:p>
+          <a:p/>
         </p:txBody>
       </p:sp>
       <p:sp>
@@ -5453,9 +5399,7 @@
               <a:defRPr/>
             </a:lvl9pPr>
           </a:lstStyle>
-          <a:p>
-            <a:endParaRPr/>
-          </a:p>
+          <a:p/>
         </p:txBody>
       </p:sp>
       <p:sp>
@@ -5613,9 +5557,7 @@
               <a:defRPr/>
             </a:lvl9pPr>
           </a:lstStyle>
-          <a:p>
-            <a:endParaRPr/>
-          </a:p>
+          <a:p/>
         </p:txBody>
       </p:sp>
       <p:sp>
@@ -5660,16 +5602,16 @@
                 <a:srgbClr val="000000"/>
               </a:buClr>
               <a:buSzPts val="1200"/>
-              <a:buFont typeface="Arial"/>
+              <a:buFont typeface="Arial" panose="020B0604020202020204"/>
               <a:buNone/>
               <a:defRPr sz="1200" b="0" i="0" u="none" strike="noStrike" cap="none">
                 <a:solidFill>
                   <a:srgbClr val="888888"/>
                 </a:solidFill>
-                <a:latin typeface="Calibri"/>
-                <a:ea typeface="Calibri"/>
-                <a:cs typeface="Calibri"/>
-                <a:sym typeface="Calibri"/>
+                <a:latin typeface="Calibri" panose="020F0502020204030204"/>
+                <a:ea typeface="Calibri" panose="020F0502020204030204"/>
+                <a:cs typeface="Calibri" panose="020F0502020204030204"/>
+                <a:sym typeface="Calibri" panose="020F0502020204030204"/>
               </a:defRPr>
             </a:lvl1pPr>
             <a:lvl2pPr marL="0" marR="0" lvl="1" indent="0" algn="r">
@@ -5686,16 +5628,16 @@
                 <a:srgbClr val="000000"/>
               </a:buClr>
               <a:buSzPts val="1200"/>
-              <a:buFont typeface="Arial"/>
+              <a:buFont typeface="Arial" panose="020B0604020202020204"/>
               <a:buNone/>
               <a:defRPr sz="1200" b="0" i="0" u="none" strike="noStrike" cap="none">
                 <a:solidFill>
                   <a:srgbClr val="888888"/>
                 </a:solidFill>
-                <a:latin typeface="Calibri"/>
-                <a:ea typeface="Calibri"/>
-                <a:cs typeface="Calibri"/>
-                <a:sym typeface="Calibri"/>
+                <a:latin typeface="Calibri" panose="020F0502020204030204"/>
+                <a:ea typeface="Calibri" panose="020F0502020204030204"/>
+                <a:cs typeface="Calibri" panose="020F0502020204030204"/>
+                <a:sym typeface="Calibri" panose="020F0502020204030204"/>
               </a:defRPr>
             </a:lvl2pPr>
             <a:lvl3pPr marL="0" marR="0" lvl="2" indent="0" algn="r">
@@ -5712,16 +5654,16 @@
                 <a:srgbClr val="000000"/>
               </a:buClr>
               <a:buSzPts val="1200"/>
-              <a:buFont typeface="Arial"/>
+              <a:buFont typeface="Arial" panose="020B0604020202020204"/>
               <a:buNone/>
               <a:defRPr sz="1200" b="0" i="0" u="none" strike="noStrike" cap="none">
                 <a:solidFill>
                   <a:srgbClr val="888888"/>
                 </a:solidFill>
-                <a:latin typeface="Calibri"/>
-                <a:ea typeface="Calibri"/>
-                <a:cs typeface="Calibri"/>
-                <a:sym typeface="Calibri"/>
+                <a:latin typeface="Calibri" panose="020F0502020204030204"/>
+                <a:ea typeface="Calibri" panose="020F0502020204030204"/>
+                <a:cs typeface="Calibri" panose="020F0502020204030204"/>
+                <a:sym typeface="Calibri" panose="020F0502020204030204"/>
               </a:defRPr>
             </a:lvl3pPr>
             <a:lvl4pPr marL="0" marR="0" lvl="3" indent="0" algn="r">
@@ -5738,16 +5680,16 @@
                 <a:srgbClr val="000000"/>
               </a:buClr>
               <a:buSzPts val="1200"/>
-              <a:buFont typeface="Arial"/>
+              <a:buFont typeface="Arial" panose="020B0604020202020204"/>
               <a:buNone/>
               <a:defRPr sz="1200" b="0" i="0" u="none" strike="noStrike" cap="none">
                 <a:solidFill>
                   <a:srgbClr val="888888"/>
                 </a:solidFill>
-                <a:latin typeface="Calibri"/>
-                <a:ea typeface="Calibri"/>
-                <a:cs typeface="Calibri"/>
-                <a:sym typeface="Calibri"/>
+                <a:latin typeface="Calibri" panose="020F0502020204030204"/>
+                <a:ea typeface="Calibri" panose="020F0502020204030204"/>
+                <a:cs typeface="Calibri" panose="020F0502020204030204"/>
+                <a:sym typeface="Calibri" panose="020F0502020204030204"/>
               </a:defRPr>
             </a:lvl4pPr>
             <a:lvl5pPr marL="0" marR="0" lvl="4" indent="0" algn="r">
@@ -5764,16 +5706,16 @@
                 <a:srgbClr val="000000"/>
               </a:buClr>
               <a:buSzPts val="1200"/>
-              <a:buFont typeface="Arial"/>
+              <a:buFont typeface="Arial" panose="020B0604020202020204"/>
               <a:buNone/>
               <a:defRPr sz="1200" b="0" i="0" u="none" strike="noStrike" cap="none">
                 <a:solidFill>
                   <a:srgbClr val="888888"/>
                 </a:solidFill>
-                <a:latin typeface="Calibri"/>
-                <a:ea typeface="Calibri"/>
-                <a:cs typeface="Calibri"/>
-                <a:sym typeface="Calibri"/>
+                <a:latin typeface="Calibri" panose="020F0502020204030204"/>
+                <a:ea typeface="Calibri" panose="020F0502020204030204"/>
+                <a:cs typeface="Calibri" panose="020F0502020204030204"/>
+                <a:sym typeface="Calibri" panose="020F0502020204030204"/>
               </a:defRPr>
             </a:lvl5pPr>
             <a:lvl6pPr marL="0" marR="0" lvl="5" indent="0" algn="r">
@@ -5790,16 +5732,16 @@
                 <a:srgbClr val="000000"/>
               </a:buClr>
               <a:buSzPts val="1200"/>
-              <a:buFont typeface="Arial"/>
+              <a:buFont typeface="Arial" panose="020B0604020202020204"/>
               <a:buNone/>
               <a:defRPr sz="1200" b="0" i="0" u="none" strike="noStrike" cap="none">
                 <a:solidFill>
                   <a:srgbClr val="888888"/>
                 </a:solidFill>
-                <a:latin typeface="Calibri"/>
-                <a:ea typeface="Calibri"/>
-                <a:cs typeface="Calibri"/>
-                <a:sym typeface="Calibri"/>
+                <a:latin typeface="Calibri" panose="020F0502020204030204"/>
+                <a:ea typeface="Calibri" panose="020F0502020204030204"/>
+                <a:cs typeface="Calibri" panose="020F0502020204030204"/>
+                <a:sym typeface="Calibri" panose="020F0502020204030204"/>
               </a:defRPr>
             </a:lvl6pPr>
             <a:lvl7pPr marL="0" marR="0" lvl="6" indent="0" algn="r">
@@ -5816,16 +5758,16 @@
                 <a:srgbClr val="000000"/>
               </a:buClr>
               <a:buSzPts val="1200"/>
-              <a:buFont typeface="Arial"/>
+              <a:buFont typeface="Arial" panose="020B0604020202020204"/>
               <a:buNone/>
               <a:defRPr sz="1200" b="0" i="0" u="none" strike="noStrike" cap="none">
                 <a:solidFill>
                   <a:srgbClr val="888888"/>
                 </a:solidFill>
-                <a:latin typeface="Calibri"/>
-                <a:ea typeface="Calibri"/>
-                <a:cs typeface="Calibri"/>
-                <a:sym typeface="Calibri"/>
+                <a:latin typeface="Calibri" panose="020F0502020204030204"/>
+                <a:ea typeface="Calibri" panose="020F0502020204030204"/>
+                <a:cs typeface="Calibri" panose="020F0502020204030204"/>
+                <a:sym typeface="Calibri" panose="020F0502020204030204"/>
               </a:defRPr>
             </a:lvl7pPr>
             <a:lvl8pPr marL="0" marR="0" lvl="7" indent="0" algn="r">
@@ -5842,16 +5784,16 @@
                 <a:srgbClr val="000000"/>
               </a:buClr>
               <a:buSzPts val="1200"/>
-              <a:buFont typeface="Arial"/>
+              <a:buFont typeface="Arial" panose="020B0604020202020204"/>
               <a:buNone/>
               <a:defRPr sz="1200" b="0" i="0" u="none" strike="noStrike" cap="none">
                 <a:solidFill>
                   <a:srgbClr val="888888"/>
                 </a:solidFill>
-                <a:latin typeface="Calibri"/>
-                <a:ea typeface="Calibri"/>
-                <a:cs typeface="Calibri"/>
-                <a:sym typeface="Calibri"/>
+                <a:latin typeface="Calibri" panose="020F0502020204030204"/>
+                <a:ea typeface="Calibri" panose="020F0502020204030204"/>
+                <a:cs typeface="Calibri" panose="020F0502020204030204"/>
+                <a:sym typeface="Calibri" panose="020F0502020204030204"/>
               </a:defRPr>
             </a:lvl8pPr>
             <a:lvl9pPr marL="0" marR="0" lvl="8" indent="0" algn="r">
@@ -5868,16 +5810,16 @@
                 <a:srgbClr val="000000"/>
               </a:buClr>
               <a:buSzPts val="1200"/>
-              <a:buFont typeface="Arial"/>
+              <a:buFont typeface="Arial" panose="020B0604020202020204"/>
               <a:buNone/>
               <a:defRPr sz="1200" b="0" i="0" u="none" strike="noStrike" cap="none">
                 <a:solidFill>
                   <a:srgbClr val="888888"/>
                 </a:solidFill>
-                <a:latin typeface="Calibri"/>
-                <a:ea typeface="Calibri"/>
-                <a:cs typeface="Calibri"/>
-                <a:sym typeface="Calibri"/>
+                <a:latin typeface="Calibri" panose="020F0502020204030204"/>
+                <a:ea typeface="Calibri" panose="020F0502020204030204"/>
+                <a:cs typeface="Calibri" panose="020F0502020204030204"/>
+                <a:sym typeface="Calibri" panose="020F0502020204030204"/>
               </a:defRPr>
             </a:lvl9pPr>
           </a:lstStyle>
@@ -5893,9 +5835,8 @@
             </a:pPr>
             <a:fld id="{00000000-1234-1234-1234-123412341234}" type="slidenum">
               <a:rPr lang="en-US"/>
-              <a:t>‹#›</a:t>
             </a:fld>
-            <a:endParaRPr/>
+            <a:endParaRPr lang="en-US"/>
           </a:p>
         </p:txBody>
       </p:sp>
@@ -5908,7 +5849,7 @@
 </file>
 
 <file path=ppt/slideLayouts/slideLayout4.xml><?xml version="1.0" encoding="utf-8"?>
-<p:sldLayout xmlns:a="http://schemas.openxmlformats.org/drawingml/2006/main" xmlns:r="http://schemas.openxmlformats.org/officeDocument/2006/relationships" xmlns:p="http://schemas.openxmlformats.org/presentationml/2006/main" matchingName="Two Content" type="twoObj">
+<p:sldLayout xmlns:a="http://schemas.openxmlformats.org/drawingml/2006/main" xmlns:r="http://schemas.openxmlformats.org/officeDocument/2006/relationships" xmlns:p="http://schemas.openxmlformats.org/presentationml/2006/main" type="twoObj" matchingName="Two Content">
   <p:cSld name="TWO_OBJECTS">
     <p:spTree>
       <p:nvGrpSpPr>
@@ -6082,9 +6023,7 @@
               <a:defRPr/>
             </a:lvl9pPr>
           </a:lstStyle>
-          <a:p>
-            <a:endParaRPr/>
-          </a:p>
+          <a:p/>
         </p:txBody>
       </p:sp>
       <p:sp>
@@ -6269,9 +6208,7 @@
               <a:defRPr sz="1800"/>
             </a:lvl9pPr>
           </a:lstStyle>
-          <a:p>
-            <a:endParaRPr/>
-          </a:p>
+          <a:p/>
         </p:txBody>
       </p:sp>
       <p:sp>
@@ -6456,9 +6393,7 @@
               <a:defRPr sz="1800"/>
             </a:lvl9pPr>
           </a:lstStyle>
-          <a:p>
-            <a:endParaRPr/>
-          </a:p>
+          <a:p/>
         </p:txBody>
       </p:sp>
       <p:sp>
@@ -6616,9 +6551,7 @@
               <a:defRPr/>
             </a:lvl9pPr>
           </a:lstStyle>
-          <a:p>
-            <a:endParaRPr/>
-          </a:p>
+          <a:p/>
         </p:txBody>
       </p:sp>
       <p:sp>
@@ -6776,9 +6709,7 @@
               <a:defRPr/>
             </a:lvl9pPr>
           </a:lstStyle>
-          <a:p>
-            <a:endParaRPr/>
-          </a:p>
+          <a:p/>
         </p:txBody>
       </p:sp>
       <p:sp>
@@ -6823,16 +6754,16 @@
                 <a:srgbClr val="000000"/>
               </a:buClr>
               <a:buSzPts val="1200"/>
-              <a:buFont typeface="Arial"/>
+              <a:buFont typeface="Arial" panose="020B0604020202020204"/>
               <a:buNone/>
               <a:defRPr sz="1200" b="0" i="0" u="none" strike="noStrike" cap="none">
                 <a:solidFill>
                   <a:srgbClr val="888888"/>
                 </a:solidFill>
-                <a:latin typeface="Calibri"/>
-                <a:ea typeface="Calibri"/>
-                <a:cs typeface="Calibri"/>
-                <a:sym typeface="Calibri"/>
+                <a:latin typeface="Calibri" panose="020F0502020204030204"/>
+                <a:ea typeface="Calibri" panose="020F0502020204030204"/>
+                <a:cs typeface="Calibri" panose="020F0502020204030204"/>
+                <a:sym typeface="Calibri" panose="020F0502020204030204"/>
               </a:defRPr>
             </a:lvl1pPr>
             <a:lvl2pPr marL="0" marR="0" lvl="1" indent="0" algn="r">
@@ -6849,16 +6780,16 @@
                 <a:srgbClr val="000000"/>
               </a:buClr>
               <a:buSzPts val="1200"/>
-              <a:buFont typeface="Arial"/>
+              <a:buFont typeface="Arial" panose="020B0604020202020204"/>
               <a:buNone/>
               <a:defRPr sz="1200" b="0" i="0" u="none" strike="noStrike" cap="none">
                 <a:solidFill>
                   <a:srgbClr val="888888"/>
                 </a:solidFill>
-                <a:latin typeface="Calibri"/>
-                <a:ea typeface="Calibri"/>
-                <a:cs typeface="Calibri"/>
-                <a:sym typeface="Calibri"/>
+                <a:latin typeface="Calibri" panose="020F0502020204030204"/>
+                <a:ea typeface="Calibri" panose="020F0502020204030204"/>
+                <a:cs typeface="Calibri" panose="020F0502020204030204"/>
+                <a:sym typeface="Calibri" panose="020F0502020204030204"/>
               </a:defRPr>
             </a:lvl2pPr>
             <a:lvl3pPr marL="0" marR="0" lvl="2" indent="0" algn="r">
@@ -6875,16 +6806,16 @@
                 <a:srgbClr val="000000"/>
               </a:buClr>
               <a:buSzPts val="1200"/>
-              <a:buFont typeface="Arial"/>
+              <a:buFont typeface="Arial" panose="020B0604020202020204"/>
               <a:buNone/>
               <a:defRPr sz="1200" b="0" i="0" u="none" strike="noStrike" cap="none">
                 <a:solidFill>
                   <a:srgbClr val="888888"/>
                 </a:solidFill>
-                <a:latin typeface="Calibri"/>
-                <a:ea typeface="Calibri"/>
-                <a:cs typeface="Calibri"/>
-                <a:sym typeface="Calibri"/>
+                <a:latin typeface="Calibri" panose="020F0502020204030204"/>
+                <a:ea typeface="Calibri" panose="020F0502020204030204"/>
+                <a:cs typeface="Calibri" panose="020F0502020204030204"/>
+                <a:sym typeface="Calibri" panose="020F0502020204030204"/>
               </a:defRPr>
             </a:lvl3pPr>
             <a:lvl4pPr marL="0" marR="0" lvl="3" indent="0" algn="r">
@@ -6901,16 +6832,16 @@
                 <a:srgbClr val="000000"/>
               </a:buClr>
               <a:buSzPts val="1200"/>
-              <a:buFont typeface="Arial"/>
+              <a:buFont typeface="Arial" panose="020B0604020202020204"/>
               <a:buNone/>
               <a:defRPr sz="1200" b="0" i="0" u="none" strike="noStrike" cap="none">
                 <a:solidFill>
                   <a:srgbClr val="888888"/>
                 </a:solidFill>
-                <a:latin typeface="Calibri"/>
-                <a:ea typeface="Calibri"/>
-                <a:cs typeface="Calibri"/>
-                <a:sym typeface="Calibri"/>
+                <a:latin typeface="Calibri" panose="020F0502020204030204"/>
+                <a:ea typeface="Calibri" panose="020F0502020204030204"/>
+                <a:cs typeface="Calibri" panose="020F0502020204030204"/>
+                <a:sym typeface="Calibri" panose="020F0502020204030204"/>
               </a:defRPr>
             </a:lvl4pPr>
             <a:lvl5pPr marL="0" marR="0" lvl="4" indent="0" algn="r">
@@ -6927,16 +6858,16 @@
                 <a:srgbClr val="000000"/>
               </a:buClr>
               <a:buSzPts val="1200"/>
-              <a:buFont typeface="Arial"/>
+              <a:buFont typeface="Arial" panose="020B0604020202020204"/>
               <a:buNone/>
               <a:defRPr sz="1200" b="0" i="0" u="none" strike="noStrike" cap="none">
                 <a:solidFill>
                   <a:srgbClr val="888888"/>
                 </a:solidFill>
-                <a:latin typeface="Calibri"/>
-                <a:ea typeface="Calibri"/>
-                <a:cs typeface="Calibri"/>
-                <a:sym typeface="Calibri"/>
+                <a:latin typeface="Calibri" panose="020F0502020204030204"/>
+                <a:ea typeface="Calibri" panose="020F0502020204030204"/>
+                <a:cs typeface="Calibri" panose="020F0502020204030204"/>
+                <a:sym typeface="Calibri" panose="020F0502020204030204"/>
               </a:defRPr>
             </a:lvl5pPr>
             <a:lvl6pPr marL="0" marR="0" lvl="5" indent="0" algn="r">
@@ -6953,16 +6884,16 @@
                 <a:srgbClr val="000000"/>
               </a:buClr>
               <a:buSzPts val="1200"/>
-              <a:buFont typeface="Arial"/>
+              <a:buFont typeface="Arial" panose="020B0604020202020204"/>
               <a:buNone/>
               <a:defRPr sz="1200" b="0" i="0" u="none" strike="noStrike" cap="none">
                 <a:solidFill>
                   <a:srgbClr val="888888"/>
                 </a:solidFill>
-                <a:latin typeface="Calibri"/>
-                <a:ea typeface="Calibri"/>
-                <a:cs typeface="Calibri"/>
-                <a:sym typeface="Calibri"/>
+                <a:latin typeface="Calibri" panose="020F0502020204030204"/>
+                <a:ea typeface="Calibri" panose="020F0502020204030204"/>
+                <a:cs typeface="Calibri" panose="020F0502020204030204"/>
+                <a:sym typeface="Calibri" panose="020F0502020204030204"/>
               </a:defRPr>
             </a:lvl6pPr>
             <a:lvl7pPr marL="0" marR="0" lvl="6" indent="0" algn="r">
@@ -6979,16 +6910,16 @@
                 <a:srgbClr val="000000"/>
               </a:buClr>
               <a:buSzPts val="1200"/>
-              <a:buFont typeface="Arial"/>
+              <a:buFont typeface="Arial" panose="020B0604020202020204"/>
               <a:buNone/>
               <a:defRPr sz="1200" b="0" i="0" u="none" strike="noStrike" cap="none">
                 <a:solidFill>
                   <a:srgbClr val="888888"/>
                 </a:solidFill>
-                <a:latin typeface="Calibri"/>
-                <a:ea typeface="Calibri"/>
-                <a:cs typeface="Calibri"/>
-                <a:sym typeface="Calibri"/>
+                <a:latin typeface="Calibri" panose="020F0502020204030204"/>
+                <a:ea typeface="Calibri" panose="020F0502020204030204"/>
+                <a:cs typeface="Calibri" panose="020F0502020204030204"/>
+                <a:sym typeface="Calibri" panose="020F0502020204030204"/>
               </a:defRPr>
             </a:lvl7pPr>
             <a:lvl8pPr marL="0" marR="0" lvl="7" indent="0" algn="r">
@@ -7005,16 +6936,16 @@
                 <a:srgbClr val="000000"/>
               </a:buClr>
               <a:buSzPts val="1200"/>
-              <a:buFont typeface="Arial"/>
+              <a:buFont typeface="Arial" panose="020B0604020202020204"/>
               <a:buNone/>
               <a:defRPr sz="1200" b="0" i="0" u="none" strike="noStrike" cap="none">
                 <a:solidFill>
                   <a:srgbClr val="888888"/>
                 </a:solidFill>
-                <a:latin typeface="Calibri"/>
-                <a:ea typeface="Calibri"/>
-                <a:cs typeface="Calibri"/>
-                <a:sym typeface="Calibri"/>
+                <a:latin typeface="Calibri" panose="020F0502020204030204"/>
+                <a:ea typeface="Calibri" panose="020F0502020204030204"/>
+                <a:cs typeface="Calibri" panose="020F0502020204030204"/>
+                <a:sym typeface="Calibri" panose="020F0502020204030204"/>
               </a:defRPr>
             </a:lvl8pPr>
             <a:lvl9pPr marL="0" marR="0" lvl="8" indent="0" algn="r">
@@ -7031,16 +6962,16 @@
                 <a:srgbClr val="000000"/>
               </a:buClr>
               <a:buSzPts val="1200"/>
-              <a:buFont typeface="Arial"/>
+              <a:buFont typeface="Arial" panose="020B0604020202020204"/>
               <a:buNone/>
               <a:defRPr sz="1200" b="0" i="0" u="none" strike="noStrike" cap="none">
                 <a:solidFill>
                   <a:srgbClr val="888888"/>
                 </a:solidFill>
-                <a:latin typeface="Calibri"/>
-                <a:ea typeface="Calibri"/>
-                <a:cs typeface="Calibri"/>
-                <a:sym typeface="Calibri"/>
+                <a:latin typeface="Calibri" panose="020F0502020204030204"/>
+                <a:ea typeface="Calibri" panose="020F0502020204030204"/>
+                <a:cs typeface="Calibri" panose="020F0502020204030204"/>
+                <a:sym typeface="Calibri" panose="020F0502020204030204"/>
               </a:defRPr>
             </a:lvl9pPr>
           </a:lstStyle>
@@ -7056,9 +6987,8 @@
             </a:pPr>
             <a:fld id="{00000000-1234-1234-1234-123412341234}" type="slidenum">
               <a:rPr lang="en-US"/>
-              <a:t>‹#›</a:t>
             </a:fld>
-            <a:endParaRPr/>
+            <a:endParaRPr lang="en-US"/>
           </a:p>
         </p:txBody>
       </p:sp>
@@ -7071,7 +7001,7 @@
 </file>
 
 <file path=ppt/slideLayouts/slideLayout5.xml><?xml version="1.0" encoding="utf-8"?>
-<p:sldLayout xmlns:a="http://schemas.openxmlformats.org/drawingml/2006/main" xmlns:r="http://schemas.openxmlformats.org/officeDocument/2006/relationships" xmlns:p="http://schemas.openxmlformats.org/presentationml/2006/main" matchingName="Comparison" type="twoTxTwoObj">
+<p:sldLayout xmlns:a="http://schemas.openxmlformats.org/drawingml/2006/main" xmlns:r="http://schemas.openxmlformats.org/officeDocument/2006/relationships" xmlns:p="http://schemas.openxmlformats.org/presentationml/2006/main" type="twoTxTwoObj" matchingName="Comparison">
   <p:cSld name="TWO_OBJECTS_WITH_TEXT">
     <p:spTree>
       <p:nvGrpSpPr>
@@ -7129,7 +7059,7 @@
                 <a:schemeClr val="dk1"/>
               </a:buClr>
               <a:buSzPts val="4400"/>
-              <a:buFont typeface="Calibri"/>
+              <a:buFont typeface="Calibri" panose="020F0502020204030204"/>
               <a:buNone/>
               <a:defRPr/>
             </a:lvl1pPr>
@@ -7246,9 +7176,7 @@
               <a:defRPr/>
             </a:lvl9pPr>
           </a:lstStyle>
-          <a:p>
-            <a:endParaRPr/>
-          </a:p>
+          <a:p/>
         </p:txBody>
       </p:sp>
       <p:sp>
@@ -7433,9 +7361,7 @@
               <a:defRPr sz="1600" b="1"/>
             </a:lvl9pPr>
           </a:lstStyle>
-          <a:p>
-            <a:endParaRPr/>
-          </a:p>
+          <a:p/>
         </p:txBody>
       </p:sp>
       <p:sp>
@@ -7620,9 +7546,7 @@
               <a:defRPr sz="1600"/>
             </a:lvl9pPr>
           </a:lstStyle>
-          <a:p>
-            <a:endParaRPr/>
-          </a:p>
+          <a:p/>
         </p:txBody>
       </p:sp>
       <p:sp>
@@ -7807,9 +7731,7 @@
               <a:defRPr sz="1600" b="1"/>
             </a:lvl9pPr>
           </a:lstStyle>
-          <a:p>
-            <a:endParaRPr/>
-          </a:p>
+          <a:p/>
         </p:txBody>
       </p:sp>
       <p:sp>
@@ -7994,9 +7916,7 @@
               <a:defRPr sz="1600"/>
             </a:lvl9pPr>
           </a:lstStyle>
-          <a:p>
-            <a:endParaRPr/>
-          </a:p>
+          <a:p/>
         </p:txBody>
       </p:sp>
       <p:sp>
@@ -8154,9 +8074,7 @@
               <a:defRPr/>
             </a:lvl9pPr>
           </a:lstStyle>
-          <a:p>
-            <a:endParaRPr/>
-          </a:p>
+          <a:p/>
         </p:txBody>
       </p:sp>
       <p:sp>
@@ -8314,9 +8232,7 @@
               <a:defRPr/>
             </a:lvl9pPr>
           </a:lstStyle>
-          <a:p>
-            <a:endParaRPr/>
-          </a:p>
+          <a:p/>
         </p:txBody>
       </p:sp>
       <p:sp>
@@ -8361,16 +8277,16 @@
                 <a:srgbClr val="000000"/>
               </a:buClr>
               <a:buSzPts val="1200"/>
-              <a:buFont typeface="Arial"/>
+              <a:buFont typeface="Arial" panose="020B0604020202020204"/>
               <a:buNone/>
               <a:defRPr sz="1200" b="0" i="0" u="none" strike="noStrike" cap="none">
                 <a:solidFill>
                   <a:srgbClr val="888888"/>
                 </a:solidFill>
-                <a:latin typeface="Calibri"/>
-                <a:ea typeface="Calibri"/>
-                <a:cs typeface="Calibri"/>
-                <a:sym typeface="Calibri"/>
+                <a:latin typeface="Calibri" panose="020F0502020204030204"/>
+                <a:ea typeface="Calibri" panose="020F0502020204030204"/>
+                <a:cs typeface="Calibri" panose="020F0502020204030204"/>
+                <a:sym typeface="Calibri" panose="020F0502020204030204"/>
               </a:defRPr>
             </a:lvl1pPr>
             <a:lvl2pPr marL="0" marR="0" lvl="1" indent="0" algn="r">
@@ -8387,16 +8303,16 @@
                 <a:srgbClr val="000000"/>
               </a:buClr>
               <a:buSzPts val="1200"/>
-              <a:buFont typeface="Arial"/>
+              <a:buFont typeface="Arial" panose="020B0604020202020204"/>
               <a:buNone/>
               <a:defRPr sz="1200" b="0" i="0" u="none" strike="noStrike" cap="none">
                 <a:solidFill>
                   <a:srgbClr val="888888"/>
                 </a:solidFill>
-                <a:latin typeface="Calibri"/>
-                <a:ea typeface="Calibri"/>
-                <a:cs typeface="Calibri"/>
-                <a:sym typeface="Calibri"/>
+                <a:latin typeface="Calibri" panose="020F0502020204030204"/>
+                <a:ea typeface="Calibri" panose="020F0502020204030204"/>
+                <a:cs typeface="Calibri" panose="020F0502020204030204"/>
+                <a:sym typeface="Calibri" panose="020F0502020204030204"/>
               </a:defRPr>
             </a:lvl2pPr>
             <a:lvl3pPr marL="0" marR="0" lvl="2" indent="0" algn="r">
@@ -8413,16 +8329,16 @@
                 <a:srgbClr val="000000"/>
               </a:buClr>
               <a:buSzPts val="1200"/>
-              <a:buFont typeface="Arial"/>
+              <a:buFont typeface="Arial" panose="020B0604020202020204"/>
               <a:buNone/>
               <a:defRPr sz="1200" b="0" i="0" u="none" strike="noStrike" cap="none">
                 <a:solidFill>
                   <a:srgbClr val="888888"/>
                 </a:solidFill>
-                <a:latin typeface="Calibri"/>
-                <a:ea typeface="Calibri"/>
-                <a:cs typeface="Calibri"/>
-                <a:sym typeface="Calibri"/>
+                <a:latin typeface="Calibri" panose="020F0502020204030204"/>
+                <a:ea typeface="Calibri" panose="020F0502020204030204"/>
+                <a:cs typeface="Calibri" panose="020F0502020204030204"/>
+                <a:sym typeface="Calibri" panose="020F0502020204030204"/>
               </a:defRPr>
             </a:lvl3pPr>
             <a:lvl4pPr marL="0" marR="0" lvl="3" indent="0" algn="r">
@@ -8439,16 +8355,16 @@
                 <a:srgbClr val="000000"/>
               </a:buClr>
               <a:buSzPts val="1200"/>
-              <a:buFont typeface="Arial"/>
+              <a:buFont typeface="Arial" panose="020B0604020202020204"/>
               <a:buNone/>
               <a:defRPr sz="1200" b="0" i="0" u="none" strike="noStrike" cap="none">
                 <a:solidFill>
                   <a:srgbClr val="888888"/>
                 </a:solidFill>
-                <a:latin typeface="Calibri"/>
-                <a:ea typeface="Calibri"/>
-                <a:cs typeface="Calibri"/>
-                <a:sym typeface="Calibri"/>
+                <a:latin typeface="Calibri" panose="020F0502020204030204"/>
+                <a:ea typeface="Calibri" panose="020F0502020204030204"/>
+                <a:cs typeface="Calibri" panose="020F0502020204030204"/>
+                <a:sym typeface="Calibri" panose="020F0502020204030204"/>
               </a:defRPr>
             </a:lvl4pPr>
             <a:lvl5pPr marL="0" marR="0" lvl="4" indent="0" algn="r">
@@ -8465,16 +8381,16 @@
                 <a:srgbClr val="000000"/>
               </a:buClr>
               <a:buSzPts val="1200"/>
-              <a:buFont typeface="Arial"/>
+              <a:buFont typeface="Arial" panose="020B0604020202020204"/>
               <a:buNone/>
               <a:defRPr sz="1200" b="0" i="0" u="none" strike="noStrike" cap="none">
                 <a:solidFill>
                   <a:srgbClr val="888888"/>
                 </a:solidFill>
-                <a:latin typeface="Calibri"/>
-                <a:ea typeface="Calibri"/>
-                <a:cs typeface="Calibri"/>
-                <a:sym typeface="Calibri"/>
+                <a:latin typeface="Calibri" panose="020F0502020204030204"/>
+                <a:ea typeface="Calibri" panose="020F0502020204030204"/>
+                <a:cs typeface="Calibri" panose="020F0502020204030204"/>
+                <a:sym typeface="Calibri" panose="020F0502020204030204"/>
               </a:defRPr>
             </a:lvl5pPr>
             <a:lvl6pPr marL="0" marR="0" lvl="5" indent="0" algn="r">
@@ -8491,16 +8407,16 @@
                 <a:srgbClr val="000000"/>
               </a:buClr>
               <a:buSzPts val="1200"/>
-              <a:buFont typeface="Arial"/>
+              <a:buFont typeface="Arial" panose="020B0604020202020204"/>
               <a:buNone/>
               <a:defRPr sz="1200" b="0" i="0" u="none" strike="noStrike" cap="none">
                 <a:solidFill>
                   <a:srgbClr val="888888"/>
                 </a:solidFill>
-                <a:latin typeface="Calibri"/>
-                <a:ea typeface="Calibri"/>
-                <a:cs typeface="Calibri"/>
-                <a:sym typeface="Calibri"/>
+                <a:latin typeface="Calibri" panose="020F0502020204030204"/>
+                <a:ea typeface="Calibri" panose="020F0502020204030204"/>
+                <a:cs typeface="Calibri" panose="020F0502020204030204"/>
+                <a:sym typeface="Calibri" panose="020F0502020204030204"/>
               </a:defRPr>
             </a:lvl6pPr>
             <a:lvl7pPr marL="0" marR="0" lvl="6" indent="0" algn="r">
@@ -8517,16 +8433,16 @@
                 <a:srgbClr val="000000"/>
               </a:buClr>
               <a:buSzPts val="1200"/>
-              <a:buFont typeface="Arial"/>
+              <a:buFont typeface="Arial" panose="020B0604020202020204"/>
               <a:buNone/>
               <a:defRPr sz="1200" b="0" i="0" u="none" strike="noStrike" cap="none">
                 <a:solidFill>
                   <a:srgbClr val="888888"/>
                 </a:solidFill>
-                <a:latin typeface="Calibri"/>
-                <a:ea typeface="Calibri"/>
-                <a:cs typeface="Calibri"/>
-                <a:sym typeface="Calibri"/>
+                <a:latin typeface="Calibri" panose="020F0502020204030204"/>
+                <a:ea typeface="Calibri" panose="020F0502020204030204"/>
+                <a:cs typeface="Calibri" panose="020F0502020204030204"/>
+                <a:sym typeface="Calibri" panose="020F0502020204030204"/>
               </a:defRPr>
             </a:lvl7pPr>
             <a:lvl8pPr marL="0" marR="0" lvl="7" indent="0" algn="r">
@@ -8543,16 +8459,16 @@
                 <a:srgbClr val="000000"/>
               </a:buClr>
               <a:buSzPts val="1200"/>
-              <a:buFont typeface="Arial"/>
+              <a:buFont typeface="Arial" panose="020B0604020202020204"/>
               <a:buNone/>
               <a:defRPr sz="1200" b="0" i="0" u="none" strike="noStrike" cap="none">
                 <a:solidFill>
                   <a:srgbClr val="888888"/>
                 </a:solidFill>
-                <a:latin typeface="Calibri"/>
-                <a:ea typeface="Calibri"/>
-                <a:cs typeface="Calibri"/>
-                <a:sym typeface="Calibri"/>
+                <a:latin typeface="Calibri" panose="020F0502020204030204"/>
+                <a:ea typeface="Calibri" panose="020F0502020204030204"/>
+                <a:cs typeface="Calibri" panose="020F0502020204030204"/>
+                <a:sym typeface="Calibri" panose="020F0502020204030204"/>
               </a:defRPr>
             </a:lvl8pPr>
             <a:lvl9pPr marL="0" marR="0" lvl="8" indent="0" algn="r">
@@ -8569,16 +8485,16 @@
                 <a:srgbClr val="000000"/>
               </a:buClr>
               <a:buSzPts val="1200"/>
-              <a:buFont typeface="Arial"/>
+              <a:buFont typeface="Arial" panose="020B0604020202020204"/>
               <a:buNone/>
               <a:defRPr sz="1200" b="0" i="0" u="none" strike="noStrike" cap="none">
                 <a:solidFill>
                   <a:srgbClr val="888888"/>
                 </a:solidFill>
-                <a:latin typeface="Calibri"/>
-                <a:ea typeface="Calibri"/>
-                <a:cs typeface="Calibri"/>
-                <a:sym typeface="Calibri"/>
+                <a:latin typeface="Calibri" panose="020F0502020204030204"/>
+                <a:ea typeface="Calibri" panose="020F0502020204030204"/>
+                <a:cs typeface="Calibri" panose="020F0502020204030204"/>
+                <a:sym typeface="Calibri" panose="020F0502020204030204"/>
               </a:defRPr>
             </a:lvl9pPr>
           </a:lstStyle>
@@ -8594,9 +8510,8 @@
             </a:pPr>
             <a:fld id="{00000000-1234-1234-1234-123412341234}" type="slidenum">
               <a:rPr lang="en-US"/>
-              <a:t>‹#›</a:t>
             </a:fld>
-            <a:endParaRPr/>
+            <a:endParaRPr lang="en-US"/>
           </a:p>
         </p:txBody>
       </p:sp>
@@ -8609,7 +8524,7 @@
 </file>
 
 <file path=ppt/slideLayouts/slideLayout6.xml><?xml version="1.0" encoding="utf-8"?>
-<p:sldLayout xmlns:a="http://schemas.openxmlformats.org/drawingml/2006/main" xmlns:r="http://schemas.openxmlformats.org/officeDocument/2006/relationships" xmlns:p="http://schemas.openxmlformats.org/presentationml/2006/main" matchingName="Title Only" type="titleOnly">
+<p:sldLayout xmlns:a="http://schemas.openxmlformats.org/drawingml/2006/main" xmlns:r="http://schemas.openxmlformats.org/officeDocument/2006/relationships" xmlns:p="http://schemas.openxmlformats.org/presentationml/2006/main" type="titleOnly" matchingName="Title Only">
   <p:cSld name="TITLE_ONLY">
     <p:spTree>
       <p:nvGrpSpPr>
@@ -8783,9 +8698,7 @@
               <a:defRPr/>
             </a:lvl9pPr>
           </a:lstStyle>
-          <a:p>
-            <a:endParaRPr/>
-          </a:p>
+          <a:p/>
         </p:txBody>
       </p:sp>
       <p:sp>
@@ -8943,9 +8856,7 @@
               <a:defRPr/>
             </a:lvl9pPr>
           </a:lstStyle>
-          <a:p>
-            <a:endParaRPr/>
-          </a:p>
+          <a:p/>
         </p:txBody>
       </p:sp>
       <p:sp>
@@ -9103,9 +9014,7 @@
               <a:defRPr/>
             </a:lvl9pPr>
           </a:lstStyle>
-          <a:p>
-            <a:endParaRPr/>
-          </a:p>
+          <a:p/>
         </p:txBody>
       </p:sp>
       <p:sp>
@@ -9150,16 +9059,16 @@
                 <a:srgbClr val="000000"/>
               </a:buClr>
               <a:buSzPts val="1200"/>
-              <a:buFont typeface="Arial"/>
+              <a:buFont typeface="Arial" panose="020B0604020202020204"/>
               <a:buNone/>
               <a:defRPr sz="1200" b="0" i="0" u="none" strike="noStrike" cap="none">
                 <a:solidFill>
                   <a:srgbClr val="888888"/>
                 </a:solidFill>
-                <a:latin typeface="Calibri"/>
-                <a:ea typeface="Calibri"/>
-                <a:cs typeface="Calibri"/>
-                <a:sym typeface="Calibri"/>
+                <a:latin typeface="Calibri" panose="020F0502020204030204"/>
+                <a:ea typeface="Calibri" panose="020F0502020204030204"/>
+                <a:cs typeface="Calibri" panose="020F0502020204030204"/>
+                <a:sym typeface="Calibri" panose="020F0502020204030204"/>
               </a:defRPr>
             </a:lvl1pPr>
             <a:lvl2pPr marL="0" marR="0" lvl="1" indent="0" algn="r">
@@ -9176,16 +9085,16 @@
                 <a:srgbClr val="000000"/>
               </a:buClr>
               <a:buSzPts val="1200"/>
-              <a:buFont typeface="Arial"/>
+              <a:buFont typeface="Arial" panose="020B0604020202020204"/>
               <a:buNone/>
               <a:defRPr sz="1200" b="0" i="0" u="none" strike="noStrike" cap="none">
                 <a:solidFill>
                   <a:srgbClr val="888888"/>
                 </a:solidFill>
-                <a:latin typeface="Calibri"/>
-                <a:ea typeface="Calibri"/>
-                <a:cs typeface="Calibri"/>
-                <a:sym typeface="Calibri"/>
+                <a:latin typeface="Calibri" panose="020F0502020204030204"/>
+                <a:ea typeface="Calibri" panose="020F0502020204030204"/>
+                <a:cs typeface="Calibri" panose="020F0502020204030204"/>
+                <a:sym typeface="Calibri" panose="020F0502020204030204"/>
               </a:defRPr>
             </a:lvl2pPr>
             <a:lvl3pPr marL="0" marR="0" lvl="2" indent="0" algn="r">
@@ -9202,16 +9111,16 @@
                 <a:srgbClr val="000000"/>
               </a:buClr>
               <a:buSzPts val="1200"/>
-              <a:buFont typeface="Arial"/>
+              <a:buFont typeface="Arial" panose="020B0604020202020204"/>
               <a:buNone/>
               <a:defRPr sz="1200" b="0" i="0" u="none" strike="noStrike" cap="none">
                 <a:solidFill>
                   <a:srgbClr val="888888"/>
                 </a:solidFill>
-                <a:latin typeface="Calibri"/>
-                <a:ea typeface="Calibri"/>
-                <a:cs typeface="Calibri"/>
-                <a:sym typeface="Calibri"/>
+                <a:latin typeface="Calibri" panose="020F0502020204030204"/>
+                <a:ea typeface="Calibri" panose="020F0502020204030204"/>
+                <a:cs typeface="Calibri" panose="020F0502020204030204"/>
+                <a:sym typeface="Calibri" panose="020F0502020204030204"/>
               </a:defRPr>
             </a:lvl3pPr>
             <a:lvl4pPr marL="0" marR="0" lvl="3" indent="0" algn="r">
@@ -9228,16 +9137,16 @@
                 <a:srgbClr val="000000"/>
               </a:buClr>
               <a:buSzPts val="1200"/>
-              <a:buFont typeface="Arial"/>
+              <a:buFont typeface="Arial" panose="020B0604020202020204"/>
               <a:buNone/>
               <a:defRPr sz="1200" b="0" i="0" u="none" strike="noStrike" cap="none">
                 <a:solidFill>
                   <a:srgbClr val="888888"/>
                 </a:solidFill>
-                <a:latin typeface="Calibri"/>
-                <a:ea typeface="Calibri"/>
-                <a:cs typeface="Calibri"/>
-                <a:sym typeface="Calibri"/>
+                <a:latin typeface="Calibri" panose="020F0502020204030204"/>
+                <a:ea typeface="Calibri" panose="020F0502020204030204"/>
+                <a:cs typeface="Calibri" panose="020F0502020204030204"/>
+                <a:sym typeface="Calibri" panose="020F0502020204030204"/>
               </a:defRPr>
             </a:lvl4pPr>
             <a:lvl5pPr marL="0" marR="0" lvl="4" indent="0" algn="r">
@@ -9254,16 +9163,16 @@
                 <a:srgbClr val="000000"/>
               </a:buClr>
               <a:buSzPts val="1200"/>
-              <a:buFont typeface="Arial"/>
+              <a:buFont typeface="Arial" panose="020B0604020202020204"/>
               <a:buNone/>
               <a:defRPr sz="1200" b="0" i="0" u="none" strike="noStrike" cap="none">
                 <a:solidFill>
                   <a:srgbClr val="888888"/>
                 </a:solidFill>
-                <a:latin typeface="Calibri"/>
-                <a:ea typeface="Calibri"/>
-                <a:cs typeface="Calibri"/>
-                <a:sym typeface="Calibri"/>
+                <a:latin typeface="Calibri" panose="020F0502020204030204"/>
+                <a:ea typeface="Calibri" panose="020F0502020204030204"/>
+                <a:cs typeface="Calibri" panose="020F0502020204030204"/>
+                <a:sym typeface="Calibri" panose="020F0502020204030204"/>
               </a:defRPr>
             </a:lvl5pPr>
             <a:lvl6pPr marL="0" marR="0" lvl="5" indent="0" algn="r">
@@ -9280,16 +9189,16 @@
                 <a:srgbClr val="000000"/>
               </a:buClr>
               <a:buSzPts val="1200"/>
-              <a:buFont typeface="Arial"/>
+              <a:buFont typeface="Arial" panose="020B0604020202020204"/>
               <a:buNone/>
               <a:defRPr sz="1200" b="0" i="0" u="none" strike="noStrike" cap="none">
                 <a:solidFill>
                   <a:srgbClr val="888888"/>
                 </a:solidFill>
-                <a:latin typeface="Calibri"/>
-                <a:ea typeface="Calibri"/>
-                <a:cs typeface="Calibri"/>
-                <a:sym typeface="Calibri"/>
+                <a:latin typeface="Calibri" panose="020F0502020204030204"/>
+                <a:ea typeface="Calibri" panose="020F0502020204030204"/>
+                <a:cs typeface="Calibri" panose="020F0502020204030204"/>
+                <a:sym typeface="Calibri" panose="020F0502020204030204"/>
               </a:defRPr>
             </a:lvl6pPr>
             <a:lvl7pPr marL="0" marR="0" lvl="6" indent="0" algn="r">
@@ -9306,16 +9215,16 @@
                 <a:srgbClr val="000000"/>
               </a:buClr>
               <a:buSzPts val="1200"/>
-              <a:buFont typeface="Arial"/>
+              <a:buFont typeface="Arial" panose="020B0604020202020204"/>
               <a:buNone/>
               <a:defRPr sz="1200" b="0" i="0" u="none" strike="noStrike" cap="none">
                 <a:solidFill>
                   <a:srgbClr val="888888"/>
                 </a:solidFill>
-                <a:latin typeface="Calibri"/>
-                <a:ea typeface="Calibri"/>
-                <a:cs typeface="Calibri"/>
-                <a:sym typeface="Calibri"/>
+                <a:latin typeface="Calibri" panose="020F0502020204030204"/>
+                <a:ea typeface="Calibri" panose="020F0502020204030204"/>
+                <a:cs typeface="Calibri" panose="020F0502020204030204"/>
+                <a:sym typeface="Calibri" panose="020F0502020204030204"/>
               </a:defRPr>
             </a:lvl7pPr>
             <a:lvl8pPr marL="0" marR="0" lvl="7" indent="0" algn="r">
@@ -9332,16 +9241,16 @@
                 <a:srgbClr val="000000"/>
               </a:buClr>
               <a:buSzPts val="1200"/>
-              <a:buFont typeface="Arial"/>
+              <a:buFont typeface="Arial" panose="020B0604020202020204"/>
               <a:buNone/>
               <a:defRPr sz="1200" b="0" i="0" u="none" strike="noStrike" cap="none">
                 <a:solidFill>
                   <a:srgbClr val="888888"/>
                 </a:solidFill>
-                <a:latin typeface="Calibri"/>
-                <a:ea typeface="Calibri"/>
-                <a:cs typeface="Calibri"/>
-                <a:sym typeface="Calibri"/>
+                <a:latin typeface="Calibri" panose="020F0502020204030204"/>
+                <a:ea typeface="Calibri" panose="020F0502020204030204"/>
+                <a:cs typeface="Calibri" panose="020F0502020204030204"/>
+                <a:sym typeface="Calibri" panose="020F0502020204030204"/>
               </a:defRPr>
             </a:lvl8pPr>
             <a:lvl9pPr marL="0" marR="0" lvl="8" indent="0" algn="r">
@@ -9358,16 +9267,16 @@
                 <a:srgbClr val="000000"/>
               </a:buClr>
               <a:buSzPts val="1200"/>
-              <a:buFont typeface="Arial"/>
+              <a:buFont typeface="Arial" panose="020B0604020202020204"/>
               <a:buNone/>
               <a:defRPr sz="1200" b="0" i="0" u="none" strike="noStrike" cap="none">
                 <a:solidFill>
                   <a:srgbClr val="888888"/>
                 </a:solidFill>
-                <a:latin typeface="Calibri"/>
-                <a:ea typeface="Calibri"/>
-                <a:cs typeface="Calibri"/>
-                <a:sym typeface="Calibri"/>
+                <a:latin typeface="Calibri" panose="020F0502020204030204"/>
+                <a:ea typeface="Calibri" panose="020F0502020204030204"/>
+                <a:cs typeface="Calibri" panose="020F0502020204030204"/>
+                <a:sym typeface="Calibri" panose="020F0502020204030204"/>
               </a:defRPr>
             </a:lvl9pPr>
           </a:lstStyle>
@@ -9383,9 +9292,8 @@
             </a:pPr>
             <a:fld id="{00000000-1234-1234-1234-123412341234}" type="slidenum">
               <a:rPr lang="en-US"/>
-              <a:t>‹#›</a:t>
             </a:fld>
-            <a:endParaRPr/>
+            <a:endParaRPr lang="en-US"/>
           </a:p>
         </p:txBody>
       </p:sp>
@@ -9398,7 +9306,7 @@
 </file>
 
 <file path=ppt/slideLayouts/slideLayout7.xml><?xml version="1.0" encoding="utf-8"?>
-<p:sldLayout xmlns:a="http://schemas.openxmlformats.org/drawingml/2006/main" xmlns:r="http://schemas.openxmlformats.org/officeDocument/2006/relationships" xmlns:p="http://schemas.openxmlformats.org/presentationml/2006/main" matchingName="Content with Caption" type="objTx">
+<p:sldLayout xmlns:a="http://schemas.openxmlformats.org/drawingml/2006/main" xmlns:r="http://schemas.openxmlformats.org/officeDocument/2006/relationships" xmlns:p="http://schemas.openxmlformats.org/presentationml/2006/main" type="objTx" matchingName="Content with Caption">
   <p:cSld name="OBJECT_WITH_CAPTION_TEXT">
     <p:spTree>
       <p:nvGrpSpPr>
@@ -9456,7 +9364,7 @@
                 <a:schemeClr val="dk1"/>
               </a:buClr>
               <a:buSzPts val="2000"/>
-              <a:buFont typeface="Calibri"/>
+              <a:buFont typeface="Calibri" panose="020F0502020204030204"/>
               <a:buNone/>
               <a:defRPr sz="2000" b="1"/>
             </a:lvl1pPr>
@@ -9573,9 +9481,7 @@
               <a:defRPr/>
             </a:lvl9pPr>
           </a:lstStyle>
-          <a:p>
-            <a:endParaRPr/>
-          </a:p>
+          <a:p/>
         </p:txBody>
       </p:sp>
       <p:sp>
@@ -9760,9 +9666,7 @@
               <a:defRPr sz="2000"/>
             </a:lvl9pPr>
           </a:lstStyle>
-          <a:p>
-            <a:endParaRPr/>
-          </a:p>
+          <a:p/>
         </p:txBody>
       </p:sp>
       <p:sp>
@@ -9947,9 +9851,7 @@
               <a:defRPr sz="900"/>
             </a:lvl9pPr>
           </a:lstStyle>
-          <a:p>
-            <a:endParaRPr/>
-          </a:p>
+          <a:p/>
         </p:txBody>
       </p:sp>
       <p:sp>
@@ -10107,9 +10009,7 @@
               <a:defRPr/>
             </a:lvl9pPr>
           </a:lstStyle>
-          <a:p>
-            <a:endParaRPr/>
-          </a:p>
+          <a:p/>
         </p:txBody>
       </p:sp>
       <p:sp>
@@ -10267,9 +10167,7 @@
               <a:defRPr/>
             </a:lvl9pPr>
           </a:lstStyle>
-          <a:p>
-            <a:endParaRPr/>
-          </a:p>
+          <a:p/>
         </p:txBody>
       </p:sp>
       <p:sp>
@@ -10314,16 +10212,16 @@
                 <a:srgbClr val="000000"/>
               </a:buClr>
               <a:buSzPts val="1200"/>
-              <a:buFont typeface="Arial"/>
+              <a:buFont typeface="Arial" panose="020B0604020202020204"/>
               <a:buNone/>
               <a:defRPr sz="1200" b="0" i="0" u="none" strike="noStrike" cap="none">
                 <a:solidFill>
                   <a:srgbClr val="888888"/>
                 </a:solidFill>
-                <a:latin typeface="Calibri"/>
-                <a:ea typeface="Calibri"/>
-                <a:cs typeface="Calibri"/>
-                <a:sym typeface="Calibri"/>
+                <a:latin typeface="Calibri" panose="020F0502020204030204"/>
+                <a:ea typeface="Calibri" panose="020F0502020204030204"/>
+                <a:cs typeface="Calibri" panose="020F0502020204030204"/>
+                <a:sym typeface="Calibri" panose="020F0502020204030204"/>
               </a:defRPr>
             </a:lvl1pPr>
             <a:lvl2pPr marL="0" marR="0" lvl="1" indent="0" algn="r">
@@ -10340,16 +10238,16 @@
                 <a:srgbClr val="000000"/>
               </a:buClr>
               <a:buSzPts val="1200"/>
-              <a:buFont typeface="Arial"/>
+              <a:buFont typeface="Arial" panose="020B0604020202020204"/>
               <a:buNone/>
               <a:defRPr sz="1200" b="0" i="0" u="none" strike="noStrike" cap="none">
                 <a:solidFill>
                   <a:srgbClr val="888888"/>
                 </a:solidFill>
-                <a:latin typeface="Calibri"/>
-                <a:ea typeface="Calibri"/>
-                <a:cs typeface="Calibri"/>
-                <a:sym typeface="Calibri"/>
+                <a:latin typeface="Calibri" panose="020F0502020204030204"/>
+                <a:ea typeface="Calibri" panose="020F0502020204030204"/>
+                <a:cs typeface="Calibri" panose="020F0502020204030204"/>
+                <a:sym typeface="Calibri" panose="020F0502020204030204"/>
               </a:defRPr>
             </a:lvl2pPr>
             <a:lvl3pPr marL="0" marR="0" lvl="2" indent="0" algn="r">
@@ -10366,16 +10264,16 @@
                 <a:srgbClr val="000000"/>
               </a:buClr>
               <a:buSzPts val="1200"/>
-              <a:buFont typeface="Arial"/>
+              <a:buFont typeface="Arial" panose="020B0604020202020204"/>
               <a:buNone/>
               <a:defRPr sz="1200" b="0" i="0" u="none" strike="noStrike" cap="none">
                 <a:solidFill>
                   <a:srgbClr val="888888"/>
                 </a:solidFill>
-                <a:latin typeface="Calibri"/>
-                <a:ea typeface="Calibri"/>
-                <a:cs typeface="Calibri"/>
-                <a:sym typeface="Calibri"/>
+                <a:latin typeface="Calibri" panose="020F0502020204030204"/>
+                <a:ea typeface="Calibri" panose="020F0502020204030204"/>
+                <a:cs typeface="Calibri" panose="020F0502020204030204"/>
+                <a:sym typeface="Calibri" panose="020F0502020204030204"/>
               </a:defRPr>
             </a:lvl3pPr>
             <a:lvl4pPr marL="0" marR="0" lvl="3" indent="0" algn="r">
@@ -10392,16 +10290,16 @@
                 <a:srgbClr val="000000"/>
               </a:buClr>
               <a:buSzPts val="1200"/>
-              <a:buFont typeface="Arial"/>
+              <a:buFont typeface="Arial" panose="020B0604020202020204"/>
               <a:buNone/>
               <a:defRPr sz="1200" b="0" i="0" u="none" strike="noStrike" cap="none">
                 <a:solidFill>
                   <a:srgbClr val="888888"/>
                 </a:solidFill>
-                <a:latin typeface="Calibri"/>
-                <a:ea typeface="Calibri"/>
-                <a:cs typeface="Calibri"/>
-                <a:sym typeface="Calibri"/>
+                <a:latin typeface="Calibri" panose="020F0502020204030204"/>
+                <a:ea typeface="Calibri" panose="020F0502020204030204"/>
+                <a:cs typeface="Calibri" panose="020F0502020204030204"/>
+                <a:sym typeface="Calibri" panose="020F0502020204030204"/>
               </a:defRPr>
             </a:lvl4pPr>
             <a:lvl5pPr marL="0" marR="0" lvl="4" indent="0" algn="r">
@@ -10418,16 +10316,16 @@
                 <a:srgbClr val="000000"/>
               </a:buClr>
               <a:buSzPts val="1200"/>
-              <a:buFont typeface="Arial"/>
+              <a:buFont typeface="Arial" panose="020B0604020202020204"/>
               <a:buNone/>
               <a:defRPr sz="1200" b="0" i="0" u="none" strike="noStrike" cap="none">
                 <a:solidFill>
                   <a:srgbClr val="888888"/>
                 </a:solidFill>
-                <a:latin typeface="Calibri"/>
-                <a:ea typeface="Calibri"/>
-                <a:cs typeface="Calibri"/>
-                <a:sym typeface="Calibri"/>
+                <a:latin typeface="Calibri" panose="020F0502020204030204"/>
+                <a:ea typeface="Calibri" panose="020F0502020204030204"/>
+                <a:cs typeface="Calibri" panose="020F0502020204030204"/>
+                <a:sym typeface="Calibri" panose="020F0502020204030204"/>
               </a:defRPr>
             </a:lvl5pPr>
             <a:lvl6pPr marL="0" marR="0" lvl="5" indent="0" algn="r">
@@ -10444,16 +10342,16 @@
                 <a:srgbClr val="000000"/>
               </a:buClr>
               <a:buSzPts val="1200"/>
-              <a:buFont typeface="Arial"/>
+              <a:buFont typeface="Arial" panose="020B0604020202020204"/>
               <a:buNone/>
               <a:defRPr sz="1200" b="0" i="0" u="none" strike="noStrike" cap="none">
                 <a:solidFill>
                   <a:srgbClr val="888888"/>
                 </a:solidFill>
-                <a:latin typeface="Calibri"/>
-                <a:ea typeface="Calibri"/>
-                <a:cs typeface="Calibri"/>
-                <a:sym typeface="Calibri"/>
+                <a:latin typeface="Calibri" panose="020F0502020204030204"/>
+                <a:ea typeface="Calibri" panose="020F0502020204030204"/>
+                <a:cs typeface="Calibri" panose="020F0502020204030204"/>
+                <a:sym typeface="Calibri" panose="020F0502020204030204"/>
               </a:defRPr>
             </a:lvl6pPr>
             <a:lvl7pPr marL="0" marR="0" lvl="6" indent="0" algn="r">
@@ -10470,16 +10368,16 @@
                 <a:srgbClr val="000000"/>
               </a:buClr>
               <a:buSzPts val="1200"/>
-              <a:buFont typeface="Arial"/>
+              <a:buFont typeface="Arial" panose="020B0604020202020204"/>
               <a:buNone/>
               <a:defRPr sz="1200" b="0" i="0" u="none" strike="noStrike" cap="none">
                 <a:solidFill>
                   <a:srgbClr val="888888"/>
                 </a:solidFill>
-                <a:latin typeface="Calibri"/>
-                <a:ea typeface="Calibri"/>
-                <a:cs typeface="Calibri"/>
-                <a:sym typeface="Calibri"/>
+                <a:latin typeface="Calibri" panose="020F0502020204030204"/>
+                <a:ea typeface="Calibri" panose="020F0502020204030204"/>
+                <a:cs typeface="Calibri" panose="020F0502020204030204"/>
+                <a:sym typeface="Calibri" panose="020F0502020204030204"/>
               </a:defRPr>
             </a:lvl7pPr>
             <a:lvl8pPr marL="0" marR="0" lvl="7" indent="0" algn="r">
@@ -10496,16 +10394,16 @@
                 <a:srgbClr val="000000"/>
               </a:buClr>
               <a:buSzPts val="1200"/>
-              <a:buFont typeface="Arial"/>
+              <a:buFont typeface="Arial" panose="020B0604020202020204"/>
               <a:buNone/>
               <a:defRPr sz="1200" b="0" i="0" u="none" strike="noStrike" cap="none">
                 <a:solidFill>
                   <a:srgbClr val="888888"/>
                 </a:solidFill>
-                <a:latin typeface="Calibri"/>
-                <a:ea typeface="Calibri"/>
-                <a:cs typeface="Calibri"/>
-                <a:sym typeface="Calibri"/>
+                <a:latin typeface="Calibri" panose="020F0502020204030204"/>
+                <a:ea typeface="Calibri" panose="020F0502020204030204"/>
+                <a:cs typeface="Calibri" panose="020F0502020204030204"/>
+                <a:sym typeface="Calibri" panose="020F0502020204030204"/>
               </a:defRPr>
             </a:lvl8pPr>
             <a:lvl9pPr marL="0" marR="0" lvl="8" indent="0" algn="r">
@@ -10522,16 +10420,16 @@
                 <a:srgbClr val="000000"/>
               </a:buClr>
               <a:buSzPts val="1200"/>
-              <a:buFont typeface="Arial"/>
+              <a:buFont typeface="Arial" panose="020B0604020202020204"/>
               <a:buNone/>
               <a:defRPr sz="1200" b="0" i="0" u="none" strike="noStrike" cap="none">
                 <a:solidFill>
                   <a:srgbClr val="888888"/>
                 </a:solidFill>
-                <a:latin typeface="Calibri"/>
-                <a:ea typeface="Calibri"/>
-                <a:cs typeface="Calibri"/>
-                <a:sym typeface="Calibri"/>
+                <a:latin typeface="Calibri" panose="020F0502020204030204"/>
+                <a:ea typeface="Calibri" panose="020F0502020204030204"/>
+                <a:cs typeface="Calibri" panose="020F0502020204030204"/>
+                <a:sym typeface="Calibri" panose="020F0502020204030204"/>
               </a:defRPr>
             </a:lvl9pPr>
           </a:lstStyle>
@@ -10547,9 +10445,8 @@
             </a:pPr>
             <a:fld id="{00000000-1234-1234-1234-123412341234}" type="slidenum">
               <a:rPr lang="en-US"/>
-              <a:t>‹#›</a:t>
             </a:fld>
-            <a:endParaRPr/>
+            <a:endParaRPr lang="en-US"/>
           </a:p>
         </p:txBody>
       </p:sp>
@@ -10562,7 +10459,7 @@
 </file>
 
 <file path=ppt/slideLayouts/slideLayout8.xml><?xml version="1.0" encoding="utf-8"?>
-<p:sldLayout xmlns:a="http://schemas.openxmlformats.org/drawingml/2006/main" xmlns:r="http://schemas.openxmlformats.org/officeDocument/2006/relationships" xmlns:p="http://schemas.openxmlformats.org/presentationml/2006/main" matchingName="Picture with Caption" type="picTx">
+<p:sldLayout xmlns:a="http://schemas.openxmlformats.org/drawingml/2006/main" xmlns:r="http://schemas.openxmlformats.org/officeDocument/2006/relationships" xmlns:p="http://schemas.openxmlformats.org/presentationml/2006/main" type="picTx" matchingName="Picture with Caption">
   <p:cSld name="PICTURE_WITH_CAPTION_TEXT">
     <p:spTree>
       <p:nvGrpSpPr>
@@ -10620,7 +10517,7 @@
                 <a:schemeClr val="dk1"/>
               </a:buClr>
               <a:buSzPts val="2000"/>
-              <a:buFont typeface="Calibri"/>
+              <a:buFont typeface="Calibri" panose="020F0502020204030204"/>
               <a:buNone/>
               <a:defRPr sz="2000" b="1"/>
             </a:lvl1pPr>
@@ -10737,9 +10634,7 @@
               <a:defRPr/>
             </a:lvl9pPr>
           </a:lstStyle>
-          <a:p>
-            <a:endParaRPr/>
-          </a:p>
+          <a:p/>
         </p:txBody>
       </p:sp>
       <p:sp>
@@ -10948,9 +10843,7 @@
               <a:defRPr sz="900"/>
             </a:lvl9pPr>
           </a:lstStyle>
-          <a:p>
-            <a:endParaRPr/>
-          </a:p>
+          <a:p/>
         </p:txBody>
       </p:sp>
       <p:sp>
@@ -11108,9 +11001,7 @@
               <a:defRPr/>
             </a:lvl9pPr>
           </a:lstStyle>
-          <a:p>
-            <a:endParaRPr/>
-          </a:p>
+          <a:p/>
         </p:txBody>
       </p:sp>
       <p:sp>
@@ -11268,9 +11159,7 @@
               <a:defRPr/>
             </a:lvl9pPr>
           </a:lstStyle>
-          <a:p>
-            <a:endParaRPr/>
-          </a:p>
+          <a:p/>
         </p:txBody>
       </p:sp>
       <p:sp>
@@ -11315,16 +11204,16 @@
                 <a:srgbClr val="000000"/>
               </a:buClr>
               <a:buSzPts val="1200"/>
-              <a:buFont typeface="Arial"/>
+              <a:buFont typeface="Arial" panose="020B0604020202020204"/>
               <a:buNone/>
               <a:defRPr sz="1200" b="0" i="0" u="none" strike="noStrike" cap="none">
                 <a:solidFill>
                   <a:srgbClr val="888888"/>
                 </a:solidFill>
-                <a:latin typeface="Calibri"/>
-                <a:ea typeface="Calibri"/>
-                <a:cs typeface="Calibri"/>
-                <a:sym typeface="Calibri"/>
+                <a:latin typeface="Calibri" panose="020F0502020204030204"/>
+                <a:ea typeface="Calibri" panose="020F0502020204030204"/>
+                <a:cs typeface="Calibri" panose="020F0502020204030204"/>
+                <a:sym typeface="Calibri" panose="020F0502020204030204"/>
               </a:defRPr>
             </a:lvl1pPr>
             <a:lvl2pPr marL="0" marR="0" lvl="1" indent="0" algn="r">
@@ -11341,16 +11230,16 @@
                 <a:srgbClr val="000000"/>
               </a:buClr>
               <a:buSzPts val="1200"/>
-              <a:buFont typeface="Arial"/>
+              <a:buFont typeface="Arial" panose="020B0604020202020204"/>
               <a:buNone/>
               <a:defRPr sz="1200" b="0" i="0" u="none" strike="noStrike" cap="none">
                 <a:solidFill>
                   <a:srgbClr val="888888"/>
                 </a:solidFill>
-                <a:latin typeface="Calibri"/>
-                <a:ea typeface="Calibri"/>
-                <a:cs typeface="Calibri"/>
-                <a:sym typeface="Calibri"/>
+                <a:latin typeface="Calibri" panose="020F0502020204030204"/>
+                <a:ea typeface="Calibri" panose="020F0502020204030204"/>
+                <a:cs typeface="Calibri" panose="020F0502020204030204"/>
+                <a:sym typeface="Calibri" panose="020F0502020204030204"/>
               </a:defRPr>
             </a:lvl2pPr>
             <a:lvl3pPr marL="0" marR="0" lvl="2" indent="0" algn="r">
@@ -11367,16 +11256,16 @@
                 <a:srgbClr val="000000"/>
               </a:buClr>
               <a:buSzPts val="1200"/>
-              <a:buFont typeface="Arial"/>
+              <a:buFont typeface="Arial" panose="020B0604020202020204"/>
               <a:buNone/>
               <a:defRPr sz="1200" b="0" i="0" u="none" strike="noStrike" cap="none">
                 <a:solidFill>
                   <a:srgbClr val="888888"/>
                 </a:solidFill>
-                <a:latin typeface="Calibri"/>
-                <a:ea typeface="Calibri"/>
-                <a:cs typeface="Calibri"/>
-                <a:sym typeface="Calibri"/>
+                <a:latin typeface="Calibri" panose="020F0502020204030204"/>
+                <a:ea typeface="Calibri" panose="020F0502020204030204"/>
+                <a:cs typeface="Calibri" panose="020F0502020204030204"/>
+                <a:sym typeface="Calibri" panose="020F0502020204030204"/>
               </a:defRPr>
             </a:lvl3pPr>
             <a:lvl4pPr marL="0" marR="0" lvl="3" indent="0" algn="r">
@@ -11393,16 +11282,16 @@
                 <a:srgbClr val="000000"/>
               </a:buClr>
               <a:buSzPts val="1200"/>
-              <a:buFont typeface="Arial"/>
+              <a:buFont typeface="Arial" panose="020B0604020202020204"/>
               <a:buNone/>
               <a:defRPr sz="1200" b="0" i="0" u="none" strike="noStrike" cap="none">
                 <a:solidFill>
                   <a:srgbClr val="888888"/>
                 </a:solidFill>
-                <a:latin typeface="Calibri"/>
-                <a:ea typeface="Calibri"/>
-                <a:cs typeface="Calibri"/>
-                <a:sym typeface="Calibri"/>
+                <a:latin typeface="Calibri" panose="020F0502020204030204"/>
+                <a:ea typeface="Calibri" panose="020F0502020204030204"/>
+                <a:cs typeface="Calibri" panose="020F0502020204030204"/>
+                <a:sym typeface="Calibri" panose="020F0502020204030204"/>
               </a:defRPr>
             </a:lvl4pPr>
             <a:lvl5pPr marL="0" marR="0" lvl="4" indent="0" algn="r">
@@ -11419,16 +11308,16 @@
                 <a:srgbClr val="000000"/>
               </a:buClr>
               <a:buSzPts val="1200"/>
-              <a:buFont typeface="Arial"/>
+              <a:buFont typeface="Arial" panose="020B0604020202020204"/>
               <a:buNone/>
               <a:defRPr sz="1200" b="0" i="0" u="none" strike="noStrike" cap="none">
                 <a:solidFill>
                   <a:srgbClr val="888888"/>
                 </a:solidFill>
-                <a:latin typeface="Calibri"/>
-                <a:ea typeface="Calibri"/>
-                <a:cs typeface="Calibri"/>
-                <a:sym typeface="Calibri"/>
+                <a:latin typeface="Calibri" panose="020F0502020204030204"/>
+                <a:ea typeface="Calibri" panose="020F0502020204030204"/>
+                <a:cs typeface="Calibri" panose="020F0502020204030204"/>
+                <a:sym typeface="Calibri" panose="020F0502020204030204"/>
               </a:defRPr>
             </a:lvl5pPr>
             <a:lvl6pPr marL="0" marR="0" lvl="5" indent="0" algn="r">
@@ -11445,16 +11334,16 @@
                 <a:srgbClr val="000000"/>
               </a:buClr>
               <a:buSzPts val="1200"/>
-              <a:buFont typeface="Arial"/>
+              <a:buFont typeface="Arial" panose="020B0604020202020204"/>
               <a:buNone/>
               <a:defRPr sz="1200" b="0" i="0" u="none" strike="noStrike" cap="none">
                 <a:solidFill>
                   <a:srgbClr val="888888"/>
                 </a:solidFill>
-                <a:latin typeface="Calibri"/>
-                <a:ea typeface="Calibri"/>
-                <a:cs typeface="Calibri"/>
-                <a:sym typeface="Calibri"/>
+                <a:latin typeface="Calibri" panose="020F0502020204030204"/>
+                <a:ea typeface="Calibri" panose="020F0502020204030204"/>
+                <a:cs typeface="Calibri" panose="020F0502020204030204"/>
+                <a:sym typeface="Calibri" panose="020F0502020204030204"/>
               </a:defRPr>
             </a:lvl6pPr>
             <a:lvl7pPr marL="0" marR="0" lvl="6" indent="0" algn="r">
@@ -11471,16 +11360,16 @@
                 <a:srgbClr val="000000"/>
               </a:buClr>
               <a:buSzPts val="1200"/>
-              <a:buFont typeface="Arial"/>
+              <a:buFont typeface="Arial" panose="020B0604020202020204"/>
               <a:buNone/>
               <a:defRPr sz="1200" b="0" i="0" u="none" strike="noStrike" cap="none">
                 <a:solidFill>
                   <a:srgbClr val="888888"/>
                 </a:solidFill>
-                <a:latin typeface="Calibri"/>
-                <a:ea typeface="Calibri"/>
-                <a:cs typeface="Calibri"/>
-                <a:sym typeface="Calibri"/>
+                <a:latin typeface="Calibri" panose="020F0502020204030204"/>
+                <a:ea typeface="Calibri" panose="020F0502020204030204"/>
+                <a:cs typeface="Calibri" panose="020F0502020204030204"/>
+                <a:sym typeface="Calibri" panose="020F0502020204030204"/>
               </a:defRPr>
             </a:lvl7pPr>
             <a:lvl8pPr marL="0" marR="0" lvl="7" indent="0" algn="r">
@@ -11497,16 +11386,16 @@
                 <a:srgbClr val="000000"/>
               </a:buClr>
               <a:buSzPts val="1200"/>
-              <a:buFont typeface="Arial"/>
+              <a:buFont typeface="Arial" panose="020B0604020202020204"/>
               <a:buNone/>
               <a:defRPr sz="1200" b="0" i="0" u="none" strike="noStrike" cap="none">
                 <a:solidFill>
                   <a:srgbClr val="888888"/>
                 </a:solidFill>
-                <a:latin typeface="Calibri"/>
-                <a:ea typeface="Calibri"/>
-                <a:cs typeface="Calibri"/>
-                <a:sym typeface="Calibri"/>
+                <a:latin typeface="Calibri" panose="020F0502020204030204"/>
+                <a:ea typeface="Calibri" panose="020F0502020204030204"/>
+                <a:cs typeface="Calibri" panose="020F0502020204030204"/>
+                <a:sym typeface="Calibri" panose="020F0502020204030204"/>
               </a:defRPr>
             </a:lvl8pPr>
             <a:lvl9pPr marL="0" marR="0" lvl="8" indent="0" algn="r">
@@ -11523,16 +11412,16 @@
                 <a:srgbClr val="000000"/>
               </a:buClr>
               <a:buSzPts val="1200"/>
-              <a:buFont typeface="Arial"/>
+              <a:buFont typeface="Arial" panose="020B0604020202020204"/>
               <a:buNone/>
               <a:defRPr sz="1200" b="0" i="0" u="none" strike="noStrike" cap="none">
                 <a:solidFill>
                   <a:srgbClr val="888888"/>
                 </a:solidFill>
-                <a:latin typeface="Calibri"/>
-                <a:ea typeface="Calibri"/>
-                <a:cs typeface="Calibri"/>
-                <a:sym typeface="Calibri"/>
+                <a:latin typeface="Calibri" panose="020F0502020204030204"/>
+                <a:ea typeface="Calibri" panose="020F0502020204030204"/>
+                <a:cs typeface="Calibri" panose="020F0502020204030204"/>
+                <a:sym typeface="Calibri" panose="020F0502020204030204"/>
               </a:defRPr>
             </a:lvl9pPr>
           </a:lstStyle>
@@ -11548,9 +11437,8 @@
             </a:pPr>
             <a:fld id="{00000000-1234-1234-1234-123412341234}" type="slidenum">
               <a:rPr lang="en-US"/>
-              <a:t>‹#›</a:t>
             </a:fld>
-            <a:endParaRPr/>
+            <a:endParaRPr lang="en-US"/>
           </a:p>
         </p:txBody>
       </p:sp>
@@ -11563,7 +11451,7 @@
 </file>
 
 <file path=ppt/slideLayouts/slideLayout9.xml><?xml version="1.0" encoding="utf-8"?>
-<p:sldLayout xmlns:a="http://schemas.openxmlformats.org/drawingml/2006/main" xmlns:r="http://schemas.openxmlformats.org/officeDocument/2006/relationships" xmlns:p="http://schemas.openxmlformats.org/presentationml/2006/main" matchingName="Title and Vertical Text" type="vertTx">
+<p:sldLayout xmlns:a="http://schemas.openxmlformats.org/drawingml/2006/main" xmlns:r="http://schemas.openxmlformats.org/officeDocument/2006/relationships" xmlns:p="http://schemas.openxmlformats.org/presentationml/2006/main" type="vertTx" matchingName="Title and Vertical Text">
   <p:cSld name="VERTICAL_TEXT">
     <p:spTree>
       <p:nvGrpSpPr>
@@ -11737,9 +11625,7 @@
               <a:defRPr/>
             </a:lvl9pPr>
           </a:lstStyle>
-          <a:p>
-            <a:endParaRPr/>
-          </a:p>
+          <a:p/>
         </p:txBody>
       </p:sp>
       <p:sp>
@@ -11924,9 +11810,7 @@
               <a:defRPr/>
             </a:lvl9pPr>
           </a:lstStyle>
-          <a:p>
-            <a:endParaRPr/>
-          </a:p>
+          <a:p/>
         </p:txBody>
       </p:sp>
       <p:sp>
@@ -12084,9 +11968,7 @@
               <a:defRPr/>
             </a:lvl9pPr>
           </a:lstStyle>
-          <a:p>
-            <a:endParaRPr/>
-          </a:p>
+          <a:p/>
         </p:txBody>
       </p:sp>
       <p:sp>
@@ -12244,9 +12126,7 @@
               <a:defRPr/>
             </a:lvl9pPr>
           </a:lstStyle>
-          <a:p>
-            <a:endParaRPr/>
-          </a:p>
+          <a:p/>
         </p:txBody>
       </p:sp>
       <p:sp>
@@ -12291,16 +12171,16 @@
                 <a:srgbClr val="000000"/>
               </a:buClr>
               <a:buSzPts val="1200"/>
-              <a:buFont typeface="Arial"/>
+              <a:buFont typeface="Arial" panose="020B0604020202020204"/>
               <a:buNone/>
               <a:defRPr sz="1200" b="0" i="0" u="none" strike="noStrike" cap="none">
                 <a:solidFill>
                   <a:srgbClr val="888888"/>
                 </a:solidFill>
-                <a:latin typeface="Calibri"/>
-                <a:ea typeface="Calibri"/>
-                <a:cs typeface="Calibri"/>
-                <a:sym typeface="Calibri"/>
+                <a:latin typeface="Calibri" panose="020F0502020204030204"/>
+                <a:ea typeface="Calibri" panose="020F0502020204030204"/>
+                <a:cs typeface="Calibri" panose="020F0502020204030204"/>
+                <a:sym typeface="Calibri" panose="020F0502020204030204"/>
               </a:defRPr>
             </a:lvl1pPr>
             <a:lvl2pPr marL="0" marR="0" lvl="1" indent="0" algn="r">
@@ -12317,16 +12197,16 @@
                 <a:srgbClr val="000000"/>
               </a:buClr>
               <a:buSzPts val="1200"/>
-              <a:buFont typeface="Arial"/>
+              <a:buFont typeface="Arial" panose="020B0604020202020204"/>
               <a:buNone/>
               <a:defRPr sz="1200" b="0" i="0" u="none" strike="noStrike" cap="none">
                 <a:solidFill>
                   <a:srgbClr val="888888"/>
                 </a:solidFill>
-                <a:latin typeface="Calibri"/>
-                <a:ea typeface="Calibri"/>
-                <a:cs typeface="Calibri"/>
-                <a:sym typeface="Calibri"/>
+                <a:latin typeface="Calibri" panose="020F0502020204030204"/>
+                <a:ea typeface="Calibri" panose="020F0502020204030204"/>
+                <a:cs typeface="Calibri" panose="020F0502020204030204"/>
+                <a:sym typeface="Calibri" panose="020F0502020204030204"/>
               </a:defRPr>
             </a:lvl2pPr>
             <a:lvl3pPr marL="0" marR="0" lvl="2" indent="0" algn="r">
@@ -12343,16 +12223,16 @@
                 <a:srgbClr val="000000"/>
               </a:buClr>
               <a:buSzPts val="1200"/>
-              <a:buFont typeface="Arial"/>
+              <a:buFont typeface="Arial" panose="020B0604020202020204"/>
               <a:buNone/>
               <a:defRPr sz="1200" b="0" i="0" u="none" strike="noStrike" cap="none">
                 <a:solidFill>
                   <a:srgbClr val="888888"/>
                 </a:solidFill>
-                <a:latin typeface="Calibri"/>
-                <a:ea typeface="Calibri"/>
-                <a:cs typeface="Calibri"/>
-                <a:sym typeface="Calibri"/>
+                <a:latin typeface="Calibri" panose="020F0502020204030204"/>
+                <a:ea typeface="Calibri" panose="020F0502020204030204"/>
+                <a:cs typeface="Calibri" panose="020F0502020204030204"/>
+                <a:sym typeface="Calibri" panose="020F0502020204030204"/>
               </a:defRPr>
             </a:lvl3pPr>
             <a:lvl4pPr marL="0" marR="0" lvl="3" indent="0" algn="r">
@@ -12369,16 +12249,16 @@
                 <a:srgbClr val="000000"/>
               </a:buClr>
               <a:buSzPts val="1200"/>
-              <a:buFont typeface="Arial"/>
+              <a:buFont typeface="Arial" panose="020B0604020202020204"/>
               <a:buNone/>
               <a:defRPr sz="1200" b="0" i="0" u="none" strike="noStrike" cap="none">
                 <a:solidFill>
                   <a:srgbClr val="888888"/>
                 </a:solidFill>
-                <a:latin typeface="Calibri"/>
-                <a:ea typeface="Calibri"/>
-                <a:cs typeface="Calibri"/>
-                <a:sym typeface="Calibri"/>
+                <a:latin typeface="Calibri" panose="020F0502020204030204"/>
+                <a:ea typeface="Calibri" panose="020F0502020204030204"/>
+                <a:cs typeface="Calibri" panose="020F0502020204030204"/>
+                <a:sym typeface="Calibri" panose="020F0502020204030204"/>
               </a:defRPr>
             </a:lvl4pPr>
             <a:lvl5pPr marL="0" marR="0" lvl="4" indent="0" algn="r">
@@ -12395,16 +12275,16 @@
                 <a:srgbClr val="000000"/>
               </a:buClr>
               <a:buSzPts val="1200"/>
-              <a:buFont typeface="Arial"/>
+              <a:buFont typeface="Arial" panose="020B0604020202020204"/>
               <a:buNone/>
               <a:defRPr sz="1200" b="0" i="0" u="none" strike="noStrike" cap="none">
                 <a:solidFill>
                   <a:srgbClr val="888888"/>
                 </a:solidFill>
-                <a:latin typeface="Calibri"/>
-                <a:ea typeface="Calibri"/>
-                <a:cs typeface="Calibri"/>
-                <a:sym typeface="Calibri"/>
+                <a:latin typeface="Calibri" panose="020F0502020204030204"/>
+                <a:ea typeface="Calibri" panose="020F0502020204030204"/>
+                <a:cs typeface="Calibri" panose="020F0502020204030204"/>
+                <a:sym typeface="Calibri" panose="020F0502020204030204"/>
               </a:defRPr>
             </a:lvl5pPr>
             <a:lvl6pPr marL="0" marR="0" lvl="5" indent="0" algn="r">
@@ -12421,16 +12301,16 @@
                 <a:srgbClr val="000000"/>
               </a:buClr>
               <a:buSzPts val="1200"/>
-              <a:buFont typeface="Arial"/>
+              <a:buFont typeface="Arial" panose="020B0604020202020204"/>
               <a:buNone/>
               <a:defRPr sz="1200" b="0" i="0" u="none" strike="noStrike" cap="none">
                 <a:solidFill>
                   <a:srgbClr val="888888"/>
                 </a:solidFill>
-                <a:latin typeface="Calibri"/>
-                <a:ea typeface="Calibri"/>
-                <a:cs typeface="Calibri"/>
-                <a:sym typeface="Calibri"/>
+                <a:latin typeface="Calibri" panose="020F0502020204030204"/>
+                <a:ea typeface="Calibri" panose="020F0502020204030204"/>
+                <a:cs typeface="Calibri" panose="020F0502020204030204"/>
+                <a:sym typeface="Calibri" panose="020F0502020204030204"/>
               </a:defRPr>
             </a:lvl6pPr>
             <a:lvl7pPr marL="0" marR="0" lvl="6" indent="0" algn="r">
@@ -12447,16 +12327,16 @@
                 <a:srgbClr val="000000"/>
               </a:buClr>
               <a:buSzPts val="1200"/>
-              <a:buFont typeface="Arial"/>
+              <a:buFont typeface="Arial" panose="020B0604020202020204"/>
               <a:buNone/>
               <a:defRPr sz="1200" b="0" i="0" u="none" strike="noStrike" cap="none">
                 <a:solidFill>
                   <a:srgbClr val="888888"/>
                 </a:solidFill>
-                <a:latin typeface="Calibri"/>
-                <a:ea typeface="Calibri"/>
-                <a:cs typeface="Calibri"/>
-                <a:sym typeface="Calibri"/>
+                <a:latin typeface="Calibri" panose="020F0502020204030204"/>
+                <a:ea typeface="Calibri" panose="020F0502020204030204"/>
+                <a:cs typeface="Calibri" panose="020F0502020204030204"/>
+                <a:sym typeface="Calibri" panose="020F0502020204030204"/>
               </a:defRPr>
             </a:lvl7pPr>
             <a:lvl8pPr marL="0" marR="0" lvl="7" indent="0" algn="r">
@@ -12473,16 +12353,16 @@
                 <a:srgbClr val="000000"/>
               </a:buClr>
               <a:buSzPts val="1200"/>
-              <a:buFont typeface="Arial"/>
+              <a:buFont typeface="Arial" panose="020B0604020202020204"/>
               <a:buNone/>
               <a:defRPr sz="1200" b="0" i="0" u="none" strike="noStrike" cap="none">
                 <a:solidFill>
                   <a:srgbClr val="888888"/>
                 </a:solidFill>
-                <a:latin typeface="Calibri"/>
-                <a:ea typeface="Calibri"/>
-                <a:cs typeface="Calibri"/>
-                <a:sym typeface="Calibri"/>
+                <a:latin typeface="Calibri" panose="020F0502020204030204"/>
+                <a:ea typeface="Calibri" panose="020F0502020204030204"/>
+                <a:cs typeface="Calibri" panose="020F0502020204030204"/>
+                <a:sym typeface="Calibri" panose="020F0502020204030204"/>
               </a:defRPr>
             </a:lvl8pPr>
             <a:lvl9pPr marL="0" marR="0" lvl="8" indent="0" algn="r">
@@ -12499,16 +12379,16 @@
                 <a:srgbClr val="000000"/>
               </a:buClr>
               <a:buSzPts val="1200"/>
-              <a:buFont typeface="Arial"/>
+              <a:buFont typeface="Arial" panose="020B0604020202020204"/>
               <a:buNone/>
               <a:defRPr sz="1200" b="0" i="0" u="none" strike="noStrike" cap="none">
                 <a:solidFill>
                   <a:srgbClr val="888888"/>
                 </a:solidFill>
-                <a:latin typeface="Calibri"/>
-                <a:ea typeface="Calibri"/>
-                <a:cs typeface="Calibri"/>
-                <a:sym typeface="Calibri"/>
+                <a:latin typeface="Calibri" panose="020F0502020204030204"/>
+                <a:ea typeface="Calibri" panose="020F0502020204030204"/>
+                <a:cs typeface="Calibri" panose="020F0502020204030204"/>
+                <a:sym typeface="Calibri" panose="020F0502020204030204"/>
               </a:defRPr>
             </a:lvl9pPr>
           </a:lstStyle>
@@ -12524,9 +12404,8 @@
             </a:pPr>
             <a:fld id="{00000000-1234-1234-1234-123412341234}" type="slidenum">
               <a:rPr lang="en-US"/>
-              <a:t>‹#›</a:t>
             </a:fld>
-            <a:endParaRPr/>
+            <a:endParaRPr lang="en-US"/>
           </a:p>
         </p:txBody>
       </p:sp>
@@ -12605,16 +12484,16 @@
                 <a:schemeClr val="dk1"/>
               </a:buClr>
               <a:buSzPts val="4400"/>
-              <a:buFont typeface="Calibri"/>
+              <a:buFont typeface="Calibri" panose="020F0502020204030204"/>
               <a:buNone/>
               <a:defRPr sz="4400" b="0" i="0" u="none" strike="noStrike" cap="none">
                 <a:solidFill>
                   <a:schemeClr val="dk1"/>
                 </a:solidFill>
-                <a:latin typeface="Calibri"/>
-                <a:ea typeface="Calibri"/>
-                <a:cs typeface="Calibri"/>
-                <a:sym typeface="Calibri"/>
+                <a:latin typeface="Calibri" panose="020F0502020204030204"/>
+                <a:ea typeface="Calibri" panose="020F0502020204030204"/>
+                <a:cs typeface="Calibri" panose="020F0502020204030204"/>
+                <a:sym typeface="Calibri" panose="020F0502020204030204"/>
               </a:defRPr>
             </a:lvl1pPr>
             <a:lvl2pPr marR="0" lvl="1" algn="l" rtl="0">
@@ -12631,16 +12510,16 @@
                 <a:srgbClr val="000000"/>
               </a:buClr>
               <a:buSzPts val="1400"/>
-              <a:buFont typeface="Arial"/>
+              <a:buFont typeface="Arial" panose="020B0604020202020204"/>
               <a:buNone/>
               <a:defRPr sz="1800" b="0" i="0" u="none" strike="noStrike" cap="none">
                 <a:solidFill>
                   <a:srgbClr val="000000"/>
                 </a:solidFill>
-                <a:latin typeface="Arial"/>
-                <a:ea typeface="Arial"/>
-                <a:cs typeface="Arial"/>
-                <a:sym typeface="Arial"/>
+                <a:latin typeface="Arial" panose="020B0604020202020204"/>
+                <a:ea typeface="Arial" panose="020B0604020202020204"/>
+                <a:cs typeface="Arial" panose="020B0604020202020204"/>
+                <a:sym typeface="Arial" panose="020B0604020202020204"/>
               </a:defRPr>
             </a:lvl2pPr>
             <a:lvl3pPr marR="0" lvl="2" algn="l" rtl="0">
@@ -12657,16 +12536,16 @@
                 <a:srgbClr val="000000"/>
               </a:buClr>
               <a:buSzPts val="1400"/>
-              <a:buFont typeface="Arial"/>
+              <a:buFont typeface="Arial" panose="020B0604020202020204"/>
               <a:buNone/>
               <a:defRPr sz="1800" b="0" i="0" u="none" strike="noStrike" cap="none">
                 <a:solidFill>
                   <a:srgbClr val="000000"/>
                 </a:solidFill>
-                <a:latin typeface="Arial"/>
-                <a:ea typeface="Arial"/>
-                <a:cs typeface="Arial"/>
-                <a:sym typeface="Arial"/>
+                <a:latin typeface="Arial" panose="020B0604020202020204"/>
+                <a:ea typeface="Arial" panose="020B0604020202020204"/>
+                <a:cs typeface="Arial" panose="020B0604020202020204"/>
+                <a:sym typeface="Arial" panose="020B0604020202020204"/>
               </a:defRPr>
             </a:lvl3pPr>
             <a:lvl4pPr marR="0" lvl="3" algn="l" rtl="0">
@@ -12683,16 +12562,16 @@
                 <a:srgbClr val="000000"/>
               </a:buClr>
               <a:buSzPts val="1400"/>
-              <a:buFont typeface="Arial"/>
+              <a:buFont typeface="Arial" panose="020B0604020202020204"/>
               <a:buNone/>
               <a:defRPr sz="1800" b="0" i="0" u="none" strike="noStrike" cap="none">
                 <a:solidFill>
                   <a:srgbClr val="000000"/>
                 </a:solidFill>
-                <a:latin typeface="Arial"/>
-                <a:ea typeface="Arial"/>
-                <a:cs typeface="Arial"/>
-                <a:sym typeface="Arial"/>
+                <a:latin typeface="Arial" panose="020B0604020202020204"/>
+                <a:ea typeface="Arial" panose="020B0604020202020204"/>
+                <a:cs typeface="Arial" panose="020B0604020202020204"/>
+                <a:sym typeface="Arial" panose="020B0604020202020204"/>
               </a:defRPr>
             </a:lvl4pPr>
             <a:lvl5pPr marR="0" lvl="4" algn="l" rtl="0">
@@ -12709,16 +12588,16 @@
                 <a:srgbClr val="000000"/>
               </a:buClr>
               <a:buSzPts val="1400"/>
-              <a:buFont typeface="Arial"/>
+              <a:buFont typeface="Arial" panose="020B0604020202020204"/>
               <a:buNone/>
               <a:defRPr sz="1800" b="0" i="0" u="none" strike="noStrike" cap="none">
                 <a:solidFill>
                   <a:srgbClr val="000000"/>
                 </a:solidFill>
-                <a:latin typeface="Arial"/>
-                <a:ea typeface="Arial"/>
-                <a:cs typeface="Arial"/>
-                <a:sym typeface="Arial"/>
+                <a:latin typeface="Arial" panose="020B0604020202020204"/>
+                <a:ea typeface="Arial" panose="020B0604020202020204"/>
+                <a:cs typeface="Arial" panose="020B0604020202020204"/>
+                <a:sym typeface="Arial" panose="020B0604020202020204"/>
               </a:defRPr>
             </a:lvl5pPr>
             <a:lvl6pPr marR="0" lvl="5" algn="l" rtl="0">
@@ -12735,16 +12614,16 @@
                 <a:srgbClr val="000000"/>
               </a:buClr>
               <a:buSzPts val="1400"/>
-              <a:buFont typeface="Arial"/>
+              <a:buFont typeface="Arial" panose="020B0604020202020204"/>
               <a:buNone/>
               <a:defRPr sz="1800" b="0" i="0" u="none" strike="noStrike" cap="none">
                 <a:solidFill>
                   <a:srgbClr val="000000"/>
                 </a:solidFill>
-                <a:latin typeface="Arial"/>
-                <a:ea typeface="Arial"/>
-                <a:cs typeface="Arial"/>
-                <a:sym typeface="Arial"/>
+                <a:latin typeface="Arial" panose="020B0604020202020204"/>
+                <a:ea typeface="Arial" panose="020B0604020202020204"/>
+                <a:cs typeface="Arial" panose="020B0604020202020204"/>
+                <a:sym typeface="Arial" panose="020B0604020202020204"/>
               </a:defRPr>
             </a:lvl6pPr>
             <a:lvl7pPr marR="0" lvl="6" algn="l" rtl="0">
@@ -12761,16 +12640,16 @@
                 <a:srgbClr val="000000"/>
               </a:buClr>
               <a:buSzPts val="1400"/>
-              <a:buFont typeface="Arial"/>
+              <a:buFont typeface="Arial" panose="020B0604020202020204"/>
               <a:buNone/>
               <a:defRPr sz="1800" b="0" i="0" u="none" strike="noStrike" cap="none">
                 <a:solidFill>
                   <a:srgbClr val="000000"/>
                 </a:solidFill>
-                <a:latin typeface="Arial"/>
-                <a:ea typeface="Arial"/>
-                <a:cs typeface="Arial"/>
-                <a:sym typeface="Arial"/>
+                <a:latin typeface="Arial" panose="020B0604020202020204"/>
+                <a:ea typeface="Arial" panose="020B0604020202020204"/>
+                <a:cs typeface="Arial" panose="020B0604020202020204"/>
+                <a:sym typeface="Arial" panose="020B0604020202020204"/>
               </a:defRPr>
             </a:lvl7pPr>
             <a:lvl8pPr marR="0" lvl="7" algn="l" rtl="0">
@@ -12787,16 +12666,16 @@
                 <a:srgbClr val="000000"/>
               </a:buClr>
               <a:buSzPts val="1400"/>
-              <a:buFont typeface="Arial"/>
+              <a:buFont typeface="Arial" panose="020B0604020202020204"/>
               <a:buNone/>
               <a:defRPr sz="1800" b="0" i="0" u="none" strike="noStrike" cap="none">
                 <a:solidFill>
                   <a:srgbClr val="000000"/>
                 </a:solidFill>
-                <a:latin typeface="Arial"/>
-                <a:ea typeface="Arial"/>
-                <a:cs typeface="Arial"/>
-                <a:sym typeface="Arial"/>
+                <a:latin typeface="Arial" panose="020B0604020202020204"/>
+                <a:ea typeface="Arial" panose="020B0604020202020204"/>
+                <a:cs typeface="Arial" panose="020B0604020202020204"/>
+                <a:sym typeface="Arial" panose="020B0604020202020204"/>
               </a:defRPr>
             </a:lvl8pPr>
             <a:lvl9pPr marR="0" lvl="8" algn="l" rtl="0">
@@ -12813,22 +12692,20 @@
                 <a:srgbClr val="000000"/>
               </a:buClr>
               <a:buSzPts val="1400"/>
-              <a:buFont typeface="Arial"/>
+              <a:buFont typeface="Arial" panose="020B0604020202020204"/>
               <a:buNone/>
               <a:defRPr sz="1800" b="0" i="0" u="none" strike="noStrike" cap="none">
                 <a:solidFill>
                   <a:srgbClr val="000000"/>
                 </a:solidFill>
-                <a:latin typeface="Arial"/>
-                <a:ea typeface="Arial"/>
-                <a:cs typeface="Arial"/>
-                <a:sym typeface="Arial"/>
+                <a:latin typeface="Arial" panose="020B0604020202020204"/>
+                <a:ea typeface="Arial" panose="020B0604020202020204"/>
+                <a:cs typeface="Arial" panose="020B0604020202020204"/>
+                <a:sym typeface="Arial" panose="020B0604020202020204"/>
               </a:defRPr>
             </a:lvl9pPr>
           </a:lstStyle>
-          <a:p>
-            <a:endParaRPr/>
-          </a:p>
+          <a:p/>
         </p:txBody>
       </p:sp>
       <p:sp>
@@ -12873,16 +12750,16 @@
                 <a:schemeClr val="dk1"/>
               </a:buClr>
               <a:buSzPts val="3200"/>
-              <a:buFont typeface="Arial"/>
+              <a:buFont typeface="Arial" panose="020B0604020202020204"/>
               <a:buChar char="•"/>
               <a:defRPr sz="3200" b="0" i="0" u="none" strike="noStrike" cap="none">
                 <a:solidFill>
                   <a:schemeClr val="dk1"/>
                 </a:solidFill>
-                <a:latin typeface="Calibri"/>
-                <a:ea typeface="Calibri"/>
-                <a:cs typeface="Calibri"/>
-                <a:sym typeface="Calibri"/>
+                <a:latin typeface="Calibri" panose="020F0502020204030204"/>
+                <a:ea typeface="Calibri" panose="020F0502020204030204"/>
+                <a:cs typeface="Calibri" panose="020F0502020204030204"/>
+                <a:sym typeface="Calibri" panose="020F0502020204030204"/>
               </a:defRPr>
             </a:lvl1pPr>
             <a:lvl2pPr marL="914400" marR="0" lvl="1" indent="-406400" algn="l" rtl="0">
@@ -12899,16 +12776,16 @@
                 <a:schemeClr val="dk1"/>
               </a:buClr>
               <a:buSzPts val="2800"/>
-              <a:buFont typeface="Arial"/>
+              <a:buFont typeface="Arial" panose="020B0604020202020204"/>
               <a:buChar char="–"/>
               <a:defRPr sz="2800" b="0" i="0" u="none" strike="noStrike" cap="none">
                 <a:solidFill>
                   <a:schemeClr val="dk1"/>
                 </a:solidFill>
-                <a:latin typeface="Calibri"/>
-                <a:ea typeface="Calibri"/>
-                <a:cs typeface="Calibri"/>
-                <a:sym typeface="Calibri"/>
+                <a:latin typeface="Calibri" panose="020F0502020204030204"/>
+                <a:ea typeface="Calibri" panose="020F0502020204030204"/>
+                <a:cs typeface="Calibri" panose="020F0502020204030204"/>
+                <a:sym typeface="Calibri" panose="020F0502020204030204"/>
               </a:defRPr>
             </a:lvl2pPr>
             <a:lvl3pPr marL="1371600" marR="0" lvl="2" indent="-381000" algn="l" rtl="0">
@@ -12925,16 +12802,16 @@
                 <a:schemeClr val="dk1"/>
               </a:buClr>
               <a:buSzPts val="2400"/>
-              <a:buFont typeface="Arial"/>
+              <a:buFont typeface="Arial" panose="020B0604020202020204"/>
               <a:buChar char="•"/>
               <a:defRPr sz="2400" b="0" i="0" u="none" strike="noStrike" cap="none">
                 <a:solidFill>
                   <a:schemeClr val="dk1"/>
                 </a:solidFill>
-                <a:latin typeface="Calibri"/>
-                <a:ea typeface="Calibri"/>
-                <a:cs typeface="Calibri"/>
-                <a:sym typeface="Calibri"/>
+                <a:latin typeface="Calibri" panose="020F0502020204030204"/>
+                <a:ea typeface="Calibri" panose="020F0502020204030204"/>
+                <a:cs typeface="Calibri" panose="020F0502020204030204"/>
+                <a:sym typeface="Calibri" panose="020F0502020204030204"/>
               </a:defRPr>
             </a:lvl3pPr>
             <a:lvl4pPr marL="1828800" marR="0" lvl="3" indent="-355600" algn="l" rtl="0">
@@ -12951,16 +12828,16 @@
                 <a:schemeClr val="dk1"/>
               </a:buClr>
               <a:buSzPts val="2000"/>
-              <a:buFont typeface="Arial"/>
+              <a:buFont typeface="Arial" panose="020B0604020202020204"/>
               <a:buChar char="–"/>
               <a:defRPr sz="2000" b="0" i="0" u="none" strike="noStrike" cap="none">
                 <a:solidFill>
                   <a:schemeClr val="dk1"/>
                 </a:solidFill>
-                <a:latin typeface="Calibri"/>
-                <a:ea typeface="Calibri"/>
-                <a:cs typeface="Calibri"/>
-                <a:sym typeface="Calibri"/>
+                <a:latin typeface="Calibri" panose="020F0502020204030204"/>
+                <a:ea typeface="Calibri" panose="020F0502020204030204"/>
+                <a:cs typeface="Calibri" panose="020F0502020204030204"/>
+                <a:sym typeface="Calibri" panose="020F0502020204030204"/>
               </a:defRPr>
             </a:lvl4pPr>
             <a:lvl5pPr marL="2286000" marR="0" lvl="4" indent="-355600" algn="l" rtl="0">
@@ -12977,16 +12854,16 @@
                 <a:schemeClr val="dk1"/>
               </a:buClr>
               <a:buSzPts val="2000"/>
-              <a:buFont typeface="Arial"/>
+              <a:buFont typeface="Arial" panose="020B0604020202020204"/>
               <a:buChar char="»"/>
               <a:defRPr sz="2000" b="0" i="0" u="none" strike="noStrike" cap="none">
                 <a:solidFill>
                   <a:schemeClr val="dk1"/>
                 </a:solidFill>
-                <a:latin typeface="Calibri"/>
-                <a:ea typeface="Calibri"/>
-                <a:cs typeface="Calibri"/>
-                <a:sym typeface="Calibri"/>
+                <a:latin typeface="Calibri" panose="020F0502020204030204"/>
+                <a:ea typeface="Calibri" panose="020F0502020204030204"/>
+                <a:cs typeface="Calibri" panose="020F0502020204030204"/>
+                <a:sym typeface="Calibri" panose="020F0502020204030204"/>
               </a:defRPr>
             </a:lvl5pPr>
             <a:lvl6pPr marL="2743200" marR="0" lvl="5" indent="-355600" algn="l" rtl="0">
@@ -13003,16 +12880,16 @@
                 <a:schemeClr val="dk1"/>
               </a:buClr>
               <a:buSzPts val="2000"/>
-              <a:buFont typeface="Arial"/>
+              <a:buFont typeface="Arial" panose="020B0604020202020204"/>
               <a:buChar char="•"/>
               <a:defRPr sz="2000" b="0" i="0" u="none" strike="noStrike" cap="none">
                 <a:solidFill>
                   <a:schemeClr val="dk1"/>
                 </a:solidFill>
-                <a:latin typeface="Calibri"/>
-                <a:ea typeface="Calibri"/>
-                <a:cs typeface="Calibri"/>
-                <a:sym typeface="Calibri"/>
+                <a:latin typeface="Calibri" panose="020F0502020204030204"/>
+                <a:ea typeface="Calibri" panose="020F0502020204030204"/>
+                <a:cs typeface="Calibri" panose="020F0502020204030204"/>
+                <a:sym typeface="Calibri" panose="020F0502020204030204"/>
               </a:defRPr>
             </a:lvl6pPr>
             <a:lvl7pPr marL="3200400" marR="0" lvl="6" indent="-355600" algn="l" rtl="0">
@@ -13029,16 +12906,16 @@
                 <a:schemeClr val="dk1"/>
               </a:buClr>
               <a:buSzPts val="2000"/>
-              <a:buFont typeface="Arial"/>
+              <a:buFont typeface="Arial" panose="020B0604020202020204"/>
               <a:buChar char="•"/>
               <a:defRPr sz="2000" b="0" i="0" u="none" strike="noStrike" cap="none">
                 <a:solidFill>
                   <a:schemeClr val="dk1"/>
                 </a:solidFill>
-                <a:latin typeface="Calibri"/>
-                <a:ea typeface="Calibri"/>
-                <a:cs typeface="Calibri"/>
-                <a:sym typeface="Calibri"/>
+                <a:latin typeface="Calibri" panose="020F0502020204030204"/>
+                <a:ea typeface="Calibri" panose="020F0502020204030204"/>
+                <a:cs typeface="Calibri" panose="020F0502020204030204"/>
+                <a:sym typeface="Calibri" panose="020F0502020204030204"/>
               </a:defRPr>
             </a:lvl7pPr>
             <a:lvl8pPr marL="3657600" marR="0" lvl="7" indent="-355600" algn="l" rtl="0">
@@ -13055,16 +12932,16 @@
                 <a:schemeClr val="dk1"/>
               </a:buClr>
               <a:buSzPts val="2000"/>
-              <a:buFont typeface="Arial"/>
+              <a:buFont typeface="Arial" panose="020B0604020202020204"/>
               <a:buChar char="•"/>
               <a:defRPr sz="2000" b="0" i="0" u="none" strike="noStrike" cap="none">
                 <a:solidFill>
                   <a:schemeClr val="dk1"/>
                 </a:solidFill>
-                <a:latin typeface="Calibri"/>
-                <a:ea typeface="Calibri"/>
-                <a:cs typeface="Calibri"/>
-                <a:sym typeface="Calibri"/>
+                <a:latin typeface="Calibri" panose="020F0502020204030204"/>
+                <a:ea typeface="Calibri" panose="020F0502020204030204"/>
+                <a:cs typeface="Calibri" panose="020F0502020204030204"/>
+                <a:sym typeface="Calibri" panose="020F0502020204030204"/>
               </a:defRPr>
             </a:lvl8pPr>
             <a:lvl9pPr marL="4114800" marR="0" lvl="8" indent="-355600" algn="l" rtl="0">
@@ -13081,22 +12958,20 @@
                 <a:schemeClr val="dk1"/>
               </a:buClr>
               <a:buSzPts val="2000"/>
-              <a:buFont typeface="Arial"/>
+              <a:buFont typeface="Arial" panose="020B0604020202020204"/>
               <a:buChar char="•"/>
               <a:defRPr sz="2000" b="0" i="0" u="none" strike="noStrike" cap="none">
                 <a:solidFill>
                   <a:schemeClr val="dk1"/>
                 </a:solidFill>
-                <a:latin typeface="Calibri"/>
-                <a:ea typeface="Calibri"/>
-                <a:cs typeface="Calibri"/>
-                <a:sym typeface="Calibri"/>
+                <a:latin typeface="Calibri" panose="020F0502020204030204"/>
+                <a:ea typeface="Calibri" panose="020F0502020204030204"/>
+                <a:cs typeface="Calibri" panose="020F0502020204030204"/>
+                <a:sym typeface="Calibri" panose="020F0502020204030204"/>
               </a:defRPr>
             </a:lvl9pPr>
           </a:lstStyle>
-          <a:p>
-            <a:endParaRPr/>
-          </a:p>
+          <a:p/>
         </p:txBody>
       </p:sp>
       <p:sp>
@@ -13141,16 +13016,16 @@
                 <a:srgbClr val="000000"/>
               </a:buClr>
               <a:buSzPts val="1400"/>
-              <a:buFont typeface="Arial"/>
+              <a:buFont typeface="Arial" panose="020B0604020202020204"/>
               <a:buNone/>
               <a:defRPr sz="1200" b="0" i="0" u="none" strike="noStrike" cap="none">
                 <a:solidFill>
                   <a:srgbClr val="888888"/>
                 </a:solidFill>
-                <a:latin typeface="Calibri"/>
-                <a:ea typeface="Calibri"/>
-                <a:cs typeface="Calibri"/>
-                <a:sym typeface="Calibri"/>
+                <a:latin typeface="Calibri" panose="020F0502020204030204"/>
+                <a:ea typeface="Calibri" panose="020F0502020204030204"/>
+                <a:cs typeface="Calibri" panose="020F0502020204030204"/>
+                <a:sym typeface="Calibri" panose="020F0502020204030204"/>
               </a:defRPr>
             </a:lvl1pPr>
             <a:lvl2pPr marR="0" lvl="1" algn="l" rtl="0">
@@ -13167,16 +13042,16 @@
                 <a:srgbClr val="000000"/>
               </a:buClr>
               <a:buSzPts val="1400"/>
-              <a:buFont typeface="Arial"/>
+              <a:buFont typeface="Arial" panose="020B0604020202020204"/>
               <a:buNone/>
               <a:defRPr sz="1800" b="0" i="0" u="none" strike="noStrike" cap="none">
                 <a:solidFill>
                   <a:schemeClr val="dk1"/>
                 </a:solidFill>
-                <a:latin typeface="Calibri"/>
-                <a:ea typeface="Calibri"/>
-                <a:cs typeface="Calibri"/>
-                <a:sym typeface="Calibri"/>
+                <a:latin typeface="Calibri" panose="020F0502020204030204"/>
+                <a:ea typeface="Calibri" panose="020F0502020204030204"/>
+                <a:cs typeface="Calibri" panose="020F0502020204030204"/>
+                <a:sym typeface="Calibri" panose="020F0502020204030204"/>
               </a:defRPr>
             </a:lvl2pPr>
             <a:lvl3pPr marR="0" lvl="2" algn="l" rtl="0">
@@ -13193,16 +13068,16 @@
                 <a:srgbClr val="000000"/>
               </a:buClr>
               <a:buSzPts val="1400"/>
-              <a:buFont typeface="Arial"/>
+              <a:buFont typeface="Arial" panose="020B0604020202020204"/>
               <a:buNone/>
               <a:defRPr sz="1800" b="0" i="0" u="none" strike="noStrike" cap="none">
                 <a:solidFill>
                   <a:schemeClr val="dk1"/>
                 </a:solidFill>
-                <a:latin typeface="Calibri"/>
-                <a:ea typeface="Calibri"/>
-                <a:cs typeface="Calibri"/>
-                <a:sym typeface="Calibri"/>
+                <a:latin typeface="Calibri" panose="020F0502020204030204"/>
+                <a:ea typeface="Calibri" panose="020F0502020204030204"/>
+                <a:cs typeface="Calibri" panose="020F0502020204030204"/>
+                <a:sym typeface="Calibri" panose="020F0502020204030204"/>
               </a:defRPr>
             </a:lvl3pPr>
             <a:lvl4pPr marR="0" lvl="3" algn="l" rtl="0">
@@ -13219,16 +13094,16 @@
                 <a:srgbClr val="000000"/>
               </a:buClr>
               <a:buSzPts val="1400"/>
-              <a:buFont typeface="Arial"/>
+              <a:buFont typeface="Arial" panose="020B0604020202020204"/>
               <a:buNone/>
               <a:defRPr sz="1800" b="0" i="0" u="none" strike="noStrike" cap="none">
                 <a:solidFill>
                   <a:schemeClr val="dk1"/>
                 </a:solidFill>
-                <a:latin typeface="Calibri"/>
-                <a:ea typeface="Calibri"/>
-                <a:cs typeface="Calibri"/>
-                <a:sym typeface="Calibri"/>
+                <a:latin typeface="Calibri" panose="020F0502020204030204"/>
+                <a:ea typeface="Calibri" panose="020F0502020204030204"/>
+                <a:cs typeface="Calibri" panose="020F0502020204030204"/>
+                <a:sym typeface="Calibri" panose="020F0502020204030204"/>
               </a:defRPr>
             </a:lvl4pPr>
             <a:lvl5pPr marR="0" lvl="4" algn="l" rtl="0">
@@ -13245,16 +13120,16 @@
                 <a:srgbClr val="000000"/>
               </a:buClr>
               <a:buSzPts val="1400"/>
-              <a:buFont typeface="Arial"/>
+              <a:buFont typeface="Arial" panose="020B0604020202020204"/>
               <a:buNone/>
               <a:defRPr sz="1800" b="0" i="0" u="none" strike="noStrike" cap="none">
                 <a:solidFill>
                   <a:schemeClr val="dk1"/>
                 </a:solidFill>
-                <a:latin typeface="Calibri"/>
-                <a:ea typeface="Calibri"/>
-                <a:cs typeface="Calibri"/>
-                <a:sym typeface="Calibri"/>
+                <a:latin typeface="Calibri" panose="020F0502020204030204"/>
+                <a:ea typeface="Calibri" panose="020F0502020204030204"/>
+                <a:cs typeface="Calibri" panose="020F0502020204030204"/>
+                <a:sym typeface="Calibri" panose="020F0502020204030204"/>
               </a:defRPr>
             </a:lvl5pPr>
             <a:lvl6pPr marR="0" lvl="5" algn="l" rtl="0">
@@ -13271,16 +13146,16 @@
                 <a:srgbClr val="000000"/>
               </a:buClr>
               <a:buSzPts val="1400"/>
-              <a:buFont typeface="Arial"/>
+              <a:buFont typeface="Arial" panose="020B0604020202020204"/>
               <a:buNone/>
               <a:defRPr sz="1800" b="0" i="0" u="none" strike="noStrike" cap="none">
                 <a:solidFill>
                   <a:schemeClr val="dk1"/>
                 </a:solidFill>
-                <a:latin typeface="Calibri"/>
-                <a:ea typeface="Calibri"/>
-                <a:cs typeface="Calibri"/>
-                <a:sym typeface="Calibri"/>
+                <a:latin typeface="Calibri" panose="020F0502020204030204"/>
+                <a:ea typeface="Calibri" panose="020F0502020204030204"/>
+                <a:cs typeface="Calibri" panose="020F0502020204030204"/>
+                <a:sym typeface="Calibri" panose="020F0502020204030204"/>
               </a:defRPr>
             </a:lvl6pPr>
             <a:lvl7pPr marR="0" lvl="6" algn="l" rtl="0">
@@ -13297,16 +13172,16 @@
                 <a:srgbClr val="000000"/>
               </a:buClr>
               <a:buSzPts val="1400"/>
-              <a:buFont typeface="Arial"/>
+              <a:buFont typeface="Arial" panose="020B0604020202020204"/>
               <a:buNone/>
               <a:defRPr sz="1800" b="0" i="0" u="none" strike="noStrike" cap="none">
                 <a:solidFill>
                   <a:schemeClr val="dk1"/>
                 </a:solidFill>
-                <a:latin typeface="Calibri"/>
-                <a:ea typeface="Calibri"/>
-                <a:cs typeface="Calibri"/>
-                <a:sym typeface="Calibri"/>
+                <a:latin typeface="Calibri" panose="020F0502020204030204"/>
+                <a:ea typeface="Calibri" panose="020F0502020204030204"/>
+                <a:cs typeface="Calibri" panose="020F0502020204030204"/>
+                <a:sym typeface="Calibri" panose="020F0502020204030204"/>
               </a:defRPr>
             </a:lvl7pPr>
             <a:lvl8pPr marR="0" lvl="7" algn="l" rtl="0">
@@ -13323,16 +13198,16 @@
                 <a:srgbClr val="000000"/>
               </a:buClr>
               <a:buSzPts val="1400"/>
-              <a:buFont typeface="Arial"/>
+              <a:buFont typeface="Arial" panose="020B0604020202020204"/>
               <a:buNone/>
               <a:defRPr sz="1800" b="0" i="0" u="none" strike="noStrike" cap="none">
                 <a:solidFill>
                   <a:schemeClr val="dk1"/>
                 </a:solidFill>
-                <a:latin typeface="Calibri"/>
-                <a:ea typeface="Calibri"/>
-                <a:cs typeface="Calibri"/>
-                <a:sym typeface="Calibri"/>
+                <a:latin typeface="Calibri" panose="020F0502020204030204"/>
+                <a:ea typeface="Calibri" panose="020F0502020204030204"/>
+                <a:cs typeface="Calibri" panose="020F0502020204030204"/>
+                <a:sym typeface="Calibri" panose="020F0502020204030204"/>
               </a:defRPr>
             </a:lvl8pPr>
             <a:lvl9pPr marR="0" lvl="8" algn="l" rtl="0">
@@ -13349,22 +13224,20 @@
                 <a:srgbClr val="000000"/>
               </a:buClr>
               <a:buSzPts val="1400"/>
-              <a:buFont typeface="Arial"/>
+              <a:buFont typeface="Arial" panose="020B0604020202020204"/>
               <a:buNone/>
               <a:defRPr sz="1800" b="0" i="0" u="none" strike="noStrike" cap="none">
                 <a:solidFill>
                   <a:schemeClr val="dk1"/>
                 </a:solidFill>
-                <a:latin typeface="Calibri"/>
-                <a:ea typeface="Calibri"/>
-                <a:cs typeface="Calibri"/>
-                <a:sym typeface="Calibri"/>
+                <a:latin typeface="Calibri" panose="020F0502020204030204"/>
+                <a:ea typeface="Calibri" panose="020F0502020204030204"/>
+                <a:cs typeface="Calibri" panose="020F0502020204030204"/>
+                <a:sym typeface="Calibri" panose="020F0502020204030204"/>
               </a:defRPr>
             </a:lvl9pPr>
           </a:lstStyle>
-          <a:p>
-            <a:endParaRPr/>
-          </a:p>
+          <a:p/>
         </p:txBody>
       </p:sp>
       <p:sp>
@@ -13409,16 +13282,16 @@
                 <a:srgbClr val="000000"/>
               </a:buClr>
               <a:buSzPts val="1400"/>
-              <a:buFont typeface="Arial"/>
+              <a:buFont typeface="Arial" panose="020B0604020202020204"/>
               <a:buNone/>
               <a:defRPr sz="1200" b="0" i="0" u="none" strike="noStrike" cap="none">
                 <a:solidFill>
                   <a:srgbClr val="888888"/>
                 </a:solidFill>
-                <a:latin typeface="Calibri"/>
-                <a:ea typeface="Calibri"/>
-                <a:cs typeface="Calibri"/>
-                <a:sym typeface="Calibri"/>
+                <a:latin typeface="Calibri" panose="020F0502020204030204"/>
+                <a:ea typeface="Calibri" panose="020F0502020204030204"/>
+                <a:cs typeface="Calibri" panose="020F0502020204030204"/>
+                <a:sym typeface="Calibri" panose="020F0502020204030204"/>
               </a:defRPr>
             </a:lvl1pPr>
             <a:lvl2pPr marR="0" lvl="1" algn="l" rtl="0">
@@ -13435,16 +13308,16 @@
                 <a:srgbClr val="000000"/>
               </a:buClr>
               <a:buSzPts val="1400"/>
-              <a:buFont typeface="Arial"/>
+              <a:buFont typeface="Arial" panose="020B0604020202020204"/>
               <a:buNone/>
               <a:defRPr sz="1800" b="0" i="0" u="none" strike="noStrike" cap="none">
                 <a:solidFill>
                   <a:schemeClr val="dk1"/>
                 </a:solidFill>
-                <a:latin typeface="Calibri"/>
-                <a:ea typeface="Calibri"/>
-                <a:cs typeface="Calibri"/>
-                <a:sym typeface="Calibri"/>
+                <a:latin typeface="Calibri" panose="020F0502020204030204"/>
+                <a:ea typeface="Calibri" panose="020F0502020204030204"/>
+                <a:cs typeface="Calibri" panose="020F0502020204030204"/>
+                <a:sym typeface="Calibri" panose="020F0502020204030204"/>
               </a:defRPr>
             </a:lvl2pPr>
             <a:lvl3pPr marR="0" lvl="2" algn="l" rtl="0">
@@ -13461,16 +13334,16 @@
                 <a:srgbClr val="000000"/>
               </a:buClr>
               <a:buSzPts val="1400"/>
-              <a:buFont typeface="Arial"/>
+              <a:buFont typeface="Arial" panose="020B0604020202020204"/>
               <a:buNone/>
               <a:defRPr sz="1800" b="0" i="0" u="none" strike="noStrike" cap="none">
                 <a:solidFill>
                   <a:schemeClr val="dk1"/>
                 </a:solidFill>
-                <a:latin typeface="Calibri"/>
-                <a:ea typeface="Calibri"/>
-                <a:cs typeface="Calibri"/>
-                <a:sym typeface="Calibri"/>
+                <a:latin typeface="Calibri" panose="020F0502020204030204"/>
+                <a:ea typeface="Calibri" panose="020F0502020204030204"/>
+                <a:cs typeface="Calibri" panose="020F0502020204030204"/>
+                <a:sym typeface="Calibri" panose="020F0502020204030204"/>
               </a:defRPr>
             </a:lvl3pPr>
             <a:lvl4pPr marR="0" lvl="3" algn="l" rtl="0">
@@ -13487,16 +13360,16 @@
                 <a:srgbClr val="000000"/>
               </a:buClr>
               <a:buSzPts val="1400"/>
-              <a:buFont typeface="Arial"/>
+              <a:buFont typeface="Arial" panose="020B0604020202020204"/>
               <a:buNone/>
               <a:defRPr sz="1800" b="0" i="0" u="none" strike="noStrike" cap="none">
                 <a:solidFill>
                   <a:schemeClr val="dk1"/>
                 </a:solidFill>
-                <a:latin typeface="Calibri"/>
-                <a:ea typeface="Calibri"/>
-                <a:cs typeface="Calibri"/>
-                <a:sym typeface="Calibri"/>
+                <a:latin typeface="Calibri" panose="020F0502020204030204"/>
+                <a:ea typeface="Calibri" panose="020F0502020204030204"/>
+                <a:cs typeface="Calibri" panose="020F0502020204030204"/>
+                <a:sym typeface="Calibri" panose="020F0502020204030204"/>
               </a:defRPr>
             </a:lvl4pPr>
             <a:lvl5pPr marR="0" lvl="4" algn="l" rtl="0">
@@ -13513,16 +13386,16 @@
                 <a:srgbClr val="000000"/>
               </a:buClr>
               <a:buSzPts val="1400"/>
-              <a:buFont typeface="Arial"/>
+              <a:buFont typeface="Arial" panose="020B0604020202020204"/>
               <a:buNone/>
               <a:defRPr sz="1800" b="0" i="0" u="none" strike="noStrike" cap="none">
                 <a:solidFill>
                   <a:schemeClr val="dk1"/>
                 </a:solidFill>
-                <a:latin typeface="Calibri"/>
-                <a:ea typeface="Calibri"/>
-                <a:cs typeface="Calibri"/>
-                <a:sym typeface="Calibri"/>
+                <a:latin typeface="Calibri" panose="020F0502020204030204"/>
+                <a:ea typeface="Calibri" panose="020F0502020204030204"/>
+                <a:cs typeface="Calibri" panose="020F0502020204030204"/>
+                <a:sym typeface="Calibri" panose="020F0502020204030204"/>
               </a:defRPr>
             </a:lvl5pPr>
             <a:lvl6pPr marR="0" lvl="5" algn="l" rtl="0">
@@ -13539,16 +13412,16 @@
                 <a:srgbClr val="000000"/>
               </a:buClr>
               <a:buSzPts val="1400"/>
-              <a:buFont typeface="Arial"/>
+              <a:buFont typeface="Arial" panose="020B0604020202020204"/>
               <a:buNone/>
               <a:defRPr sz="1800" b="0" i="0" u="none" strike="noStrike" cap="none">
                 <a:solidFill>
                   <a:schemeClr val="dk1"/>
                 </a:solidFill>
-                <a:latin typeface="Calibri"/>
-                <a:ea typeface="Calibri"/>
-                <a:cs typeface="Calibri"/>
-                <a:sym typeface="Calibri"/>
+                <a:latin typeface="Calibri" panose="020F0502020204030204"/>
+                <a:ea typeface="Calibri" panose="020F0502020204030204"/>
+                <a:cs typeface="Calibri" panose="020F0502020204030204"/>
+                <a:sym typeface="Calibri" panose="020F0502020204030204"/>
               </a:defRPr>
             </a:lvl6pPr>
             <a:lvl7pPr marR="0" lvl="6" algn="l" rtl="0">
@@ -13565,16 +13438,16 @@
                 <a:srgbClr val="000000"/>
               </a:buClr>
               <a:buSzPts val="1400"/>
-              <a:buFont typeface="Arial"/>
+              <a:buFont typeface="Arial" panose="020B0604020202020204"/>
               <a:buNone/>
               <a:defRPr sz="1800" b="0" i="0" u="none" strike="noStrike" cap="none">
                 <a:solidFill>
                   <a:schemeClr val="dk1"/>
                 </a:solidFill>
-                <a:latin typeface="Calibri"/>
-                <a:ea typeface="Calibri"/>
-                <a:cs typeface="Calibri"/>
-                <a:sym typeface="Calibri"/>
+                <a:latin typeface="Calibri" panose="020F0502020204030204"/>
+                <a:ea typeface="Calibri" panose="020F0502020204030204"/>
+                <a:cs typeface="Calibri" panose="020F0502020204030204"/>
+                <a:sym typeface="Calibri" panose="020F0502020204030204"/>
               </a:defRPr>
             </a:lvl7pPr>
             <a:lvl8pPr marR="0" lvl="7" algn="l" rtl="0">
@@ -13591,16 +13464,16 @@
                 <a:srgbClr val="000000"/>
               </a:buClr>
               <a:buSzPts val="1400"/>
-              <a:buFont typeface="Arial"/>
+              <a:buFont typeface="Arial" panose="020B0604020202020204"/>
               <a:buNone/>
               <a:defRPr sz="1800" b="0" i="0" u="none" strike="noStrike" cap="none">
                 <a:solidFill>
                   <a:schemeClr val="dk1"/>
                 </a:solidFill>
-                <a:latin typeface="Calibri"/>
-                <a:ea typeface="Calibri"/>
-                <a:cs typeface="Calibri"/>
-                <a:sym typeface="Calibri"/>
+                <a:latin typeface="Calibri" panose="020F0502020204030204"/>
+                <a:ea typeface="Calibri" panose="020F0502020204030204"/>
+                <a:cs typeface="Calibri" panose="020F0502020204030204"/>
+                <a:sym typeface="Calibri" panose="020F0502020204030204"/>
               </a:defRPr>
             </a:lvl8pPr>
             <a:lvl9pPr marR="0" lvl="8" algn="l" rtl="0">
@@ -13617,22 +13490,20 @@
                 <a:srgbClr val="000000"/>
               </a:buClr>
               <a:buSzPts val="1400"/>
-              <a:buFont typeface="Arial"/>
+              <a:buFont typeface="Arial" panose="020B0604020202020204"/>
               <a:buNone/>
               <a:defRPr sz="1800" b="0" i="0" u="none" strike="noStrike" cap="none">
                 <a:solidFill>
                   <a:schemeClr val="dk1"/>
                 </a:solidFill>
-                <a:latin typeface="Calibri"/>
-                <a:ea typeface="Calibri"/>
-                <a:cs typeface="Calibri"/>
-                <a:sym typeface="Calibri"/>
+                <a:latin typeface="Calibri" panose="020F0502020204030204"/>
+                <a:ea typeface="Calibri" panose="020F0502020204030204"/>
+                <a:cs typeface="Calibri" panose="020F0502020204030204"/>
+                <a:sym typeface="Calibri" panose="020F0502020204030204"/>
               </a:defRPr>
             </a:lvl9pPr>
           </a:lstStyle>
-          <a:p>
-            <a:endParaRPr/>
-          </a:p>
+          <a:p/>
         </p:txBody>
       </p:sp>
       <p:sp>
@@ -13677,16 +13548,16 @@
                 <a:srgbClr val="000000"/>
               </a:buClr>
               <a:buSzPts val="1200"/>
-              <a:buFont typeface="Arial"/>
+              <a:buFont typeface="Arial" panose="020B0604020202020204"/>
               <a:buNone/>
               <a:defRPr sz="1200" b="0" i="0" u="none" strike="noStrike" cap="none">
                 <a:solidFill>
                   <a:srgbClr val="888888"/>
                 </a:solidFill>
-                <a:latin typeface="Calibri"/>
-                <a:ea typeface="Calibri"/>
-                <a:cs typeface="Calibri"/>
-                <a:sym typeface="Calibri"/>
+                <a:latin typeface="Calibri" panose="020F0502020204030204"/>
+                <a:ea typeface="Calibri" panose="020F0502020204030204"/>
+                <a:cs typeface="Calibri" panose="020F0502020204030204"/>
+                <a:sym typeface="Calibri" panose="020F0502020204030204"/>
               </a:defRPr>
             </a:lvl1pPr>
             <a:lvl2pPr marL="0" marR="0" lvl="1" indent="0" algn="r" rtl="0">
@@ -13703,16 +13574,16 @@
                 <a:srgbClr val="000000"/>
               </a:buClr>
               <a:buSzPts val="1200"/>
-              <a:buFont typeface="Arial"/>
+              <a:buFont typeface="Arial" panose="020B0604020202020204"/>
               <a:buNone/>
               <a:defRPr sz="1200" b="0" i="0" u="none" strike="noStrike" cap="none">
                 <a:solidFill>
                   <a:srgbClr val="888888"/>
                 </a:solidFill>
-                <a:latin typeface="Calibri"/>
-                <a:ea typeface="Calibri"/>
-                <a:cs typeface="Calibri"/>
-                <a:sym typeface="Calibri"/>
+                <a:latin typeface="Calibri" panose="020F0502020204030204"/>
+                <a:ea typeface="Calibri" panose="020F0502020204030204"/>
+                <a:cs typeface="Calibri" panose="020F0502020204030204"/>
+                <a:sym typeface="Calibri" panose="020F0502020204030204"/>
               </a:defRPr>
             </a:lvl2pPr>
             <a:lvl3pPr marL="0" marR="0" lvl="2" indent="0" algn="r" rtl="0">
@@ -13729,16 +13600,16 @@
                 <a:srgbClr val="000000"/>
               </a:buClr>
               <a:buSzPts val="1200"/>
-              <a:buFont typeface="Arial"/>
+              <a:buFont typeface="Arial" panose="020B0604020202020204"/>
               <a:buNone/>
               <a:defRPr sz="1200" b="0" i="0" u="none" strike="noStrike" cap="none">
                 <a:solidFill>
                   <a:srgbClr val="888888"/>
                 </a:solidFill>
-                <a:latin typeface="Calibri"/>
-                <a:ea typeface="Calibri"/>
-                <a:cs typeface="Calibri"/>
-                <a:sym typeface="Calibri"/>
+                <a:latin typeface="Calibri" panose="020F0502020204030204"/>
+                <a:ea typeface="Calibri" panose="020F0502020204030204"/>
+                <a:cs typeface="Calibri" panose="020F0502020204030204"/>
+                <a:sym typeface="Calibri" panose="020F0502020204030204"/>
               </a:defRPr>
             </a:lvl3pPr>
             <a:lvl4pPr marL="0" marR="0" lvl="3" indent="0" algn="r" rtl="0">
@@ -13755,16 +13626,16 @@
                 <a:srgbClr val="000000"/>
               </a:buClr>
               <a:buSzPts val="1200"/>
-              <a:buFont typeface="Arial"/>
+              <a:buFont typeface="Arial" panose="020B0604020202020204"/>
               <a:buNone/>
               <a:defRPr sz="1200" b="0" i="0" u="none" strike="noStrike" cap="none">
                 <a:solidFill>
                   <a:srgbClr val="888888"/>
                 </a:solidFill>
-                <a:latin typeface="Calibri"/>
-                <a:ea typeface="Calibri"/>
-                <a:cs typeface="Calibri"/>
-                <a:sym typeface="Calibri"/>
+                <a:latin typeface="Calibri" panose="020F0502020204030204"/>
+                <a:ea typeface="Calibri" panose="020F0502020204030204"/>
+                <a:cs typeface="Calibri" panose="020F0502020204030204"/>
+                <a:sym typeface="Calibri" panose="020F0502020204030204"/>
               </a:defRPr>
             </a:lvl4pPr>
             <a:lvl5pPr marL="0" marR="0" lvl="4" indent="0" algn="r" rtl="0">
@@ -13781,16 +13652,16 @@
                 <a:srgbClr val="000000"/>
               </a:buClr>
               <a:buSzPts val="1200"/>
-              <a:buFont typeface="Arial"/>
+              <a:buFont typeface="Arial" panose="020B0604020202020204"/>
               <a:buNone/>
               <a:defRPr sz="1200" b="0" i="0" u="none" strike="noStrike" cap="none">
                 <a:solidFill>
                   <a:srgbClr val="888888"/>
                 </a:solidFill>
-                <a:latin typeface="Calibri"/>
-                <a:ea typeface="Calibri"/>
-                <a:cs typeface="Calibri"/>
-                <a:sym typeface="Calibri"/>
+                <a:latin typeface="Calibri" panose="020F0502020204030204"/>
+                <a:ea typeface="Calibri" panose="020F0502020204030204"/>
+                <a:cs typeface="Calibri" panose="020F0502020204030204"/>
+                <a:sym typeface="Calibri" panose="020F0502020204030204"/>
               </a:defRPr>
             </a:lvl5pPr>
             <a:lvl6pPr marL="0" marR="0" lvl="5" indent="0" algn="r" rtl="0">
@@ -13807,16 +13678,16 @@
                 <a:srgbClr val="000000"/>
               </a:buClr>
               <a:buSzPts val="1200"/>
-              <a:buFont typeface="Arial"/>
+              <a:buFont typeface="Arial" panose="020B0604020202020204"/>
               <a:buNone/>
               <a:defRPr sz="1200" b="0" i="0" u="none" strike="noStrike" cap="none">
                 <a:solidFill>
                   <a:srgbClr val="888888"/>
                 </a:solidFill>
-                <a:latin typeface="Calibri"/>
-                <a:ea typeface="Calibri"/>
-                <a:cs typeface="Calibri"/>
-                <a:sym typeface="Calibri"/>
+                <a:latin typeface="Calibri" panose="020F0502020204030204"/>
+                <a:ea typeface="Calibri" panose="020F0502020204030204"/>
+                <a:cs typeface="Calibri" panose="020F0502020204030204"/>
+                <a:sym typeface="Calibri" panose="020F0502020204030204"/>
               </a:defRPr>
             </a:lvl6pPr>
             <a:lvl7pPr marL="0" marR="0" lvl="6" indent="0" algn="r" rtl="0">
@@ -13833,16 +13704,16 @@
                 <a:srgbClr val="000000"/>
               </a:buClr>
               <a:buSzPts val="1200"/>
-              <a:buFont typeface="Arial"/>
+              <a:buFont typeface="Arial" panose="020B0604020202020204"/>
               <a:buNone/>
               <a:defRPr sz="1200" b="0" i="0" u="none" strike="noStrike" cap="none">
                 <a:solidFill>
                   <a:srgbClr val="888888"/>
                 </a:solidFill>
-                <a:latin typeface="Calibri"/>
-                <a:ea typeface="Calibri"/>
-                <a:cs typeface="Calibri"/>
-                <a:sym typeface="Calibri"/>
+                <a:latin typeface="Calibri" panose="020F0502020204030204"/>
+                <a:ea typeface="Calibri" panose="020F0502020204030204"/>
+                <a:cs typeface="Calibri" panose="020F0502020204030204"/>
+                <a:sym typeface="Calibri" panose="020F0502020204030204"/>
               </a:defRPr>
             </a:lvl7pPr>
             <a:lvl8pPr marL="0" marR="0" lvl="7" indent="0" algn="r" rtl="0">
@@ -13859,16 +13730,16 @@
                 <a:srgbClr val="000000"/>
               </a:buClr>
               <a:buSzPts val="1200"/>
-              <a:buFont typeface="Arial"/>
+              <a:buFont typeface="Arial" panose="020B0604020202020204"/>
               <a:buNone/>
               <a:defRPr sz="1200" b="0" i="0" u="none" strike="noStrike" cap="none">
                 <a:solidFill>
                   <a:srgbClr val="888888"/>
                 </a:solidFill>
-                <a:latin typeface="Calibri"/>
-                <a:ea typeface="Calibri"/>
-                <a:cs typeface="Calibri"/>
-                <a:sym typeface="Calibri"/>
+                <a:latin typeface="Calibri" panose="020F0502020204030204"/>
+                <a:ea typeface="Calibri" panose="020F0502020204030204"/>
+                <a:cs typeface="Calibri" panose="020F0502020204030204"/>
+                <a:sym typeface="Calibri" panose="020F0502020204030204"/>
               </a:defRPr>
             </a:lvl8pPr>
             <a:lvl9pPr marL="0" marR="0" lvl="8" indent="0" algn="r" rtl="0">
@@ -13885,16 +13756,16 @@
                 <a:srgbClr val="000000"/>
               </a:buClr>
               <a:buSzPts val="1200"/>
-              <a:buFont typeface="Arial"/>
+              <a:buFont typeface="Arial" panose="020B0604020202020204"/>
               <a:buNone/>
               <a:defRPr sz="1200" b="0" i="0" u="none" strike="noStrike" cap="none">
                 <a:solidFill>
                   <a:srgbClr val="888888"/>
                 </a:solidFill>
-                <a:latin typeface="Calibri"/>
-                <a:ea typeface="Calibri"/>
-                <a:cs typeface="Calibri"/>
-                <a:sym typeface="Calibri"/>
+                <a:latin typeface="Calibri" panose="020F0502020204030204"/>
+                <a:ea typeface="Calibri" panose="020F0502020204030204"/>
+                <a:cs typeface="Calibri" panose="020F0502020204030204"/>
+                <a:sym typeface="Calibri" panose="020F0502020204030204"/>
               </a:defRPr>
             </a:lvl9pPr>
           </a:lstStyle>
@@ -13910,9 +13781,8 @@
             </a:pPr>
             <a:fld id="{00000000-1234-1234-1234-123412341234}" type="slidenum">
               <a:rPr lang="en-US"/>
-              <a:t>‹#›</a:t>
             </a:fld>
-            <a:endParaRPr/>
+            <a:endParaRPr lang="en-US"/>
           </a:p>
         </p:txBody>
       </p:sp>
@@ -13920,8 +13790,8 @@
   </p:cSld>
   <p:clrMap bg1="lt1" tx1="dk1" bg2="dk2" tx2="lt2" accent1="accent1" accent2="accent2" accent3="accent3" accent4="accent4" accent5="accent5" accent6="accent6" hlink="hlink" folHlink="folHlink"/>
   <p:sldLayoutIdLst>
-    <p:sldLayoutId id="2147483648" r:id="rId1"/>
-    <p:sldLayoutId id="2147483649" r:id="rId2"/>
+    <p:sldLayoutId id="2147483649" r:id="rId1"/>
+    <p:sldLayoutId id="2147483650" r:id="rId2"/>
     <p:sldLayoutId id="2147483651" r:id="rId3"/>
     <p:sldLayoutId id="2147483652" r:id="rId4"/>
     <p:sldLayoutId id="2147483653" r:id="rId5"/>
@@ -13958,15 +13828,15 @@
         <a:buClr>
           <a:srgbClr val="000000"/>
         </a:buClr>
-        <a:buFont typeface="Arial"/>
+        <a:buFont typeface="Arial" panose="020B0604020202020204"/>
         <a:defRPr sz="1400" b="0" i="0" u="none" strike="noStrike" cap="none">
           <a:solidFill>
             <a:srgbClr val="000000"/>
           </a:solidFill>
-          <a:latin typeface="Arial"/>
-          <a:ea typeface="Arial"/>
-          <a:cs typeface="Arial"/>
-          <a:sym typeface="Arial"/>
+          <a:latin typeface="Arial" panose="020B0604020202020204"/>
+          <a:ea typeface="Arial" panose="020B0604020202020204"/>
+          <a:cs typeface="Arial" panose="020B0604020202020204"/>
+          <a:sym typeface="Arial" panose="020B0604020202020204"/>
         </a:defRPr>
       </a:lvl1pPr>
       <a:lvl2pPr marR="0" lvl="1" algn="l" rtl="0">
@@ -13982,15 +13852,15 @@
         <a:buClr>
           <a:srgbClr val="000000"/>
         </a:buClr>
-        <a:buFont typeface="Arial"/>
+        <a:buFont typeface="Arial" panose="020B0604020202020204"/>
         <a:defRPr sz="1400" b="0" i="0" u="none" strike="noStrike" cap="none">
           <a:solidFill>
             <a:srgbClr val="000000"/>
           </a:solidFill>
-          <a:latin typeface="Arial"/>
-          <a:ea typeface="Arial"/>
-          <a:cs typeface="Arial"/>
-          <a:sym typeface="Arial"/>
+          <a:latin typeface="Arial" panose="020B0604020202020204"/>
+          <a:ea typeface="Arial" panose="020B0604020202020204"/>
+          <a:cs typeface="Arial" panose="020B0604020202020204"/>
+          <a:sym typeface="Arial" panose="020B0604020202020204"/>
         </a:defRPr>
       </a:lvl2pPr>
       <a:lvl3pPr marR="0" lvl="2" algn="l" rtl="0">
@@ -14006,15 +13876,15 @@
         <a:buClr>
           <a:srgbClr val="000000"/>
         </a:buClr>
-        <a:buFont typeface="Arial"/>
+        <a:buFont typeface="Arial" panose="020B0604020202020204"/>
         <a:defRPr sz="1400" b="0" i="0" u="none" strike="noStrike" cap="none">
           <a:solidFill>
             <a:srgbClr val="000000"/>
           </a:solidFill>
-          <a:latin typeface="Arial"/>
-          <a:ea typeface="Arial"/>
-          <a:cs typeface="Arial"/>
-          <a:sym typeface="Arial"/>
+          <a:latin typeface="Arial" panose="020B0604020202020204"/>
+          <a:ea typeface="Arial" panose="020B0604020202020204"/>
+          <a:cs typeface="Arial" panose="020B0604020202020204"/>
+          <a:sym typeface="Arial" panose="020B0604020202020204"/>
         </a:defRPr>
       </a:lvl3pPr>
       <a:lvl4pPr marR="0" lvl="3" algn="l" rtl="0">
@@ -14030,15 +13900,15 @@
         <a:buClr>
           <a:srgbClr val="000000"/>
         </a:buClr>
-        <a:buFont typeface="Arial"/>
+        <a:buFont typeface="Arial" panose="020B0604020202020204"/>
         <a:defRPr sz="1400" b="0" i="0" u="none" strike="noStrike" cap="none">
           <a:solidFill>
             <a:srgbClr val="000000"/>
           </a:solidFill>
-          <a:latin typeface="Arial"/>
-          <a:ea typeface="Arial"/>
-          <a:cs typeface="Arial"/>
-          <a:sym typeface="Arial"/>
+          <a:latin typeface="Arial" panose="020B0604020202020204"/>
+          <a:ea typeface="Arial" panose="020B0604020202020204"/>
+          <a:cs typeface="Arial" panose="020B0604020202020204"/>
+          <a:sym typeface="Arial" panose="020B0604020202020204"/>
         </a:defRPr>
       </a:lvl4pPr>
       <a:lvl5pPr marR="0" lvl="4" algn="l" rtl="0">
@@ -14054,15 +13924,15 @@
         <a:buClr>
           <a:srgbClr val="000000"/>
         </a:buClr>
-        <a:buFont typeface="Arial"/>
+        <a:buFont typeface="Arial" panose="020B0604020202020204"/>
         <a:defRPr sz="1400" b="0" i="0" u="none" strike="noStrike" cap="none">
           <a:solidFill>
             <a:srgbClr val="000000"/>
           </a:solidFill>
-          <a:latin typeface="Arial"/>
-          <a:ea typeface="Arial"/>
-          <a:cs typeface="Arial"/>
-          <a:sym typeface="Arial"/>
+          <a:latin typeface="Arial" panose="020B0604020202020204"/>
+          <a:ea typeface="Arial" panose="020B0604020202020204"/>
+          <a:cs typeface="Arial" panose="020B0604020202020204"/>
+          <a:sym typeface="Arial" panose="020B0604020202020204"/>
         </a:defRPr>
       </a:lvl5pPr>
       <a:lvl6pPr marR="0" lvl="5" algn="l" rtl="0">
@@ -14078,15 +13948,15 @@
         <a:buClr>
           <a:srgbClr val="000000"/>
         </a:buClr>
-        <a:buFont typeface="Arial"/>
+        <a:buFont typeface="Arial" panose="020B0604020202020204"/>
         <a:defRPr sz="1400" b="0" i="0" u="none" strike="noStrike" cap="none">
           <a:solidFill>
             <a:srgbClr val="000000"/>
           </a:solidFill>
-          <a:latin typeface="Arial"/>
-          <a:ea typeface="Arial"/>
-          <a:cs typeface="Arial"/>
-          <a:sym typeface="Arial"/>
+          <a:latin typeface="Arial" panose="020B0604020202020204"/>
+          <a:ea typeface="Arial" panose="020B0604020202020204"/>
+          <a:cs typeface="Arial" panose="020B0604020202020204"/>
+          <a:sym typeface="Arial" panose="020B0604020202020204"/>
         </a:defRPr>
       </a:lvl6pPr>
       <a:lvl7pPr marR="0" lvl="6" algn="l" rtl="0">
@@ -14102,15 +13972,15 @@
         <a:buClr>
           <a:srgbClr val="000000"/>
         </a:buClr>
-        <a:buFont typeface="Arial"/>
+        <a:buFont typeface="Arial" panose="020B0604020202020204"/>
         <a:defRPr sz="1400" b="0" i="0" u="none" strike="noStrike" cap="none">
           <a:solidFill>
             <a:srgbClr val="000000"/>
           </a:solidFill>
-          <a:latin typeface="Arial"/>
-          <a:ea typeface="Arial"/>
-          <a:cs typeface="Arial"/>
-          <a:sym typeface="Arial"/>
+          <a:latin typeface="Arial" panose="020B0604020202020204"/>
+          <a:ea typeface="Arial" panose="020B0604020202020204"/>
+          <a:cs typeface="Arial" panose="020B0604020202020204"/>
+          <a:sym typeface="Arial" panose="020B0604020202020204"/>
         </a:defRPr>
       </a:lvl7pPr>
       <a:lvl8pPr marR="0" lvl="7" algn="l" rtl="0">
@@ -14126,15 +13996,15 @@
         <a:buClr>
           <a:srgbClr val="000000"/>
         </a:buClr>
-        <a:buFont typeface="Arial"/>
+        <a:buFont typeface="Arial" panose="020B0604020202020204"/>
         <a:defRPr sz="1400" b="0" i="0" u="none" strike="noStrike" cap="none">
           <a:solidFill>
             <a:srgbClr val="000000"/>
           </a:solidFill>
-          <a:latin typeface="Arial"/>
-          <a:ea typeface="Arial"/>
-          <a:cs typeface="Arial"/>
-          <a:sym typeface="Arial"/>
+          <a:latin typeface="Arial" panose="020B0604020202020204"/>
+          <a:ea typeface="Arial" panose="020B0604020202020204"/>
+          <a:cs typeface="Arial" panose="020B0604020202020204"/>
+          <a:sym typeface="Arial" panose="020B0604020202020204"/>
         </a:defRPr>
       </a:lvl8pPr>
       <a:lvl9pPr marR="0" lvl="8" algn="l" rtl="0">
@@ -14150,15 +14020,15 @@
         <a:buClr>
           <a:srgbClr val="000000"/>
         </a:buClr>
-        <a:buFont typeface="Arial"/>
+        <a:buFont typeface="Arial" panose="020B0604020202020204"/>
         <a:defRPr sz="1400" b="0" i="0" u="none" strike="noStrike" cap="none">
           <a:solidFill>
             <a:srgbClr val="000000"/>
           </a:solidFill>
-          <a:latin typeface="Arial"/>
-          <a:ea typeface="Arial"/>
-          <a:cs typeface="Arial"/>
-          <a:sym typeface="Arial"/>
+          <a:latin typeface="Arial" panose="020B0604020202020204"/>
+          <a:ea typeface="Arial" panose="020B0604020202020204"/>
+          <a:cs typeface="Arial" panose="020B0604020202020204"/>
+          <a:sym typeface="Arial" panose="020B0604020202020204"/>
         </a:defRPr>
       </a:lvl9pPr>
     </p:titleStyle>
@@ -14187,15 +14057,15 @@
         <a:buClr>
           <a:srgbClr val="000000"/>
         </a:buClr>
-        <a:buFont typeface="Arial"/>
+        <a:buFont typeface="Arial" panose="020B0604020202020204"/>
         <a:defRPr sz="1400" b="0" i="0" u="none" strike="noStrike" cap="none">
           <a:solidFill>
             <a:srgbClr val="000000"/>
           </a:solidFill>
-          <a:latin typeface="Arial"/>
-          <a:ea typeface="Arial"/>
-          <a:cs typeface="Arial"/>
-          <a:sym typeface="Arial"/>
+          <a:latin typeface="Arial" panose="020B0604020202020204"/>
+          <a:ea typeface="Arial" panose="020B0604020202020204"/>
+          <a:cs typeface="Arial" panose="020B0604020202020204"/>
+          <a:sym typeface="Arial" panose="020B0604020202020204"/>
         </a:defRPr>
       </a:lvl1pPr>
       <a:lvl2pPr marR="0" lvl="1" algn="l" rtl="0">
@@ -14211,15 +14081,15 @@
         <a:buClr>
           <a:srgbClr val="000000"/>
         </a:buClr>
-        <a:buFont typeface="Arial"/>
+        <a:buFont typeface="Arial" panose="020B0604020202020204"/>
         <a:defRPr sz="1400" b="0" i="0" u="none" strike="noStrike" cap="none">
           <a:solidFill>
             <a:srgbClr val="000000"/>
           </a:solidFill>
-          <a:latin typeface="Arial"/>
-          <a:ea typeface="Arial"/>
-          <a:cs typeface="Arial"/>
-          <a:sym typeface="Arial"/>
+          <a:latin typeface="Arial" panose="020B0604020202020204"/>
+          <a:ea typeface="Arial" panose="020B0604020202020204"/>
+          <a:cs typeface="Arial" panose="020B0604020202020204"/>
+          <a:sym typeface="Arial" panose="020B0604020202020204"/>
         </a:defRPr>
       </a:lvl2pPr>
       <a:lvl3pPr marR="0" lvl="2" algn="l" rtl="0">
@@ -14235,15 +14105,15 @@
         <a:buClr>
           <a:srgbClr val="000000"/>
         </a:buClr>
-        <a:buFont typeface="Arial"/>
+        <a:buFont typeface="Arial" panose="020B0604020202020204"/>
         <a:defRPr sz="1400" b="0" i="0" u="none" strike="noStrike" cap="none">
           <a:solidFill>
             <a:srgbClr val="000000"/>
           </a:solidFill>
-          <a:latin typeface="Arial"/>
-          <a:ea typeface="Arial"/>
-          <a:cs typeface="Arial"/>
-          <a:sym typeface="Arial"/>
+          <a:latin typeface="Arial" panose="020B0604020202020204"/>
+          <a:ea typeface="Arial" panose="020B0604020202020204"/>
+          <a:cs typeface="Arial" panose="020B0604020202020204"/>
+          <a:sym typeface="Arial" panose="020B0604020202020204"/>
         </a:defRPr>
       </a:lvl3pPr>
       <a:lvl4pPr marR="0" lvl="3" algn="l" rtl="0">
@@ -14259,15 +14129,15 @@
         <a:buClr>
           <a:srgbClr val="000000"/>
         </a:buClr>
-        <a:buFont typeface="Arial"/>
+        <a:buFont typeface="Arial" panose="020B0604020202020204"/>
         <a:defRPr sz="1400" b="0" i="0" u="none" strike="noStrike" cap="none">
           <a:solidFill>
             <a:srgbClr val="000000"/>
           </a:solidFill>
-          <a:latin typeface="Arial"/>
-          <a:ea typeface="Arial"/>
-          <a:cs typeface="Arial"/>
-          <a:sym typeface="Arial"/>
+          <a:latin typeface="Arial" panose="020B0604020202020204"/>
+          <a:ea typeface="Arial" panose="020B0604020202020204"/>
+          <a:cs typeface="Arial" panose="020B0604020202020204"/>
+          <a:sym typeface="Arial" panose="020B0604020202020204"/>
         </a:defRPr>
       </a:lvl4pPr>
       <a:lvl5pPr marR="0" lvl="4" algn="l" rtl="0">
@@ -14283,15 +14153,15 @@
         <a:buClr>
           <a:srgbClr val="000000"/>
         </a:buClr>
-        <a:buFont typeface="Arial"/>
+        <a:buFont typeface="Arial" panose="020B0604020202020204"/>
         <a:defRPr sz="1400" b="0" i="0" u="none" strike="noStrike" cap="none">
           <a:solidFill>
             <a:srgbClr val="000000"/>
           </a:solidFill>
-          <a:latin typeface="Arial"/>
-          <a:ea typeface="Arial"/>
-          <a:cs typeface="Arial"/>
-          <a:sym typeface="Arial"/>
+          <a:latin typeface="Arial" panose="020B0604020202020204"/>
+          <a:ea typeface="Arial" panose="020B0604020202020204"/>
+          <a:cs typeface="Arial" panose="020B0604020202020204"/>
+          <a:sym typeface="Arial" panose="020B0604020202020204"/>
         </a:defRPr>
       </a:lvl5pPr>
       <a:lvl6pPr marR="0" lvl="5" algn="l" rtl="0">
@@ -14307,15 +14177,15 @@
         <a:buClr>
           <a:srgbClr val="000000"/>
         </a:buClr>
-        <a:buFont typeface="Arial"/>
+        <a:buFont typeface="Arial" panose="020B0604020202020204"/>
         <a:defRPr sz="1400" b="0" i="0" u="none" strike="noStrike" cap="none">
           <a:solidFill>
             <a:srgbClr val="000000"/>
           </a:solidFill>
-          <a:latin typeface="Arial"/>
-          <a:ea typeface="Arial"/>
-          <a:cs typeface="Arial"/>
-          <a:sym typeface="Arial"/>
+          <a:latin typeface="Arial" panose="020B0604020202020204"/>
+          <a:ea typeface="Arial" panose="020B0604020202020204"/>
+          <a:cs typeface="Arial" panose="020B0604020202020204"/>
+          <a:sym typeface="Arial" panose="020B0604020202020204"/>
         </a:defRPr>
       </a:lvl6pPr>
       <a:lvl7pPr marR="0" lvl="6" algn="l" rtl="0">
@@ -14331,15 +14201,15 @@
         <a:buClr>
           <a:srgbClr val="000000"/>
         </a:buClr>
-        <a:buFont typeface="Arial"/>
+        <a:buFont typeface="Arial" panose="020B0604020202020204"/>
         <a:defRPr sz="1400" b="0" i="0" u="none" strike="noStrike" cap="none">
           <a:solidFill>
             <a:srgbClr val="000000"/>
           </a:solidFill>
-          <a:latin typeface="Arial"/>
-          <a:ea typeface="Arial"/>
-          <a:cs typeface="Arial"/>
-          <a:sym typeface="Arial"/>
+          <a:latin typeface="Arial" panose="020B0604020202020204"/>
+          <a:ea typeface="Arial" panose="020B0604020202020204"/>
+          <a:cs typeface="Arial" panose="020B0604020202020204"/>
+          <a:sym typeface="Arial" panose="020B0604020202020204"/>
         </a:defRPr>
       </a:lvl7pPr>
       <a:lvl8pPr marR="0" lvl="7" algn="l" rtl="0">
@@ -14355,15 +14225,15 @@
         <a:buClr>
           <a:srgbClr val="000000"/>
         </a:buClr>
-        <a:buFont typeface="Arial"/>
+        <a:buFont typeface="Arial" panose="020B0604020202020204"/>
         <a:defRPr sz="1400" b="0" i="0" u="none" strike="noStrike" cap="none">
           <a:solidFill>
             <a:srgbClr val="000000"/>
           </a:solidFill>
-          <a:latin typeface="Arial"/>
-          <a:ea typeface="Arial"/>
-          <a:cs typeface="Arial"/>
-          <a:sym typeface="Arial"/>
+          <a:latin typeface="Arial" panose="020B0604020202020204"/>
+          <a:ea typeface="Arial" panose="020B0604020202020204"/>
+          <a:cs typeface="Arial" panose="020B0604020202020204"/>
+          <a:sym typeface="Arial" panose="020B0604020202020204"/>
         </a:defRPr>
       </a:lvl8pPr>
       <a:lvl9pPr marR="0" lvl="8" algn="l" rtl="0">
@@ -14379,15 +14249,15 @@
         <a:buClr>
           <a:srgbClr val="000000"/>
         </a:buClr>
-        <a:buFont typeface="Arial"/>
+        <a:buFont typeface="Arial" panose="020B0604020202020204"/>
         <a:defRPr sz="1400" b="0" i="0" u="none" strike="noStrike" cap="none">
           <a:solidFill>
             <a:srgbClr val="000000"/>
           </a:solidFill>
-          <a:latin typeface="Arial"/>
-          <a:ea typeface="Arial"/>
-          <a:cs typeface="Arial"/>
-          <a:sym typeface="Arial"/>
+          <a:latin typeface="Arial" panose="020B0604020202020204"/>
+          <a:ea typeface="Arial" panose="020B0604020202020204"/>
+          <a:cs typeface="Arial" panose="020B0604020202020204"/>
+          <a:sym typeface="Arial" panose="020B0604020202020204"/>
         </a:defRPr>
       </a:lvl9pPr>
     </p:bodyStyle>
@@ -14416,15 +14286,15 @@
         <a:buClr>
           <a:srgbClr val="000000"/>
         </a:buClr>
-        <a:buFont typeface="Arial"/>
+        <a:buFont typeface="Arial" panose="020B0604020202020204"/>
         <a:defRPr sz="1400" b="0" i="0" u="none" strike="noStrike" cap="none">
           <a:solidFill>
             <a:srgbClr val="000000"/>
           </a:solidFill>
-          <a:latin typeface="Arial"/>
-          <a:ea typeface="Arial"/>
-          <a:cs typeface="Arial"/>
-          <a:sym typeface="Arial"/>
+          <a:latin typeface="Arial" panose="020B0604020202020204"/>
+          <a:ea typeface="Arial" panose="020B0604020202020204"/>
+          <a:cs typeface="Arial" panose="020B0604020202020204"/>
+          <a:sym typeface="Arial" panose="020B0604020202020204"/>
         </a:defRPr>
       </a:lvl1pPr>
       <a:lvl2pPr marR="0" lvl="1" algn="l" rtl="0">
@@ -14440,15 +14310,15 @@
         <a:buClr>
           <a:srgbClr val="000000"/>
         </a:buClr>
-        <a:buFont typeface="Arial"/>
+        <a:buFont typeface="Arial" panose="020B0604020202020204"/>
         <a:defRPr sz="1400" b="0" i="0" u="none" strike="noStrike" cap="none">
           <a:solidFill>
             <a:srgbClr val="000000"/>
           </a:solidFill>
-          <a:latin typeface="Arial"/>
-          <a:ea typeface="Arial"/>
-          <a:cs typeface="Arial"/>
-          <a:sym typeface="Arial"/>
+          <a:latin typeface="Arial" panose="020B0604020202020204"/>
+          <a:ea typeface="Arial" panose="020B0604020202020204"/>
+          <a:cs typeface="Arial" panose="020B0604020202020204"/>
+          <a:sym typeface="Arial" panose="020B0604020202020204"/>
         </a:defRPr>
       </a:lvl2pPr>
       <a:lvl3pPr marR="0" lvl="2" algn="l" rtl="0">
@@ -14464,15 +14334,15 @@
         <a:buClr>
           <a:srgbClr val="000000"/>
         </a:buClr>
-        <a:buFont typeface="Arial"/>
+        <a:buFont typeface="Arial" panose="020B0604020202020204"/>
         <a:defRPr sz="1400" b="0" i="0" u="none" strike="noStrike" cap="none">
           <a:solidFill>
             <a:srgbClr val="000000"/>
           </a:solidFill>
-          <a:latin typeface="Arial"/>
-          <a:ea typeface="Arial"/>
-          <a:cs typeface="Arial"/>
-          <a:sym typeface="Arial"/>
+          <a:latin typeface="Arial" panose="020B0604020202020204"/>
+          <a:ea typeface="Arial" panose="020B0604020202020204"/>
+          <a:cs typeface="Arial" panose="020B0604020202020204"/>
+          <a:sym typeface="Arial" panose="020B0604020202020204"/>
         </a:defRPr>
       </a:lvl3pPr>
       <a:lvl4pPr marR="0" lvl="3" algn="l" rtl="0">
@@ -14488,15 +14358,15 @@
         <a:buClr>
           <a:srgbClr val="000000"/>
         </a:buClr>
-        <a:buFont typeface="Arial"/>
+        <a:buFont typeface="Arial" panose="020B0604020202020204"/>
         <a:defRPr sz="1400" b="0" i="0" u="none" strike="noStrike" cap="none">
           <a:solidFill>
             <a:srgbClr val="000000"/>
           </a:solidFill>
-          <a:latin typeface="Arial"/>
-          <a:ea typeface="Arial"/>
-          <a:cs typeface="Arial"/>
-          <a:sym typeface="Arial"/>
+          <a:latin typeface="Arial" panose="020B0604020202020204"/>
+          <a:ea typeface="Arial" panose="020B0604020202020204"/>
+          <a:cs typeface="Arial" panose="020B0604020202020204"/>
+          <a:sym typeface="Arial" panose="020B0604020202020204"/>
         </a:defRPr>
       </a:lvl4pPr>
       <a:lvl5pPr marR="0" lvl="4" algn="l" rtl="0">
@@ -14512,15 +14382,15 @@
         <a:buClr>
           <a:srgbClr val="000000"/>
         </a:buClr>
-        <a:buFont typeface="Arial"/>
+        <a:buFont typeface="Arial" panose="020B0604020202020204"/>
         <a:defRPr sz="1400" b="0" i="0" u="none" strike="noStrike" cap="none">
           <a:solidFill>
             <a:srgbClr val="000000"/>
           </a:solidFill>
-          <a:latin typeface="Arial"/>
-          <a:ea typeface="Arial"/>
-          <a:cs typeface="Arial"/>
-          <a:sym typeface="Arial"/>
+          <a:latin typeface="Arial" panose="020B0604020202020204"/>
+          <a:ea typeface="Arial" panose="020B0604020202020204"/>
+          <a:cs typeface="Arial" panose="020B0604020202020204"/>
+          <a:sym typeface="Arial" panose="020B0604020202020204"/>
         </a:defRPr>
       </a:lvl5pPr>
       <a:lvl6pPr marR="0" lvl="5" algn="l" rtl="0">
@@ -14536,15 +14406,15 @@
         <a:buClr>
           <a:srgbClr val="000000"/>
         </a:buClr>
-        <a:buFont typeface="Arial"/>
+        <a:buFont typeface="Arial" panose="020B0604020202020204"/>
         <a:defRPr sz="1400" b="0" i="0" u="none" strike="noStrike" cap="none">
           <a:solidFill>
             <a:srgbClr val="000000"/>
           </a:solidFill>
-          <a:latin typeface="Arial"/>
-          <a:ea typeface="Arial"/>
-          <a:cs typeface="Arial"/>
-          <a:sym typeface="Arial"/>
+          <a:latin typeface="Arial" panose="020B0604020202020204"/>
+          <a:ea typeface="Arial" panose="020B0604020202020204"/>
+          <a:cs typeface="Arial" panose="020B0604020202020204"/>
+          <a:sym typeface="Arial" panose="020B0604020202020204"/>
         </a:defRPr>
       </a:lvl6pPr>
       <a:lvl7pPr marR="0" lvl="6" algn="l" rtl="0">
@@ -14560,15 +14430,15 @@
         <a:buClr>
           <a:srgbClr val="000000"/>
         </a:buClr>
-        <a:buFont typeface="Arial"/>
+        <a:buFont typeface="Arial" panose="020B0604020202020204"/>
         <a:defRPr sz="1400" b="0" i="0" u="none" strike="noStrike" cap="none">
           <a:solidFill>
             <a:srgbClr val="000000"/>
           </a:solidFill>
-          <a:latin typeface="Arial"/>
-          <a:ea typeface="Arial"/>
-          <a:cs typeface="Arial"/>
-          <a:sym typeface="Arial"/>
+          <a:latin typeface="Arial" panose="020B0604020202020204"/>
+          <a:ea typeface="Arial" panose="020B0604020202020204"/>
+          <a:cs typeface="Arial" panose="020B0604020202020204"/>
+          <a:sym typeface="Arial" panose="020B0604020202020204"/>
         </a:defRPr>
       </a:lvl7pPr>
       <a:lvl8pPr marR="0" lvl="7" algn="l" rtl="0">
@@ -14584,15 +14454,15 @@
         <a:buClr>
           <a:srgbClr val="000000"/>
         </a:buClr>
-        <a:buFont typeface="Arial"/>
+        <a:buFont typeface="Arial" panose="020B0604020202020204"/>
         <a:defRPr sz="1400" b="0" i="0" u="none" strike="noStrike" cap="none">
           <a:solidFill>
             <a:srgbClr val="000000"/>
           </a:solidFill>
-          <a:latin typeface="Arial"/>
-          <a:ea typeface="Arial"/>
-          <a:cs typeface="Arial"/>
-          <a:sym typeface="Arial"/>
+          <a:latin typeface="Arial" panose="020B0604020202020204"/>
+          <a:ea typeface="Arial" panose="020B0604020202020204"/>
+          <a:cs typeface="Arial" panose="020B0604020202020204"/>
+          <a:sym typeface="Arial" panose="020B0604020202020204"/>
         </a:defRPr>
       </a:lvl8pPr>
       <a:lvl9pPr marR="0" lvl="8" algn="l" rtl="0">
@@ -14608,15 +14478,15 @@
         <a:buClr>
           <a:srgbClr val="000000"/>
         </a:buClr>
-        <a:buFont typeface="Arial"/>
+        <a:buFont typeface="Arial" panose="020B0604020202020204"/>
         <a:defRPr sz="1400" b="0" i="0" u="none" strike="noStrike" cap="none">
           <a:solidFill>
             <a:srgbClr val="000000"/>
           </a:solidFill>
-          <a:latin typeface="Arial"/>
-          <a:ea typeface="Arial"/>
-          <a:cs typeface="Arial"/>
-          <a:sym typeface="Arial"/>
+          <a:latin typeface="Arial" panose="020B0604020202020204"/>
+          <a:ea typeface="Arial" panose="020B0604020202020204"/>
+          <a:cs typeface="Arial" panose="020B0604020202020204"/>
+          <a:sym typeface="Arial" panose="020B0604020202020204"/>
         </a:defRPr>
       </a:lvl9pPr>
     </p:otherStyle>
@@ -14684,7 +14554,7 @@
                 <a:schemeClr val="dk1"/>
               </a:buClr>
               <a:buSzPts val="4400"/>
-              <a:buFont typeface="Calibri"/>
+              <a:buFont typeface="Calibri" panose="020F0502020204030204"/>
               <a:buNone/>
             </a:pPr>
             <a:r>
@@ -14824,55 +14694,59 @@
               <a:rPr lang="en-US" dirty="0" smtClean="0"/>
               <a:t>limits.</a:t>
             </a:r>
-          </a:p>
-          <a:p>
-            <a:r>
-              <a:rPr lang="en-US" dirty="0" smtClean="0"/>
-              <a:t>In </a:t>
-            </a:r>
-            <a:r>
-              <a:rPr lang="en-US" dirty="0"/>
-              <a:t>this group, tests are designed to verify that the system can scale up to its engineering </a:t>
-            </a:r>
-            <a:r>
-              <a:rPr lang="en-US" dirty="0" smtClean="0"/>
-              <a:t>limits.</a:t>
-            </a:r>
-          </a:p>
-          <a:p>
-            <a:r>
-              <a:rPr lang="en-US" dirty="0" smtClean="0"/>
-              <a:t>A </a:t>
-            </a:r>
-            <a:r>
-              <a:rPr lang="en-US" dirty="0"/>
-              <a:t>system which works acceptably at one level of demand may not scale up to another </a:t>
-            </a:r>
-            <a:r>
-              <a:rPr lang="en-US" dirty="0" smtClean="0"/>
-              <a:t>level.</a:t>
-            </a:r>
-          </a:p>
-          <a:p>
-            <a:r>
-              <a:rPr lang="en-US" dirty="0" smtClean="0"/>
-              <a:t>Scaling </a:t>
-            </a:r>
-            <a:r>
-              <a:rPr lang="en-US" dirty="0"/>
-              <a:t>tests are conducted to ensure that the system response time remains the same or increases by a small amount as the number of users are increased. </a:t>
-            </a:r>
             <a:endParaRPr lang="en-US" dirty="0" smtClean="0"/>
           </a:p>
           <a:p>
             <a:r>
               <a:rPr lang="en-US" dirty="0" smtClean="0"/>
+              <a:t>In </a:t>
+            </a:r>
+            <a:r>
+              <a:rPr lang="en-US" dirty="0"/>
+              <a:t>this group, tests are designed to verify that the system can scale up to its engineering </a:t>
+            </a:r>
+            <a:r>
+              <a:rPr lang="en-US" dirty="0" smtClean="0"/>
+              <a:t>limits.</a:t>
+            </a:r>
+            <a:endParaRPr lang="en-US" dirty="0" smtClean="0"/>
+          </a:p>
+          <a:p>
+            <a:r>
+              <a:rPr lang="en-US" dirty="0" smtClean="0"/>
+              <a:t>A </a:t>
+            </a:r>
+            <a:r>
+              <a:rPr lang="en-US" dirty="0"/>
+              <a:t>system which works acceptably at one level of demand may not scale up to another </a:t>
+            </a:r>
+            <a:r>
+              <a:rPr lang="en-US" dirty="0" smtClean="0"/>
+              <a:t>level.</a:t>
+            </a:r>
+            <a:endParaRPr lang="en-US" dirty="0" smtClean="0"/>
+          </a:p>
+          <a:p>
+            <a:r>
+              <a:rPr lang="en-US" dirty="0" smtClean="0"/>
+              <a:t>Scaling </a:t>
+            </a:r>
+            <a:r>
+              <a:rPr lang="en-US" dirty="0"/>
+              <a:t>tests are conducted to ensure that the system response time remains the same or increases by a small amount as the number of users are increased. </a:t>
+            </a:r>
+            <a:endParaRPr lang="en-US" dirty="0" smtClean="0"/>
+          </a:p>
+          <a:p>
+            <a:r>
+              <a:rPr lang="en-US" dirty="0" smtClean="0"/>
               <a:t>Systems </a:t>
             </a:r>
             <a:r>
               <a:rPr lang="en-US" dirty="0"/>
               <a:t>may scale until they reach one or more engineering limits. </a:t>
             </a:r>
+            <a:endParaRPr lang="en-US" dirty="0"/>
           </a:p>
           <a:p>
             <a:endParaRPr lang="en-US" dirty="0"/>
@@ -14880,11 +14754,6 @@
         </p:txBody>
       </p:sp>
     </p:spTree>
-    <p:extLst>
-      <p:ext uri="{BB962C8B-B14F-4D97-AF65-F5344CB8AC3E}">
-        <p14:creationId xmlns:p14="http://schemas.microsoft.com/office/powerpoint/2010/main" val="4013540301"/>
-      </p:ext>
-    </p:extLst>
   </p:cSld>
   <p:clrMapOvr>
     <a:masterClrMapping/>
@@ -15004,15 +14873,11 @@
               <a:rPr lang="en-US" dirty="0"/>
               <a:t>the limit is exceeded and the system does fail, then the recovery mechanism should be invoked. </a:t>
             </a:r>
+            <a:endParaRPr lang="en-US" dirty="0"/>
           </a:p>
         </p:txBody>
       </p:sp>
     </p:spTree>
-    <p:extLst>
-      <p:ext uri="{BB962C8B-B14F-4D97-AF65-F5344CB8AC3E}">
-        <p14:creationId xmlns:p14="http://schemas.microsoft.com/office/powerpoint/2010/main" val="1411209925"/>
-      </p:ext>
-    </p:extLst>
   </p:cSld>
   <p:clrMapOvr>
     <a:masterClrMapping/>
@@ -15126,15 +14991,11 @@
               <a:rPr lang="en-US" dirty="0"/>
               <a:t>) the system slows down, (ii) the system encounters functionality problems, (iii) the system silently fails over, and (iv) the system crashes altogether.</a:t>
             </a:r>
+            <a:endParaRPr lang="en-US" dirty="0"/>
           </a:p>
         </p:txBody>
       </p:sp>
     </p:spTree>
-    <p:extLst>
-      <p:ext uri="{BB962C8B-B14F-4D97-AF65-F5344CB8AC3E}">
-        <p14:creationId xmlns:p14="http://schemas.microsoft.com/office/powerpoint/2010/main" val="4105089944"/>
-      </p:ext>
-    </p:extLst>
   </p:cSld>
   <p:clrMapOvr>
     <a:masterClrMapping/>
@@ -15185,6 +15046,7 @@
               <a:rPr lang="en-US" dirty="0"/>
               <a:t>RELIABILITY TESTS</a:t>
             </a:r>
+            <a:endParaRPr lang="en-US" dirty="0"/>
           </a:p>
         </p:txBody>
       </p:sp>
@@ -15243,6 +15105,7 @@
               <a:rPr lang="en-US" dirty="0" smtClean="0"/>
               <a:t>testing.</a:t>
             </a:r>
+            <a:endParaRPr lang="en-US" dirty="0" smtClean="0"/>
           </a:p>
           <a:p>
             <a:r>
@@ -15269,15 +15132,11 @@
               <a:rPr lang="en-US" dirty="0"/>
               <a:t> failures. </a:t>
             </a:r>
+            <a:endParaRPr lang="en-US" dirty="0"/>
           </a:p>
         </p:txBody>
       </p:sp>
     </p:spTree>
-    <p:extLst>
-      <p:ext uri="{BB962C8B-B14F-4D97-AF65-F5344CB8AC3E}">
-        <p14:creationId xmlns:p14="http://schemas.microsoft.com/office/powerpoint/2010/main" val="3754989330"/>
-      </p:ext>
-    </p:extLst>
   </p:cSld>
   <p:clrMapOvr>
     <a:masterClrMapping/>
@@ -15375,15 +15234,11 @@
               <a:rPr lang="en-US" dirty="0"/>
               <a:t>system testing, many defects are revealed and the code is modified to fix those defects. </a:t>
             </a:r>
+            <a:endParaRPr lang="en-US" dirty="0"/>
           </a:p>
         </p:txBody>
       </p:sp>
     </p:spTree>
-    <p:extLst>
-      <p:ext uri="{BB962C8B-B14F-4D97-AF65-F5344CB8AC3E}">
-        <p14:creationId xmlns:p14="http://schemas.microsoft.com/office/powerpoint/2010/main" val="1000527203"/>
-      </p:ext>
-    </p:extLst>
   </p:cSld>
   <p:clrMapOvr>
     <a:masterClrMapping/>
@@ -15463,6 +15318,7 @@
               <a:rPr lang="en-US" dirty="0" smtClean="0"/>
               <a:t>help. </a:t>
             </a:r>
+            <a:endParaRPr lang="en-US" dirty="0" smtClean="0"/>
           </a:p>
           <a:p>
             <a:r>
@@ -15523,11 +15379,6 @@
         </p:txBody>
       </p:sp>
     </p:spTree>
-    <p:extLst>
-      <p:ext uri="{BB962C8B-B14F-4D97-AF65-F5344CB8AC3E}">
-        <p14:creationId xmlns:p14="http://schemas.microsoft.com/office/powerpoint/2010/main" val="1236024203"/>
-      </p:ext>
-    </p:extLst>
   </p:cSld>
   <p:clrMapOvr>
     <a:masterClrMapping/>
@@ -15640,11 +15491,6 @@
         </p:txBody>
       </p:sp>
     </p:spTree>
-    <p:extLst>
-      <p:ext uri="{BB962C8B-B14F-4D97-AF65-F5344CB8AC3E}">
-        <p14:creationId xmlns:p14="http://schemas.microsoft.com/office/powerpoint/2010/main" val="3515226153"/>
-      </p:ext>
-    </p:extLst>
   </p:cSld>
   <p:clrMapOvr>
     <a:masterClrMapping/>
@@ -15724,6 +15570,7 @@
               <a:rPr lang="en-US" dirty="0" smtClean="0"/>
               <a:t>.</a:t>
             </a:r>
+            <a:endParaRPr lang="en-US" dirty="0" smtClean="0"/>
           </a:p>
           <a:p>
             <a:r>
@@ -15738,6 +15585,7 @@
               <a:rPr lang="en-US" dirty="0" smtClean="0"/>
               <a:t>criteria.</a:t>
             </a:r>
+            <a:endParaRPr lang="en-US" dirty="0" smtClean="0"/>
           </a:p>
           <a:p>
             <a:r>
@@ -15748,15 +15596,11 @@
               <a:rPr lang="en-US" dirty="0"/>
               <a:t>: Addresses defects arising from component interaction, data flow, external interfaces, and resource utilization.</a:t>
             </a:r>
+            <a:endParaRPr lang="en-US" dirty="0"/>
           </a:p>
         </p:txBody>
       </p:sp>
     </p:spTree>
-    <p:extLst>
-      <p:ext uri="{BB962C8B-B14F-4D97-AF65-F5344CB8AC3E}">
-        <p14:creationId xmlns:p14="http://schemas.microsoft.com/office/powerpoint/2010/main" val="882558538"/>
-      </p:ext>
-    </p:extLst>
   </p:cSld>
   <p:clrMapOvr>
     <a:masterClrMapping/>
@@ -15831,7 +15675,7 @@
                 <a:schemeClr val="dk1"/>
               </a:buClr>
               <a:buSzPts val="4400"/>
-              <a:buFont typeface="Calibri"/>
+              <a:buFont typeface="Calibri" panose="020F0502020204030204"/>
               <a:buNone/>
             </a:pPr>
             <a:r>
@@ -15900,7 +15744,7 @@
           <p:nvPr/>
         </p:nvPicPr>
         <p:blipFill>
-          <a:blip r:embed="rId3"/>
+          <a:blip r:embed="rId1"/>
           <a:stretch>
             <a:fillRect/>
           </a:stretch>
@@ -15966,6 +15810,7 @@
               <a:rPr lang="en-US" dirty="0"/>
               <a:t>Basic Tests</a:t>
             </a:r>
+            <a:endParaRPr lang="en-US" dirty="0"/>
           </a:p>
         </p:txBody>
       </p:sp>
@@ -16006,6 +15851,7 @@
               <a:rPr lang="en-US" dirty="0" smtClean="0"/>
               <a:t>.</a:t>
             </a:r>
+            <a:endParaRPr lang="en-US" dirty="0" smtClean="0"/>
           </a:p>
           <a:p>
             <a:r>
@@ -16016,6 +15862,7 @@
               <a:rPr lang="en-US" dirty="0" smtClean="0"/>
               <a:t>:</a:t>
             </a:r>
+            <a:endParaRPr lang="en-US" dirty="0" smtClean="0"/>
           </a:p>
           <a:p>
             <a:r>
@@ -16030,18 +15877,21 @@
               <a:rPr lang="en-US" b="1" dirty="0" smtClean="0"/>
               <a:t>:</a:t>
             </a:r>
+            <a:endParaRPr lang="en-US" b="1" dirty="0" smtClean="0"/>
           </a:p>
           <a:p>
             <a:r>
               <a:rPr lang="en-US" b="1" dirty="0" smtClean="0"/>
               <a:t>Light Emitting Diode Tests:</a:t>
             </a:r>
+            <a:endParaRPr lang="en-US" b="1" dirty="0" smtClean="0"/>
           </a:p>
           <a:p>
             <a:r>
               <a:rPr lang="en-US" b="1" dirty="0" smtClean="0"/>
               <a:t>Diagnostic Tests</a:t>
             </a:r>
+            <a:endParaRPr lang="en-US" b="1" dirty="0" smtClean="0"/>
           </a:p>
           <a:p>
             <a:pPr lvl="1"/>
@@ -16057,6 +15907,7 @@
               <a:rPr lang="en-US" b="1" dirty="0" smtClean="0"/>
               <a:t>-Test (POST)</a:t>
             </a:r>
+            <a:endParaRPr lang="en-US" b="1" dirty="0" smtClean="0"/>
           </a:p>
           <a:p>
             <a:pPr lvl="1"/>
@@ -16064,6 +15915,7 @@
               <a:rPr lang="en-US" b="1" dirty="0" smtClean="0"/>
               <a:t>Bit Error Test (BERT)</a:t>
             </a:r>
+            <a:endParaRPr lang="en-US" b="1" dirty="0" smtClean="0"/>
           </a:p>
           <a:p>
             <a:r>
@@ -16083,11 +15935,6 @@
         </p:txBody>
       </p:sp>
     </p:spTree>
-    <p:extLst>
-      <p:ext uri="{BB962C8B-B14F-4D97-AF65-F5344CB8AC3E}">
-        <p14:creationId xmlns:p14="http://schemas.microsoft.com/office/powerpoint/2010/main" val="4196551977"/>
-      </p:ext>
-    </p:extLst>
   </p:cSld>
   <p:clrMapOvr>
     <a:masterClrMapping/>
@@ -16151,7 +15998,7 @@
           <p:nvPr/>
         </p:nvPicPr>
         <p:blipFill>
-          <a:blip r:embed="rId3"/>
+          <a:blip r:embed="rId1"/>
           <a:stretch>
             <a:fillRect/>
           </a:stretch>
@@ -16167,11 +16014,6 @@
         </p:spPr>
       </p:pic>
     </p:spTree>
-    <p:extLst>
-      <p:ext uri="{BB962C8B-B14F-4D97-AF65-F5344CB8AC3E}">
-        <p14:creationId xmlns:p14="http://schemas.microsoft.com/office/powerpoint/2010/main" val="618817123"/>
-      </p:ext>
-    </p:extLst>
   </p:cSld>
   <p:clrMapOvr>
     <a:masterClrMapping/>
@@ -16222,6 +16064,7 @@
               <a:rPr lang="en-US" dirty="0"/>
               <a:t>ROBUSTNESSTESTS</a:t>
             </a:r>
+            <a:endParaRPr lang="en-US" dirty="0"/>
           </a:p>
         </p:txBody>
       </p:sp>
@@ -16279,15 +16122,11 @@
               <a:rPr lang="en-US" dirty="0"/>
               <a:t>is difficult to test for every combination of different operational states of the system or undesirable behavior of the environment.</a:t>
             </a:r>
+            <a:endParaRPr lang="en-US" dirty="0"/>
           </a:p>
         </p:txBody>
       </p:sp>
     </p:spTree>
-    <p:extLst>
-      <p:ext uri="{BB962C8B-B14F-4D97-AF65-F5344CB8AC3E}">
-        <p14:creationId xmlns:p14="http://schemas.microsoft.com/office/powerpoint/2010/main" val="247339177"/>
-      </p:ext>
-    </p:extLst>
   </p:cSld>
   <p:clrMapOvr>
     <a:masterClrMapping/>
@@ -16338,6 +16177,7 @@
               <a:rPr lang="en-US" dirty="0"/>
               <a:t>ROBUSTNESSTESTS</a:t>
             </a:r>
+            <a:endParaRPr lang="en-US" dirty="0"/>
           </a:p>
         </p:txBody>
       </p:sp>
@@ -16350,7 +16190,7 @@
           <p:nvPr/>
         </p:nvPicPr>
         <p:blipFill>
-          <a:blip r:embed="rId3"/>
+          <a:blip r:embed="rId1"/>
           <a:stretch>
             <a:fillRect/>
           </a:stretch>
@@ -16366,11 +16206,6 @@
         </p:spPr>
       </p:pic>
     </p:spTree>
-    <p:extLst>
-      <p:ext uri="{BB962C8B-B14F-4D97-AF65-F5344CB8AC3E}">
-        <p14:creationId xmlns:p14="http://schemas.microsoft.com/office/powerpoint/2010/main" val="653252802"/>
-      </p:ext>
-    </p:extLst>
   </p:cSld>
   <p:clrMapOvr>
     <a:masterClrMapping/>
@@ -16502,58 +16337,56 @@
               <a:rPr lang="en-US" dirty="0" smtClean="0"/>
               <a:t>testing. </a:t>
             </a:r>
-          </a:p>
-          <a:p>
-            <a:r>
-              <a:rPr lang="en-US" dirty="0" smtClean="0"/>
-              <a:t>Another </a:t>
-            </a:r>
-            <a:r>
-              <a:rPr lang="en-US" dirty="0"/>
-              <a:t>kind of interoperability test is called a(backward) compatibility </a:t>
-            </a:r>
-            <a:r>
-              <a:rPr lang="en-US" dirty="0" smtClean="0"/>
-              <a:t>test.</a:t>
-            </a:r>
-          </a:p>
-          <a:p>
-            <a:r>
-              <a:rPr lang="en-US" dirty="0" smtClean="0"/>
-              <a:t>Compatibility </a:t>
-            </a:r>
-            <a:r>
-              <a:rPr lang="en-US" dirty="0"/>
-              <a:t>tests verify that the system works the same way across different platforms, operating systems, and database </a:t>
-            </a:r>
-            <a:r>
-              <a:rPr lang="en-US" dirty="0" smtClean="0"/>
-              <a:t>management </a:t>
-            </a:r>
-            <a:r>
-              <a:rPr lang="en-US" dirty="0"/>
-              <a:t>systems. </a:t>
-            </a:r>
             <a:endParaRPr lang="en-US" dirty="0" smtClean="0"/>
           </a:p>
           <a:p>
             <a:r>
               <a:rPr lang="en-US" dirty="0" smtClean="0"/>
+              <a:t>Another </a:t>
+            </a:r>
+            <a:r>
+              <a:rPr lang="en-US" dirty="0"/>
+              <a:t>kind of interoperability test is called a(backward) compatibility </a:t>
+            </a:r>
+            <a:r>
+              <a:rPr lang="en-US" dirty="0" smtClean="0"/>
+              <a:t>test.</a:t>
+            </a:r>
+            <a:endParaRPr lang="en-US" dirty="0" smtClean="0"/>
+          </a:p>
+          <a:p>
+            <a:r>
+              <a:rPr lang="en-US" dirty="0" smtClean="0"/>
+              <a:t>Compatibility </a:t>
+            </a:r>
+            <a:r>
+              <a:rPr lang="en-US" dirty="0"/>
+              <a:t>tests verify that the system works the same way across different platforms, operating systems, and database </a:t>
+            </a:r>
+            <a:r>
+              <a:rPr lang="en-US" dirty="0" smtClean="0"/>
+              <a:t>management </a:t>
+            </a:r>
+            <a:r>
+              <a:rPr lang="en-US" dirty="0"/>
+              <a:t>systems. </a:t>
+            </a:r>
+            <a:endParaRPr lang="en-US" dirty="0" smtClean="0"/>
+          </a:p>
+          <a:p>
+            <a:r>
+              <a:rPr lang="en-US" dirty="0" smtClean="0"/>
               <a:t>Backward </a:t>
             </a:r>
             <a:r>
               <a:rPr lang="en-US" dirty="0"/>
               <a:t>compatibility tests verify that the current software build f lawlessly works with older version of platforms. </a:t>
             </a:r>
+            <a:endParaRPr lang="en-US" dirty="0"/>
           </a:p>
         </p:txBody>
       </p:sp>
     </p:spTree>
-    <p:extLst>
-      <p:ext uri="{BB962C8B-B14F-4D97-AF65-F5344CB8AC3E}">
-        <p14:creationId xmlns:p14="http://schemas.microsoft.com/office/powerpoint/2010/main" val="3072774181"/>
-      </p:ext>
-    </p:extLst>
   </p:cSld>
   <p:clrMapOvr>
     <a:masterClrMapping/>
@@ -16668,11 +16501,6 @@
         </p:txBody>
       </p:sp>
     </p:spTree>
-    <p:extLst>
-      <p:ext uri="{BB962C8B-B14F-4D97-AF65-F5344CB8AC3E}">
-        <p14:creationId xmlns:p14="http://schemas.microsoft.com/office/powerpoint/2010/main" val="4284672419"/>
-      </p:ext>
-    </p:extLst>
   </p:cSld>
   <p:clrMapOvr>
     <a:masterClrMapping/>
@@ -16963,8 +16791,11 @@
       </a:bgFillStyleLst>
     </a:fmtScheme>
   </a:themeElements>
-  <a:objectDefaults/>
-  <a:extraClrSchemeLst/>
+  <a:extLst>
+    <a:ext uri="{05A4C25C-085E-4340-85A3-A5531E510DB2}">
+      <thm15:themeFamily xmlns:thm15="http://schemas.microsoft.com/office/thememl/2012/main" name="Office Theme" id="{62F939B6-93AF-4DB8-9C6B-D6C7DFDC589F}" vid="{4A3C46E8-61CC-4603-A589-7422A47A8E4A}"/>
+    </a:ext>
+  </a:extLst>
 </a:theme>
 </file>
 
@@ -17244,7 +17075,10 @@
       </a:bgFillStyleLst>
     </a:fmtScheme>
   </a:themeElements>
-  <a:objectDefaults/>
-  <a:extraClrSchemeLst/>
+  <a:extLst>
+    <a:ext uri="{05A4C25C-085E-4340-85A3-A5531E510DB2}">
+      <thm15:themeFamily xmlns:thm15="http://schemas.microsoft.com/office/thememl/2012/main" name="Office Theme" id="{62F939B6-93AF-4DB8-9C6B-D6C7DFDC589F}" vid="{4A3C46E8-61CC-4603-A589-7422A47A8E4A}"/>
+    </a:ext>
+  </a:extLst>
 </a:theme>
 </file>